--- a/VAJRA.pptx
+++ b/VAJRA.pptx
@@ -4,28 +4,30 @@
   <p:sldMasterIdLst>
     <p:sldMasterId id="2147483648" r:id="rId1"/>
   </p:sldMasterIdLst>
+  <p:notesMasterIdLst>
+    <p:notesMasterId r:id="rId20"/>
+  </p:notesMasterIdLst>
   <p:sldIdLst>
-    <p:sldId id="256" r:id="rId7"/>
-    <p:sldId id="257" r:id="rId9"/>
-    <p:sldId id="258" r:id="rId10"/>
-    <p:sldId id="259" r:id="rId11"/>
-    <p:sldId id="260" r:id="rId12"/>
-    <p:sldId id="261" r:id="rId13"/>
-    <p:sldId id="262" r:id="rId14"/>
-    <p:sldId id="263" r:id="rId15"/>
-    <p:sldId id="264" r:id="rId16"/>
-    <p:sldId id="265" r:id="rId17"/>
-    <p:sldId id="266" r:id="rId18"/>
-    <p:sldId id="267" r:id="rId19"/>
-    <p:sldId id="268" r:id="rId20"/>
-    <p:sldId id="269" r:id="rId21"/>
-    <p:sldId id="270" r:id="rId22"/>
-    <p:sldId id="271" r:id="rId23"/>
-    <p:sldId id="272" r:id="rId24"/>
-    <p:sldId id="273" r:id="rId25"/>
-    <p:sldId id="274" r:id="rId26"/>
+    <p:sldId id="256" r:id="rId2"/>
+    <p:sldId id="257" r:id="rId3"/>
+    <p:sldId id="258" r:id="rId4"/>
+    <p:sldId id="259" r:id="rId5"/>
+    <p:sldId id="260" r:id="rId6"/>
+    <p:sldId id="261" r:id="rId7"/>
+    <p:sldId id="262" r:id="rId8"/>
+    <p:sldId id="263" r:id="rId9"/>
+    <p:sldId id="264" r:id="rId10"/>
+    <p:sldId id="265" r:id="rId11"/>
+    <p:sldId id="266" r:id="rId12"/>
+    <p:sldId id="267" r:id="rId13"/>
+    <p:sldId id="268" r:id="rId14"/>
+    <p:sldId id="269" r:id="rId15"/>
+    <p:sldId id="270" r:id="rId16"/>
+    <p:sldId id="271" r:id="rId17"/>
+    <p:sldId id="272" r:id="rId18"/>
+    <p:sldId id="273" r:id="rId19"/>
   </p:sldIdLst>
-  <p:sldSz cx="12191695" cy="6858000" type="screen4x3"/>
+  <p:sldSz cx="12192000" cy="6858000"/>
   <p:notesSz cx="6858000" cy="9144000"/>
   <p:defaultTextStyle>
     <a:defPPr>
@@ -122,11 +124,27 @@
       </a:defRPr>
     </a:lvl9pPr>
   </p:defaultTextStyle>
+  <p:extLst>
+    <p:ext uri="{EFAFB233-063F-42B5-8137-9DF3F51BA10A}">
+      <p15:sldGuideLst xmlns:p15="http://schemas.microsoft.com/office/powerpoint/2012/main">
+        <p15:guide id="1" orient="horz" pos="2160">
+          <p15:clr>
+            <a:srgbClr val="A4A3A4"/>
+          </p15:clr>
+        </p15:guide>
+        <p15:guide id="2" pos="2880">
+          <p15:clr>
+            <a:srgbClr val="A4A3A4"/>
+          </p15:clr>
+        </p15:guide>
+      </p15:sldGuideLst>
+    </p:ext>
+  </p:extLst>
 </p:presentation>
 </file>
 
 <file path=ppt/notesMasters/notesMaster1.xml><?xml version="1.0" encoding="utf-8"?>
-<p:notesMaster xmlns:a="http://schemas.openxmlformats.org/drawingml/2006/main" xmlns:p="http://schemas.openxmlformats.org/presentationml/2006/main" xmlns:r="http://schemas.openxmlformats.org/officeDocument/2006/relationships">
+<p:notesMaster xmlns:a="http://schemas.openxmlformats.org/drawingml/2006/main" xmlns:r="http://schemas.openxmlformats.org/officeDocument/2006/relationships" xmlns:p="http://schemas.openxmlformats.org/presentationml/2006/main">
   <p:cSld>
     <p:bg>
       <p:bgRef idx="1001">
@@ -147,241 +165,16 @@
           <a:chExt cx="0" cy="0"/>
         </a:xfrm>
       </p:grpSpPr>
-      <p:sp>
-        <p:nvSpPr>
-          <p:cNvPr id="2" name="Header Placeholder 1"/>
-          <p:cNvSpPr>
-            <a:spLocks noGrp="1"/>
-          </p:cNvSpPr>
-          <p:nvPr>
-            <p:ph type="hdr" sz="quarter"/>
-          </p:nvPr>
-        </p:nvSpPr>
-        <p:spPr>
-          <a:xfrm>
-            <a:off x="0" y="0"/>
-            <a:ext cx="2971800" cy="457200"/>
-          </a:xfrm>
-          <a:prstGeom prst="rect">
-            <a:avLst/>
-          </a:prstGeom>
-        </p:spPr>
-        <p:txBody>
-          <a:bodyPr vert="horz" lIns="91440" tIns="45720" rIns="91440" bIns="45720" rtlCol="0"/>
-          <a:lstStyle>
-            <a:lvl1pPr algn="l">
-              <a:defRPr sz="1200"/>
-            </a:lvl1pPr>
-          </a:lstStyle>
-          <a:p>
-            <a:endParaRPr lang="en-US"/>
-          </a:p>
-        </p:txBody>
-      </p:sp>
-      <p:sp>
-        <p:nvSpPr>
-          <p:cNvPr id="3" name="Date Placeholder 2"/>
-          <p:cNvSpPr>
-            <a:spLocks noGrp="1"/>
-          </p:cNvSpPr>
-          <p:nvPr>
-            <p:ph type="dt" idx="1"/>
-          </p:nvPr>
-        </p:nvSpPr>
-        <p:spPr>
-          <a:xfrm>
-            <a:off x="3884613" y="0"/>
-            <a:ext cx="2971800" cy="457200"/>
-          </a:xfrm>
-          <a:prstGeom prst="rect">
-            <a:avLst/>
-          </a:prstGeom>
-        </p:spPr>
-        <p:txBody>
-          <a:bodyPr vert="horz" lIns="91440" tIns="45720" rIns="91440" bIns="45720" rtlCol="0"/>
-          <a:lstStyle>
-            <a:lvl1pPr algn="r">
-              <a:defRPr sz="1200"/>
-            </a:lvl1pPr>
-          </a:lstStyle>
-          <a:p>
-            <a:fld id="{0F89C1C7-3DCD-1040-A9CF-14679D8B5DDD}" type="datetimeFigureOut">
-              <a:rPr lang="en-US" smtClean="0"/>
-              <a:t>10/17/16</a:t>
-            </a:fld>
-            <a:endParaRPr lang="en-US"/>
-          </a:p>
-        </p:txBody>
-      </p:sp>
-      <p:sp>
-        <p:nvSpPr>
-          <p:cNvPr id="4" name="Slide Image Placeholder 3"/>
-          <p:cNvSpPr>
-            <a:spLocks noGrp="1" noRot="1" noChangeAspect="1"/>
-          </p:cNvSpPr>
-          <p:nvPr>
-            <p:ph type="sldImg" idx="2"/>
-          </p:nvPr>
-        </p:nvSpPr>
-        <p:spPr>
-          <a:xfrm>
-            <a:off x="1143000" y="685800"/>
-            <a:ext cx="4572000" cy="3429000"/>
-          </a:xfrm>
-          <a:prstGeom prst="rect">
-            <a:avLst/>
-          </a:prstGeom>
-          <a:noFill/>
-          <a:ln w="12700">
-            <a:solidFill>
-              <a:prstClr val="black"/>
-            </a:solidFill>
-          </a:ln>
-        </p:spPr>
-        <p:txBody>
-          <a:bodyPr vert="horz" lIns="91440" tIns="45720" rIns="91440" bIns="45720" rtlCol="0" anchor="ctr"/>
-          <a:lstStyle/>
-          <a:p>
-            <a:endParaRPr lang="en-US"/>
-          </a:p>
-        </p:txBody>
-      </p:sp>
-      <p:sp>
-        <p:nvSpPr>
-          <p:cNvPr id="5" name="Notes Placeholder 4"/>
-          <p:cNvSpPr>
-            <a:spLocks noGrp="1"/>
-          </p:cNvSpPr>
-          <p:nvPr>
-            <p:ph type="body" sz="quarter" idx="3"/>
-          </p:nvPr>
-        </p:nvSpPr>
-        <p:spPr>
-          <a:xfrm>
-            <a:off x="685800" y="4343400"/>
-            <a:ext cx="5486400" cy="4114800"/>
-          </a:xfrm>
-          <a:prstGeom prst="rect">
-            <a:avLst/>
-          </a:prstGeom>
-        </p:spPr>
-        <p:txBody>
-          <a:bodyPr vert="horz" lIns="91440" tIns="45720" rIns="91440" bIns="45720" rtlCol="0"/>
-          <a:lstStyle/>
-          <a:p>
-            <a:pPr lvl="0"/>
-            <a:r>
-              <a:rPr lang="en-US" smtClean="0"/>
-              <a:t>Click to edit Master text styles</a:t>
-            </a:r>
-          </a:p>
-          <a:p>
-            <a:pPr lvl="1"/>
-            <a:r>
-              <a:rPr lang="en-US" smtClean="0"/>
-              <a:t>Second level</a:t>
-            </a:r>
-          </a:p>
-          <a:p>
-            <a:pPr lvl="2"/>
-            <a:r>
-              <a:rPr lang="en-US" smtClean="0"/>
-              <a:t>Third level</a:t>
-            </a:r>
-          </a:p>
-          <a:p>
-            <a:pPr lvl="3"/>
-            <a:r>
-              <a:rPr lang="en-US" smtClean="0"/>
-              <a:t>Fourth level</a:t>
-            </a:r>
-          </a:p>
-          <a:p>
-            <a:pPr lvl="4"/>
-            <a:r>
-              <a:rPr lang="en-US" smtClean="0"/>
-              <a:t>Fifth level</a:t>
-            </a:r>
-            <a:endParaRPr lang="en-US"/>
-          </a:p>
-        </p:txBody>
-      </p:sp>
-      <p:sp>
-        <p:nvSpPr>
-          <p:cNvPr id="6" name="Footer Placeholder 5"/>
-          <p:cNvSpPr>
-            <a:spLocks noGrp="1"/>
-          </p:cNvSpPr>
-          <p:nvPr>
-            <p:ph type="ftr" sz="quarter" idx="4"/>
-          </p:nvPr>
-        </p:nvSpPr>
-        <p:spPr>
-          <a:xfrm>
-            <a:off x="0" y="8685213"/>
-            <a:ext cx="2971800" cy="457200"/>
-          </a:xfrm>
-          <a:prstGeom prst="rect">
-            <a:avLst/>
-          </a:prstGeom>
-        </p:spPr>
-        <p:txBody>
-          <a:bodyPr vert="horz" lIns="91440" tIns="45720" rIns="91440" bIns="45720" rtlCol="0" anchor="b"/>
-          <a:lstStyle>
-            <a:lvl1pPr algn="l">
-              <a:defRPr sz="1200"/>
-            </a:lvl1pPr>
-          </a:lstStyle>
-          <a:p>
-            <a:endParaRPr lang="en-US"/>
-          </a:p>
-        </p:txBody>
-      </p:sp>
-      <p:sp>
-        <p:nvSpPr>
-          <p:cNvPr id="7" name="Slide Number Placeholder 6"/>
-          <p:cNvSpPr>
-            <a:spLocks noGrp="1"/>
-          </p:cNvSpPr>
-          <p:nvPr>
-            <p:ph type="sldNum" sz="quarter" idx="5"/>
-          </p:nvPr>
-        </p:nvSpPr>
-        <p:spPr>
-          <a:xfrm>
-            <a:off x="3884613" y="8685213"/>
-            <a:ext cx="2971800" cy="457200"/>
-          </a:xfrm>
-          <a:prstGeom prst="rect">
-            <a:avLst/>
-          </a:prstGeom>
-        </p:spPr>
-        <p:txBody>
-          <a:bodyPr vert="horz" lIns="91440" tIns="45720" rIns="91440" bIns="45720" rtlCol="0" anchor="b"/>
-          <a:lstStyle>
-            <a:lvl1pPr algn="r">
-              <a:defRPr sz="1200"/>
-            </a:lvl1pPr>
-          </a:lstStyle>
-          <a:p>
-            <a:fld id="{BB5E49A5-4136-284D-997B-48E1D791AD67}" type="slidenum">
-              <a:rPr lang="en-US" smtClean="0"/>
-              <a:t>‹#›</a:t>
-            </a:fld>
-            <a:endParaRPr lang="en-US"/>
-          </a:p>
-        </p:txBody>
-      </p:sp>
     </p:spTree>
     <p:extLst>
       <p:ext uri="{BB962C8B-B14F-4D97-AF65-F5344CB8AC3E}">
-        <p14:creationId xmlns:p14="http://schemas.microsoft.com/office/powerpoint/2010/main" val="2623252185"/>
+        <p14:creationId xmlns:p14="http://schemas.microsoft.com/office/powerpoint/2010/main" val="113913841"/>
       </p:ext>
     </p:extLst>
   </p:cSld>
   <p:clrMap bg1="lt1" tx1="dk1" bg2="lt2" tx2="dk2" accent1="accent1" accent2="accent2" accent3="accent3" accent4="accent4" accent5="accent5" accent6="accent6" hlink="hlink" folHlink="folHlink"/>
   <p:notesStyle>
-    <a:lvl1pPr marL="0" algn="l" defTabSz="457200" rtl="0" eaLnBrk="1" latinLnBrk="0" hangingPunct="1">
+    <a:lvl1pPr marL="0" algn="l" defTabSz="914400" rtl="0" eaLnBrk="1" latinLnBrk="0" hangingPunct="1">
       <a:defRPr sz="1200" kern="1200">
         <a:solidFill>
           <a:schemeClr val="tx1"/>
@@ -391,7 +184,7 @@
         <a:cs typeface="+mn-cs"/>
       </a:defRPr>
     </a:lvl1pPr>
-    <a:lvl2pPr marL="457200" algn="l" defTabSz="457200" rtl="0" eaLnBrk="1" latinLnBrk="0" hangingPunct="1">
+    <a:lvl2pPr marL="457200" algn="l" defTabSz="914400" rtl="0" eaLnBrk="1" latinLnBrk="0" hangingPunct="1">
       <a:defRPr sz="1200" kern="1200">
         <a:solidFill>
           <a:schemeClr val="tx1"/>
@@ -401,7 +194,7 @@
         <a:cs typeface="+mn-cs"/>
       </a:defRPr>
     </a:lvl2pPr>
-    <a:lvl3pPr marL="914400" algn="l" defTabSz="457200" rtl="0" eaLnBrk="1" latinLnBrk="0" hangingPunct="1">
+    <a:lvl3pPr marL="914400" algn="l" defTabSz="914400" rtl="0" eaLnBrk="1" latinLnBrk="0" hangingPunct="1">
       <a:defRPr sz="1200" kern="1200">
         <a:solidFill>
           <a:schemeClr val="tx1"/>
@@ -411,7 +204,7 @@
         <a:cs typeface="+mn-cs"/>
       </a:defRPr>
     </a:lvl3pPr>
-    <a:lvl4pPr marL="1371600" algn="l" defTabSz="457200" rtl="0" eaLnBrk="1" latinLnBrk="0" hangingPunct="1">
+    <a:lvl4pPr marL="1371600" algn="l" defTabSz="914400" rtl="0" eaLnBrk="1" latinLnBrk="0" hangingPunct="1">
       <a:defRPr sz="1200" kern="1200">
         <a:solidFill>
           <a:schemeClr val="tx1"/>
@@ -421,7 +214,7 @@
         <a:cs typeface="+mn-cs"/>
       </a:defRPr>
     </a:lvl4pPr>
-    <a:lvl5pPr marL="1828800" algn="l" defTabSz="457200" rtl="0" eaLnBrk="1" latinLnBrk="0" hangingPunct="1">
+    <a:lvl5pPr marL="1828800" algn="l" defTabSz="914400" rtl="0" eaLnBrk="1" latinLnBrk="0" hangingPunct="1">
       <a:defRPr sz="1200" kern="1200">
         <a:solidFill>
           <a:schemeClr val="tx1"/>
@@ -431,7 +224,7 @@
         <a:cs typeface="+mn-cs"/>
       </a:defRPr>
     </a:lvl5pPr>
-    <a:lvl6pPr marL="2286000" algn="l" defTabSz="457200" rtl="0" eaLnBrk="1" latinLnBrk="0" hangingPunct="1">
+    <a:lvl6pPr marL="2286000" algn="l" defTabSz="914400" rtl="0" eaLnBrk="1" latinLnBrk="0" hangingPunct="1">
       <a:defRPr sz="1200" kern="1200">
         <a:solidFill>
           <a:schemeClr val="tx1"/>
@@ -441,7 +234,7 @@
         <a:cs typeface="+mn-cs"/>
       </a:defRPr>
     </a:lvl6pPr>
-    <a:lvl7pPr marL="2743200" algn="l" defTabSz="457200" rtl="0" eaLnBrk="1" latinLnBrk="0" hangingPunct="1">
+    <a:lvl7pPr marL="2743200" algn="l" defTabSz="914400" rtl="0" eaLnBrk="1" latinLnBrk="0" hangingPunct="1">
       <a:defRPr sz="1200" kern="1200">
         <a:solidFill>
           <a:schemeClr val="tx1"/>
@@ -451,7 +244,7 @@
         <a:cs typeface="+mn-cs"/>
       </a:defRPr>
     </a:lvl7pPr>
-    <a:lvl8pPr marL="3200400" algn="l" defTabSz="457200" rtl="0" eaLnBrk="1" latinLnBrk="0" hangingPunct="1">
+    <a:lvl8pPr marL="3200400" algn="l" defTabSz="914400" rtl="0" eaLnBrk="1" latinLnBrk="0" hangingPunct="1">
       <a:defRPr sz="1200" kern="1200">
         <a:solidFill>
           <a:schemeClr val="tx1"/>
@@ -461,7 +254,7 @@
         <a:cs typeface="+mn-cs"/>
       </a:defRPr>
     </a:lvl8pPr>
-    <a:lvl9pPr marL="3657600" algn="l" defTabSz="457200" rtl="0" eaLnBrk="1" latinLnBrk="0" hangingPunct="1">
+    <a:lvl9pPr marL="3657600" algn="l" defTabSz="914400" rtl="0" eaLnBrk="1" latinLnBrk="0" hangingPunct="1">
       <a:defRPr sz="1200" kern="1200">
         <a:solidFill>
           <a:schemeClr val="tx1"/>
@@ -476,7 +269,7 @@
 </file>
 
 <file path=ppt/notesSlides/notesSlide1.xml><?xml version="1.0" encoding="utf-8"?>
-<p:notes xmlns:a="http://schemas.openxmlformats.org/drawingml/2006/main" xmlns:p="http://schemas.openxmlformats.org/presentationml/2006/main" xmlns:r="http://schemas.openxmlformats.org/officeDocument/2006/relationships">
+<p:notes xmlns:a="http://schemas.openxmlformats.org/drawingml/2006/main" xmlns:r="http://schemas.openxmlformats.org/officeDocument/2006/relationships" xmlns:p="http://schemas.openxmlformats.org/presentationml/2006/main">
   <p:cSld>
     <p:spTree>
       <p:nvGrpSpPr>
@@ -496,7 +289,7 @@
         <p:nvSpPr>
           <p:cNvPr id="2" name="Slide Image Placeholder 1"/>
           <p:cNvSpPr>
-            <a:spLocks noGrp="1"/>
+            <a:spLocks noGrp="1" noRot="1" noChangeAspect="1"/>
           </p:cNvSpPr>
           <p:nvPr>
             <p:ph type="sldImg" idx="2"/>
@@ -511,7 +304,7 @@
             <a:spLocks noGrp="1"/>
           </p:cNvSpPr>
           <p:nvPr>
-            <p:ph type="body" idx="3" sz="quarter"/>
+            <p:ph type="body" sz="quarter" idx="3"/>
           </p:nvPr>
         </p:nvSpPr>
         <p:spPr/>
@@ -532,7 +325,7 @@
             <a:spLocks noGrp="1"/>
           </p:cNvSpPr>
           <p:nvPr>
-            <p:ph type="sldNum" idx="5" sz="quarter"/>
+            <p:ph type="sldNum" sz="quarter" idx="5"/>
           </p:nvPr>
         </p:nvSpPr>
         <p:spPr/>
@@ -546,7 +339,7 @@
 </file>
 
 <file path=ppt/notesSlides/notesSlide10.xml><?xml version="1.0" encoding="utf-8"?>
-<p:notes xmlns:a="http://schemas.openxmlformats.org/drawingml/2006/main" xmlns:p="http://schemas.openxmlformats.org/presentationml/2006/main" xmlns:r="http://schemas.openxmlformats.org/officeDocument/2006/relationships">
+<p:notes xmlns:a="http://schemas.openxmlformats.org/drawingml/2006/main" xmlns:r="http://schemas.openxmlformats.org/officeDocument/2006/relationships" xmlns:p="http://schemas.openxmlformats.org/presentationml/2006/main">
   <p:cSld>
     <p:spTree>
       <p:nvGrpSpPr>
@@ -566,7 +359,7 @@
         <p:nvSpPr>
           <p:cNvPr id="2" name="Slide Image Placeholder 1"/>
           <p:cNvSpPr>
-            <a:spLocks noGrp="1"/>
+            <a:spLocks noGrp="1" noRot="1" noChangeAspect="1"/>
           </p:cNvSpPr>
           <p:nvPr>
             <p:ph type="sldImg" idx="2"/>
@@ -581,7 +374,7 @@
             <a:spLocks noGrp="1"/>
           </p:cNvSpPr>
           <p:nvPr>
-            <p:ph type="body" idx="3" sz="quarter"/>
+            <p:ph type="body" sz="quarter" idx="3"/>
           </p:nvPr>
         </p:nvSpPr>
         <p:spPr/>
@@ -602,7 +395,7 @@
             <a:spLocks noGrp="1"/>
           </p:cNvSpPr>
           <p:nvPr>
-            <p:ph type="sldNum" idx="5" sz="quarter"/>
+            <p:ph type="sldNum" sz="quarter" idx="5"/>
           </p:nvPr>
         </p:nvSpPr>
         <p:spPr/>
@@ -616,7 +409,7 @@
 </file>
 
 <file path=ppt/notesSlides/notesSlide11.xml><?xml version="1.0" encoding="utf-8"?>
-<p:notes xmlns:a="http://schemas.openxmlformats.org/drawingml/2006/main" xmlns:p="http://schemas.openxmlformats.org/presentationml/2006/main" xmlns:r="http://schemas.openxmlformats.org/officeDocument/2006/relationships">
+<p:notes xmlns:a="http://schemas.openxmlformats.org/drawingml/2006/main" xmlns:r="http://schemas.openxmlformats.org/officeDocument/2006/relationships" xmlns:p="http://schemas.openxmlformats.org/presentationml/2006/main">
   <p:cSld>
     <p:spTree>
       <p:nvGrpSpPr>
@@ -636,7 +429,7 @@
         <p:nvSpPr>
           <p:cNvPr id="2" name="Slide Image Placeholder 1"/>
           <p:cNvSpPr>
-            <a:spLocks noGrp="1"/>
+            <a:spLocks noGrp="1" noRot="1" noChangeAspect="1"/>
           </p:cNvSpPr>
           <p:nvPr>
             <p:ph type="sldImg" idx="2"/>
@@ -651,7 +444,7 @@
             <a:spLocks noGrp="1"/>
           </p:cNvSpPr>
           <p:nvPr>
-            <p:ph type="body" idx="3" sz="quarter"/>
+            <p:ph type="body" sz="quarter" idx="3"/>
           </p:nvPr>
         </p:nvSpPr>
         <p:spPr/>
@@ -672,7 +465,7 @@
             <a:spLocks noGrp="1"/>
           </p:cNvSpPr>
           <p:nvPr>
-            <p:ph type="sldNum" idx="5" sz="quarter"/>
+            <p:ph type="sldNum" sz="quarter" idx="5"/>
           </p:nvPr>
         </p:nvSpPr>
         <p:spPr/>
@@ -686,7 +479,7 @@
 </file>
 
 <file path=ppt/notesSlides/notesSlide12.xml><?xml version="1.0" encoding="utf-8"?>
-<p:notes xmlns:a="http://schemas.openxmlformats.org/drawingml/2006/main" xmlns:p="http://schemas.openxmlformats.org/presentationml/2006/main" xmlns:r="http://schemas.openxmlformats.org/officeDocument/2006/relationships">
+<p:notes xmlns:a="http://schemas.openxmlformats.org/drawingml/2006/main" xmlns:r="http://schemas.openxmlformats.org/officeDocument/2006/relationships" xmlns:p="http://schemas.openxmlformats.org/presentationml/2006/main">
   <p:cSld>
     <p:spTree>
       <p:nvGrpSpPr>
@@ -706,7 +499,7 @@
         <p:nvSpPr>
           <p:cNvPr id="2" name="Slide Image Placeholder 1"/>
           <p:cNvSpPr>
-            <a:spLocks noGrp="1"/>
+            <a:spLocks noGrp="1" noRot="1" noChangeAspect="1"/>
           </p:cNvSpPr>
           <p:nvPr>
             <p:ph type="sldImg" idx="2"/>
@@ -721,7 +514,7 @@
             <a:spLocks noGrp="1"/>
           </p:cNvSpPr>
           <p:nvPr>
-            <p:ph type="body" idx="3" sz="quarter"/>
+            <p:ph type="body" sz="quarter" idx="3"/>
           </p:nvPr>
         </p:nvSpPr>
         <p:spPr/>
@@ -733,7 +526,9 @@
               <a:t>The right fix is generator realism, not deleting a legitimate signal because we drew it too cleanly. Second artifact: token_assurance_vs_device_age, AUC 0.9652 on 2.23% support, because every attacked provisioning gets device_age = uniform(0,1) and our generator omits the commonest benign case — new phone, added my card.</a:t>
             </a:r>
           </a:p>
-          <a:p/>
+          <a:p>
+            <a:endParaRPr/>
+          </a:p>
           <a:p>
             <a:r>
               <a:t>Also be ready: 8 of the top 25 features have standalone AUC below 0.5. Expected — a tree uses them through interactions, not marginally.</a:t>
@@ -748,7 +543,7 @@
             <a:spLocks noGrp="1"/>
           </p:cNvSpPr>
           <p:nvPr>
-            <p:ph type="sldNum" idx="5" sz="quarter"/>
+            <p:ph type="sldNum" sz="quarter" idx="5"/>
           </p:nvPr>
         </p:nvSpPr>
         <p:spPr/>
@@ -762,7 +557,7 @@
 </file>
 
 <file path=ppt/notesSlides/notesSlide13.xml><?xml version="1.0" encoding="utf-8"?>
-<p:notes xmlns:a="http://schemas.openxmlformats.org/drawingml/2006/main" xmlns:p="http://schemas.openxmlformats.org/presentationml/2006/main" xmlns:r="http://schemas.openxmlformats.org/officeDocument/2006/relationships">
+<p:notes xmlns:a="http://schemas.openxmlformats.org/drawingml/2006/main" xmlns:r="http://schemas.openxmlformats.org/officeDocument/2006/relationships" xmlns:p="http://schemas.openxmlformats.org/presentationml/2006/main">
   <p:cSld>
     <p:spTree>
       <p:nvGrpSpPr>
@@ -782,7 +577,7 @@
         <p:nvSpPr>
           <p:cNvPr id="2" name="Slide Image Placeholder 1"/>
           <p:cNvSpPr>
-            <a:spLocks noGrp="1"/>
+            <a:spLocks noGrp="1" noRot="1" noChangeAspect="1"/>
           </p:cNvSpPr>
           <p:nvPr>
             <p:ph type="sldImg" idx="2"/>
@@ -797,7 +592,7 @@
             <a:spLocks noGrp="1"/>
           </p:cNvSpPr>
           <p:nvPr>
-            <p:ph type="body" idx="3" sz="quarter"/>
+            <p:ph type="body" sz="quarter" idx="3"/>
           </p:nvPr>
         </p:nvSpPr>
         <p:spPr/>
@@ -809,7 +604,9 @@
               <a:t>We could have left this off. The gap is the price of methodological honesty.</a:t>
             </a:r>
           </a:p>
-          <a:p/>
+          <a:p>
+            <a:endParaRPr/>
+          </a:p>
           <a:p>
             <a:r>
               <a:t>IF ASKED to prove the gap is the future-label leak: we have a natural experiment. We added five features closing a real coverage hole. The replica gained +0.0047 PR-AUC from them; we gained -0.0024. The only difference on that axis is label maturity — it could learn from them and we could not.</a:t>
@@ -824,7 +621,7 @@
             <a:spLocks noGrp="1"/>
           </p:cNvSpPr>
           <p:nvPr>
-            <p:ph type="sldNum" idx="5" sz="quarter"/>
+            <p:ph type="sldNum" sz="quarter" idx="5"/>
           </p:nvPr>
         </p:nvSpPr>
         <p:spPr/>
@@ -838,7 +635,7 @@
 </file>
 
 <file path=ppt/notesSlides/notesSlide14.xml><?xml version="1.0" encoding="utf-8"?>
-<p:notes xmlns:a="http://schemas.openxmlformats.org/drawingml/2006/main" xmlns:p="http://schemas.openxmlformats.org/presentationml/2006/main" xmlns:r="http://schemas.openxmlformats.org/officeDocument/2006/relationships">
+<p:notes xmlns:a="http://schemas.openxmlformats.org/drawingml/2006/main" xmlns:r="http://schemas.openxmlformats.org/officeDocument/2006/relationships" xmlns:p="http://schemas.openxmlformats.org/presentationml/2006/main">
   <p:cSld>
     <p:spTree>
       <p:nvGrpSpPr>
@@ -858,7 +655,7 @@
         <p:nvSpPr>
           <p:cNvPr id="2" name="Slide Image Placeholder 1"/>
           <p:cNvSpPr>
-            <a:spLocks noGrp="1"/>
+            <a:spLocks noGrp="1" noRot="1" noChangeAspect="1"/>
           </p:cNvSpPr>
           <p:nvPr>
             <p:ph type="sldImg" idx="2"/>
@@ -873,7 +670,7 @@
             <a:spLocks noGrp="1"/>
           </p:cNvSpPr>
           <p:nvPr>
-            <p:ph type="body" idx="3" sz="quarter"/>
+            <p:ph type="body" sz="quarter" idx="3"/>
           </p:nvPr>
         </p:nvSpPr>
         <p:spPr/>
@@ -894,7 +691,7 @@
             <a:spLocks noGrp="1"/>
           </p:cNvSpPr>
           <p:nvPr>
-            <p:ph type="sldNum" idx="5" sz="quarter"/>
+            <p:ph type="sldNum" sz="quarter" idx="5"/>
           </p:nvPr>
         </p:nvSpPr>
         <p:spPr/>
@@ -908,7 +705,7 @@
 </file>
 
 <file path=ppt/notesSlides/notesSlide15.xml><?xml version="1.0" encoding="utf-8"?>
-<p:notes xmlns:a="http://schemas.openxmlformats.org/drawingml/2006/main" xmlns:p="http://schemas.openxmlformats.org/presentationml/2006/main" xmlns:r="http://schemas.openxmlformats.org/officeDocument/2006/relationships">
+<p:notes xmlns:a="http://schemas.openxmlformats.org/drawingml/2006/main" xmlns:r="http://schemas.openxmlformats.org/officeDocument/2006/relationships" xmlns:p="http://schemas.openxmlformats.org/presentationml/2006/main">
   <p:cSld>
     <p:spTree>
       <p:nvGrpSpPr>
@@ -928,7 +725,7 @@
         <p:nvSpPr>
           <p:cNvPr id="2" name="Slide Image Placeholder 1"/>
           <p:cNvSpPr>
-            <a:spLocks noGrp="1"/>
+            <a:spLocks noGrp="1" noRot="1" noChangeAspect="1"/>
           </p:cNvSpPr>
           <p:nvPr>
             <p:ph type="sldImg" idx="2"/>
@@ -943,7 +740,7 @@
             <a:spLocks noGrp="1"/>
           </p:cNvSpPr>
           <p:nvPr>
-            <p:ph type="body" idx="3" sz="quarter"/>
+            <p:ph type="body" sz="quarter" idx="3"/>
           </p:nvPr>
         </p:nvSpPr>
         <p:spPr/>
@@ -964,7 +761,7 @@
             <a:spLocks noGrp="1"/>
           </p:cNvSpPr>
           <p:nvPr>
-            <p:ph type="sldNum" idx="5" sz="quarter"/>
+            <p:ph type="sldNum" sz="quarter" idx="5"/>
           </p:nvPr>
         </p:nvSpPr>
         <p:spPr/>
@@ -978,7 +775,7 @@
 </file>
 
 <file path=ppt/notesSlides/notesSlide16.xml><?xml version="1.0" encoding="utf-8"?>
-<p:notes xmlns:a="http://schemas.openxmlformats.org/drawingml/2006/main" xmlns:p="http://schemas.openxmlformats.org/presentationml/2006/main" xmlns:r="http://schemas.openxmlformats.org/officeDocument/2006/relationships">
+<p:notes xmlns:a="http://schemas.openxmlformats.org/drawingml/2006/main" xmlns:r="http://schemas.openxmlformats.org/officeDocument/2006/relationships" xmlns:p="http://schemas.openxmlformats.org/presentationml/2006/main">
   <p:cSld>
     <p:spTree>
       <p:nvGrpSpPr>
@@ -998,7 +795,7 @@
         <p:nvSpPr>
           <p:cNvPr id="2" name="Slide Image Placeholder 1"/>
           <p:cNvSpPr>
-            <a:spLocks noGrp="1"/>
+            <a:spLocks noGrp="1" noRot="1" noChangeAspect="1"/>
           </p:cNvSpPr>
           <p:nvPr>
             <p:ph type="sldImg" idx="2"/>
@@ -1013,7 +810,7 @@
             <a:spLocks noGrp="1"/>
           </p:cNvSpPr>
           <p:nvPr>
-            <p:ph type="body" idx="3" sz="quarter"/>
+            <p:ph type="body" sz="quarter" idx="3"/>
           </p:nvPr>
         </p:nvSpPr>
         <p:spPr/>
@@ -1034,7 +831,7 @@
             <a:spLocks noGrp="1"/>
           </p:cNvSpPr>
           <p:nvPr>
-            <p:ph type="sldNum" idx="5" sz="quarter"/>
+            <p:ph type="sldNum" sz="quarter" idx="5"/>
           </p:nvPr>
         </p:nvSpPr>
         <p:spPr/>
@@ -1048,7 +845,7 @@
 </file>
 
 <file path=ppt/notesSlides/notesSlide17.xml><?xml version="1.0" encoding="utf-8"?>
-<p:notes xmlns:a="http://schemas.openxmlformats.org/drawingml/2006/main" xmlns:p="http://schemas.openxmlformats.org/presentationml/2006/main" xmlns:r="http://schemas.openxmlformats.org/officeDocument/2006/relationships">
+<p:notes xmlns:a="http://schemas.openxmlformats.org/drawingml/2006/main" xmlns:r="http://schemas.openxmlformats.org/officeDocument/2006/relationships" xmlns:p="http://schemas.openxmlformats.org/presentationml/2006/main">
   <p:cSld>
     <p:spTree>
       <p:nvGrpSpPr>
@@ -1068,7 +865,7 @@
         <p:nvSpPr>
           <p:cNvPr id="2" name="Slide Image Placeholder 1"/>
           <p:cNvSpPr>
-            <a:spLocks noGrp="1"/>
+            <a:spLocks noGrp="1" noRot="1" noChangeAspect="1"/>
           </p:cNvSpPr>
           <p:nvPr>
             <p:ph type="sldImg" idx="2"/>
@@ -1083,7 +880,7 @@
             <a:spLocks noGrp="1"/>
           </p:cNvSpPr>
           <p:nvPr>
-            <p:ph type="body" idx="3" sz="quarter"/>
+            <p:ph type="body" sz="quarter" idx="3"/>
           </p:nvPr>
         </p:nvSpPr>
         <p:spPr/>
@@ -1104,7 +901,7 @@
             <a:spLocks noGrp="1"/>
           </p:cNvSpPr>
           <p:nvPr>
-            <p:ph type="sldNum" idx="5" sz="quarter"/>
+            <p:ph type="sldNum" sz="quarter" idx="5"/>
           </p:nvPr>
         </p:nvSpPr>
         <p:spPr/>
@@ -1118,7 +915,7 @@
 </file>
 
 <file path=ppt/notesSlides/notesSlide18.xml><?xml version="1.0" encoding="utf-8"?>
-<p:notes xmlns:a="http://schemas.openxmlformats.org/drawingml/2006/main" xmlns:p="http://schemas.openxmlformats.org/presentationml/2006/main" xmlns:r="http://schemas.openxmlformats.org/officeDocument/2006/relationships">
+<p:notes xmlns:a="http://schemas.openxmlformats.org/drawingml/2006/main" xmlns:r="http://schemas.openxmlformats.org/officeDocument/2006/relationships" xmlns:p="http://schemas.openxmlformats.org/presentationml/2006/main">
   <p:cSld>
     <p:spTree>
       <p:nvGrpSpPr>
@@ -1138,7 +935,7 @@
         <p:nvSpPr>
           <p:cNvPr id="2" name="Slide Image Placeholder 1"/>
           <p:cNvSpPr>
-            <a:spLocks noGrp="1"/>
+            <a:spLocks noGrp="1" noRot="1" noChangeAspect="1"/>
           </p:cNvSpPr>
           <p:nvPr>
             <p:ph type="sldImg" idx="2"/>
@@ -1153,7 +950,7 @@
             <a:spLocks noGrp="1"/>
           </p:cNvSpPr>
           <p:nvPr>
-            <p:ph type="body" idx="3" sz="quarter"/>
+            <p:ph type="body" sz="quarter" idx="3"/>
           </p:nvPr>
         </p:nvSpPr>
         <p:spPr/>
@@ -1174,7 +971,7 @@
             <a:spLocks noGrp="1"/>
           </p:cNvSpPr>
           <p:nvPr>
-            <p:ph type="sldNum" idx="5" sz="quarter"/>
+            <p:ph type="sldNum" sz="quarter" idx="5"/>
           </p:nvPr>
         </p:nvSpPr>
         <p:spPr/>
@@ -1187,8 +984,8 @@
 </p:notes>
 </file>
 
-<file path=ppt/notesSlides/notesSlide19.xml><?xml version="1.0" encoding="utf-8"?>
-<p:notes xmlns:a="http://schemas.openxmlformats.org/drawingml/2006/main" xmlns:p="http://schemas.openxmlformats.org/presentationml/2006/main" xmlns:r="http://schemas.openxmlformats.org/officeDocument/2006/relationships">
+<file path=ppt/notesSlides/notesSlide2.xml><?xml version="1.0" encoding="utf-8"?>
+<p:notes xmlns:a="http://schemas.openxmlformats.org/drawingml/2006/main" xmlns:r="http://schemas.openxmlformats.org/officeDocument/2006/relationships" xmlns:p="http://schemas.openxmlformats.org/presentationml/2006/main">
   <p:cSld>
     <p:spTree>
       <p:nvGrpSpPr>
@@ -1208,7 +1005,7 @@
         <p:nvSpPr>
           <p:cNvPr id="2" name="Slide Image Placeholder 1"/>
           <p:cNvSpPr>
-            <a:spLocks noGrp="1"/>
+            <a:spLocks noGrp="1" noRot="1" noChangeAspect="1"/>
           </p:cNvSpPr>
           <p:nvPr>
             <p:ph type="sldImg" idx="2"/>
@@ -1223,7 +1020,7 @@
             <a:spLocks noGrp="1"/>
           </p:cNvSpPr>
           <p:nvPr>
-            <p:ph type="body" idx="3" sz="quarter"/>
+            <p:ph type="body" sz="quarter" idx="3"/>
           </p:nvPr>
         </p:nvSpPr>
         <p:spPr/>
@@ -1232,7 +1029,15 @@
           <a:lstStyle/>
           <a:p>
             <a:r>
-              <a:t>Keep hidden unless probed.</a:t>
+              <a:t>The brief asks for breadth 'rather than a narrow handful'. Most answers are a list of twenty scenarios; ours is a grammar with a type system. The archive tells us which regions we have actually reached.</a:t>
+            </a:r>
+          </a:p>
+          <a:p>
+            <a:endParaRPr/>
+          </a:p>
+          <a:p>
+            <a:r>
+              <a:t>IF ASKED why only 268 of 380: the rest need morpheme combinations our seed families do not yet produce. Published so coverage is auditable, not asserted.</a:t>
             </a:r>
           </a:p>
         </p:txBody>
@@ -1244,7 +1049,7 @@
             <a:spLocks noGrp="1"/>
           </p:cNvSpPr>
           <p:nvPr>
-            <p:ph type="sldNum" idx="5" sz="quarter"/>
+            <p:ph type="sldNum" sz="quarter" idx="5"/>
           </p:nvPr>
         </p:nvSpPr>
         <p:spPr/>
@@ -1257,8 +1062,8 @@
 </p:notes>
 </file>
 
-<file path=ppt/notesSlides/notesSlide2.xml><?xml version="1.0" encoding="utf-8"?>
-<p:notes xmlns:a="http://schemas.openxmlformats.org/drawingml/2006/main" xmlns:p="http://schemas.openxmlformats.org/presentationml/2006/main" xmlns:r="http://schemas.openxmlformats.org/officeDocument/2006/relationships">
+<file path=ppt/notesSlides/notesSlide3.xml><?xml version="1.0" encoding="utf-8"?>
+<p:notes xmlns:a="http://schemas.openxmlformats.org/drawingml/2006/main" xmlns:r="http://schemas.openxmlformats.org/officeDocument/2006/relationships" xmlns:p="http://schemas.openxmlformats.org/presentationml/2006/main">
   <p:cSld>
     <p:spTree>
       <p:nvGrpSpPr>
@@ -1278,7 +1083,7 @@
         <p:nvSpPr>
           <p:cNvPr id="2" name="Slide Image Placeholder 1"/>
           <p:cNvSpPr>
-            <a:spLocks noGrp="1"/>
+            <a:spLocks noGrp="1" noRot="1" noChangeAspect="1"/>
           </p:cNvSpPr>
           <p:nvPr>
             <p:ph type="sldImg" idx="2"/>
@@ -1293,7 +1098,7 @@
             <a:spLocks noGrp="1"/>
           </p:cNvSpPr>
           <p:nvPr>
-            <p:ph type="body" idx="3" sz="quarter"/>
+            <p:ph type="body" sz="quarter" idx="3"/>
           </p:nvPr>
         </p:nvSpPr>
         <p:spPr/>
@@ -1302,13 +1107,7 @@
           <a:lstStyle/>
           <a:p>
             <a:r>
-              <a:t>The brief asks for breadth 'rather than a narrow handful'. Most answers are a list of twenty scenarios; ours is a grammar with a type system. The archive tells us which regions we have actually reached.</a:t>
-            </a:r>
-          </a:p>
-          <a:p/>
-          <a:p>
-            <a:r>
-              <a:t>IF ASKED why only 268 of 380: the rest need morpheme combinations our seed families do not yet produce. Published so coverage is auditable, not asserted.</a:t>
+              <a:t>ARENA is the red team, vajra-sim is the world, GATE is the blue team, and the bottom band is the return path — the gap the defence reveals becomes the next attack. The caption matters: the figure was drawn during design and its quantities are targets.</a:t>
             </a:r>
           </a:p>
         </p:txBody>
@@ -1320,7 +1119,7 @@
             <a:spLocks noGrp="1"/>
           </p:cNvSpPr>
           <p:nvPr>
-            <p:ph type="sldNum" idx="5" sz="quarter"/>
+            <p:ph type="sldNum" sz="quarter" idx="5"/>
           </p:nvPr>
         </p:nvSpPr>
         <p:spPr/>
@@ -1333,8 +1132,8 @@
 </p:notes>
 </file>
 
-<file path=ppt/notesSlides/notesSlide3.xml><?xml version="1.0" encoding="utf-8"?>
-<p:notes xmlns:a="http://schemas.openxmlformats.org/drawingml/2006/main" xmlns:p="http://schemas.openxmlformats.org/presentationml/2006/main" xmlns:r="http://schemas.openxmlformats.org/officeDocument/2006/relationships">
+<file path=ppt/notesSlides/notesSlide4.xml><?xml version="1.0" encoding="utf-8"?>
+<p:notes xmlns:a="http://schemas.openxmlformats.org/drawingml/2006/main" xmlns:r="http://schemas.openxmlformats.org/officeDocument/2006/relationships" xmlns:p="http://schemas.openxmlformats.org/presentationml/2006/main">
   <p:cSld>
     <p:spTree>
       <p:nvGrpSpPr>
@@ -1354,7 +1153,7 @@
         <p:nvSpPr>
           <p:cNvPr id="2" name="Slide Image Placeholder 1"/>
           <p:cNvSpPr>
-            <a:spLocks noGrp="1"/>
+            <a:spLocks noGrp="1" noRot="1" noChangeAspect="1"/>
           </p:cNvSpPr>
           <p:nvPr>
             <p:ph type="sldImg" idx="2"/>
@@ -1369,7 +1168,7 @@
             <a:spLocks noGrp="1"/>
           </p:cNvSpPr>
           <p:nvPr>
-            <p:ph type="body" idx="3" sz="quarter"/>
+            <p:ph type="body" sz="quarter" idx="3"/>
           </p:nvPr>
         </p:nvSpPr>
         <p:spPr/>
@@ -1378,7 +1177,15 @@
           <a:lstStyle/>
           <a:p>
             <a:r>
-              <a:t>ARENA is the red team, vajra-sim is the world, GATE is the blue team, and the bottom band is the return path — the gap the defence reveals becomes the next attack. The caption matters: the figure was drawn during design and its quantities are targets.</a:t>
+              <a:t>Fidelity is a judged criterion, so we made it checkable.</a:t>
+            </a:r>
+          </a:p>
+          <a:p>
+            <a:endParaRPr/>
+          </a:p>
+          <a:p>
+            <a:r>
+              <a:t>IF ASKED how we know it resembles Mastercard's book: we don't, and we don't claim it. We validate mechanism-level fidelity. Distributional fidelity to a real portfolio is untestable without the portfolio — and two places where our generator is TOO CLEAN are on the artifacts slide, found by us.</a:t>
             </a:r>
           </a:p>
         </p:txBody>
@@ -1390,7 +1197,7 @@
             <a:spLocks noGrp="1"/>
           </p:cNvSpPr>
           <p:nvPr>
-            <p:ph type="sldNum" idx="5" sz="quarter"/>
+            <p:ph type="sldNum" sz="quarter" idx="5"/>
           </p:nvPr>
         </p:nvSpPr>
         <p:spPr/>
@@ -1403,8 +1210,8 @@
 </p:notes>
 </file>
 
-<file path=ppt/notesSlides/notesSlide4.xml><?xml version="1.0" encoding="utf-8"?>
-<p:notes xmlns:a="http://schemas.openxmlformats.org/drawingml/2006/main" xmlns:p="http://schemas.openxmlformats.org/presentationml/2006/main" xmlns:r="http://schemas.openxmlformats.org/officeDocument/2006/relationships">
+<file path=ppt/notesSlides/notesSlide5.xml><?xml version="1.0" encoding="utf-8"?>
+<p:notes xmlns:a="http://schemas.openxmlformats.org/drawingml/2006/main" xmlns:r="http://schemas.openxmlformats.org/officeDocument/2006/relationships" xmlns:p="http://schemas.openxmlformats.org/presentationml/2006/main">
   <p:cSld>
     <p:spTree>
       <p:nvGrpSpPr>
@@ -1424,7 +1231,7 @@
         <p:nvSpPr>
           <p:cNvPr id="2" name="Slide Image Placeholder 1"/>
           <p:cNvSpPr>
-            <a:spLocks noGrp="1"/>
+            <a:spLocks noGrp="1" noRot="1" noChangeAspect="1"/>
           </p:cNvSpPr>
           <p:nvPr>
             <p:ph type="sldImg" idx="2"/>
@@ -1439,7 +1246,7 @@
             <a:spLocks noGrp="1"/>
           </p:cNvSpPr>
           <p:nvPr>
-            <p:ph type="body" idx="3" sz="quarter"/>
+            <p:ph type="body" sz="quarter" idx="3"/>
           </p:nvPr>
         </p:nvSpPr>
         <p:spPr/>
@@ -1448,13 +1255,7 @@
           <a:lstStyle/>
           <a:p>
             <a:r>
-              <a:t>Fidelity is a judged criterion, so we made it checkable.</a:t>
-            </a:r>
-          </a:p>
-          <a:p/>
-          <a:p>
-            <a:r>
-              <a:t>IF ASKED how we know it resembles Mastercard's book: we don't, and we don't claim it. We validate mechanism-level fidelity. Distributional fidelity to a real portfolio is untestable without the portfolio — and two places where our generator is TOO CLEAN are on the artifacts slide, found by us.</a:t>
+              <a:t>This is what makes it a loop rather than a pipeline. The archive is a curriculum. The LLM is a variation operator called once per tick, never per transaction, so the process stays deterministic and seeded.</a:t>
             </a:r>
           </a:p>
         </p:txBody>
@@ -1466,7 +1267,7 @@
             <a:spLocks noGrp="1"/>
           </p:cNvSpPr>
           <p:nvPr>
-            <p:ph type="sldNum" idx="5" sz="quarter"/>
+            <p:ph type="sldNum" sz="quarter" idx="5"/>
           </p:nvPr>
         </p:nvSpPr>
         <p:spPr/>
@@ -1479,8 +1280,8 @@
 </p:notes>
 </file>
 
-<file path=ppt/notesSlides/notesSlide5.xml><?xml version="1.0" encoding="utf-8"?>
-<p:notes xmlns:a="http://schemas.openxmlformats.org/drawingml/2006/main" xmlns:p="http://schemas.openxmlformats.org/presentationml/2006/main" xmlns:r="http://schemas.openxmlformats.org/officeDocument/2006/relationships">
+<file path=ppt/notesSlides/notesSlide6.xml><?xml version="1.0" encoding="utf-8"?>
+<p:notes xmlns:a="http://schemas.openxmlformats.org/drawingml/2006/main" xmlns:r="http://schemas.openxmlformats.org/officeDocument/2006/relationships" xmlns:p="http://schemas.openxmlformats.org/presentationml/2006/main">
   <p:cSld>
     <p:spTree>
       <p:nvGrpSpPr>
@@ -1500,7 +1301,7 @@
         <p:nvSpPr>
           <p:cNvPr id="2" name="Slide Image Placeholder 1"/>
           <p:cNvSpPr>
-            <a:spLocks noGrp="1"/>
+            <a:spLocks noGrp="1" noRot="1" noChangeAspect="1"/>
           </p:cNvSpPr>
           <p:nvPr>
             <p:ph type="sldImg" idx="2"/>
@@ -1515,7 +1316,7 @@
             <a:spLocks noGrp="1"/>
           </p:cNvSpPr>
           <p:nvPr>
-            <p:ph type="body" idx="3" sz="quarter"/>
+            <p:ph type="body" sz="quarter" idx="3"/>
           </p:nvPr>
         </p:nvSpPr>
         <p:spPr/>
@@ -1524,7 +1325,7 @@
           <a:lstStyle/>
           <a:p>
             <a:r>
-              <a:t>This is what makes it a loop rather than a pipeline. The archive is a curriculum. The LLM is a variation operator called once per tick, never per transaction, so the process stays deterministic and seeded.</a:t>
+              <a:t>The single most important slide for understanding our numbers. At decision time you know almost nothing.</a:t>
             </a:r>
           </a:p>
         </p:txBody>
@@ -1536,7 +1337,7 @@
             <a:spLocks noGrp="1"/>
           </p:cNvSpPr>
           <p:nvPr>
-            <p:ph type="sldNum" idx="5" sz="quarter"/>
+            <p:ph type="sldNum" sz="quarter" idx="5"/>
           </p:nvPr>
         </p:nvSpPr>
         <p:spPr/>
@@ -1549,8 +1350,8 @@
 </p:notes>
 </file>
 
-<file path=ppt/notesSlides/notesSlide6.xml><?xml version="1.0" encoding="utf-8"?>
-<p:notes xmlns:a="http://schemas.openxmlformats.org/drawingml/2006/main" xmlns:p="http://schemas.openxmlformats.org/presentationml/2006/main" xmlns:r="http://schemas.openxmlformats.org/officeDocument/2006/relationships">
+<file path=ppt/notesSlides/notesSlide7.xml><?xml version="1.0" encoding="utf-8"?>
+<p:notes xmlns:a="http://schemas.openxmlformats.org/drawingml/2006/main" xmlns:r="http://schemas.openxmlformats.org/officeDocument/2006/relationships" xmlns:p="http://schemas.openxmlformats.org/presentationml/2006/main">
   <p:cSld>
     <p:spTree>
       <p:nvGrpSpPr>
@@ -1570,7 +1371,7 @@
         <p:nvSpPr>
           <p:cNvPr id="2" name="Slide Image Placeholder 1"/>
           <p:cNvSpPr>
-            <a:spLocks noGrp="1"/>
+            <a:spLocks noGrp="1" noRot="1" noChangeAspect="1"/>
           </p:cNvSpPr>
           <p:nvPr>
             <p:ph type="sldImg" idx="2"/>
@@ -1585,7 +1386,7 @@
             <a:spLocks noGrp="1"/>
           </p:cNvSpPr>
           <p:nvPr>
-            <p:ph type="body" idx="3" sz="quarter"/>
+            <p:ph type="body" sz="quarter" idx="3"/>
           </p:nvPr>
         </p:nvSpPr>
         <p:spPr/>
@@ -1594,7 +1395,7 @@
           <a:lstStyle/>
           <a:p>
             <a:r>
-              <a:t>The single most important slide for understanding our numbers. At decision time you know almost nothing.</a:t>
+              <a:t>Note the first control. A version-control audit proving we wrote the holdout down before we wrote the detector. That is not a modelling control, it is a control on us.</a:t>
             </a:r>
           </a:p>
         </p:txBody>
@@ -1606,7 +1407,7 @@
             <a:spLocks noGrp="1"/>
           </p:cNvSpPr>
           <p:nvPr>
-            <p:ph type="sldNum" idx="5" sz="quarter"/>
+            <p:ph type="sldNum" sz="quarter" idx="5"/>
           </p:nvPr>
         </p:nvSpPr>
         <p:spPr/>
@@ -1619,8 +1420,8 @@
 </p:notes>
 </file>
 
-<file path=ppt/notesSlides/notesSlide7.xml><?xml version="1.0" encoding="utf-8"?>
-<p:notes xmlns:a="http://schemas.openxmlformats.org/drawingml/2006/main" xmlns:p="http://schemas.openxmlformats.org/presentationml/2006/main" xmlns:r="http://schemas.openxmlformats.org/officeDocument/2006/relationships">
+<file path=ppt/notesSlides/notesSlide8.xml><?xml version="1.0" encoding="utf-8"?>
+<p:notes xmlns:a="http://schemas.openxmlformats.org/drawingml/2006/main" xmlns:r="http://schemas.openxmlformats.org/officeDocument/2006/relationships" xmlns:p="http://schemas.openxmlformats.org/presentationml/2006/main">
   <p:cSld>
     <p:spTree>
       <p:nvGrpSpPr>
@@ -1640,7 +1441,7 @@
         <p:nvSpPr>
           <p:cNvPr id="2" name="Slide Image Placeholder 1"/>
           <p:cNvSpPr>
-            <a:spLocks noGrp="1"/>
+            <a:spLocks noGrp="1" noRot="1" noChangeAspect="1"/>
           </p:cNvSpPr>
           <p:nvPr>
             <p:ph type="sldImg" idx="2"/>
@@ -1655,7 +1456,7 @@
             <a:spLocks noGrp="1"/>
           </p:cNvSpPr>
           <p:nvPr>
-            <p:ph type="body" idx="3" sz="quarter"/>
+            <p:ph type="body" sz="quarter" idx="3"/>
           </p:nvPr>
         </p:nvSpPr>
         <p:spPr/>
@@ -1664,7 +1465,7 @@
           <a:lstStyle/>
           <a:p>
             <a:r>
-              <a:t>Note the first control. A version-control audit proving we wrote the holdout down before we wrote the detector. That is not a modelling control, it is a control on us.</a:t>
+              <a:t>IF ASKED why ROC-AUC is only 0.72: at a 0.56% base rate ROC-AUC is dominated by the true-negative mass and is near-1 for any competent model. That is why every submission reports 0.99 and none of those numbers are comparable. We report PR-AUC as the headline because it is the quantity that moves.</a:t>
             </a:r>
           </a:p>
         </p:txBody>
@@ -1676,7 +1477,7 @@
             <a:spLocks noGrp="1"/>
           </p:cNvSpPr>
           <p:nvPr>
-            <p:ph type="sldNum" idx="5" sz="quarter"/>
+            <p:ph type="sldNum" sz="quarter" idx="5"/>
           </p:nvPr>
         </p:nvSpPr>
         <p:spPr/>
@@ -1689,8 +1490,8 @@
 </p:notes>
 </file>
 
-<file path=ppt/notesSlides/notesSlide8.xml><?xml version="1.0" encoding="utf-8"?>
-<p:notes xmlns:a="http://schemas.openxmlformats.org/drawingml/2006/main" xmlns:p="http://schemas.openxmlformats.org/presentationml/2006/main" xmlns:r="http://schemas.openxmlformats.org/officeDocument/2006/relationships">
+<file path=ppt/notesSlides/notesSlide9.xml><?xml version="1.0" encoding="utf-8"?>
+<p:notes xmlns:a="http://schemas.openxmlformats.org/drawingml/2006/main" xmlns:r="http://schemas.openxmlformats.org/officeDocument/2006/relationships" xmlns:p="http://schemas.openxmlformats.org/presentationml/2006/main">
   <p:cSld>
     <p:spTree>
       <p:nvGrpSpPr>
@@ -1710,7 +1511,7 @@
         <p:nvSpPr>
           <p:cNvPr id="2" name="Slide Image Placeholder 1"/>
           <p:cNvSpPr>
-            <a:spLocks noGrp="1"/>
+            <a:spLocks noGrp="1" noRot="1" noChangeAspect="1"/>
           </p:cNvSpPr>
           <p:nvPr>
             <p:ph type="sldImg" idx="2"/>
@@ -1725,7 +1526,7 @@
             <a:spLocks noGrp="1"/>
           </p:cNvSpPr>
           <p:nvPr>
-            <p:ph type="body" idx="3" sz="quarter"/>
+            <p:ph type="body" sz="quarter" idx="3"/>
           </p:nvPr>
         </p:nvSpPr>
         <p:spPr/>
@@ -1734,7 +1535,7 @@
           <a:lstStyle/>
           <a:p>
             <a:r>
-              <a:t>IF ASKED why ROC-AUC is only 0.72: at a 0.56% base rate ROC-AUC is dominated by the true-negative mass and is near-1 for any competent model. That is why every submission reports 0.99 and none of those numbers are comparable. We report PR-AUC as the headline because it is the quantity that moves.</a:t>
+              <a:t>We withheld the majority of our test attacks' compositions from training, plus a whole evasion technique, and still catch a quarter of them.</a:t>
             </a:r>
           </a:p>
         </p:txBody>
@@ -1746,77 +1547,7 @@
             <a:spLocks noGrp="1"/>
           </p:cNvSpPr>
           <p:nvPr>
-            <p:ph type="sldNum" idx="5" sz="quarter"/>
-          </p:nvPr>
-        </p:nvSpPr>
-        <p:spPr/>
-      </p:sp>
-    </p:spTree>
-  </p:cSld>
-  <p:clrMapOvr>
-    <a:masterClrMapping/>
-  </p:clrMapOvr>
-</p:notes>
-</file>
-
-<file path=ppt/notesSlides/notesSlide9.xml><?xml version="1.0" encoding="utf-8"?>
-<p:notes xmlns:a="http://schemas.openxmlformats.org/drawingml/2006/main" xmlns:p="http://schemas.openxmlformats.org/presentationml/2006/main" xmlns:r="http://schemas.openxmlformats.org/officeDocument/2006/relationships">
-  <p:cSld>
-    <p:spTree>
-      <p:nvGrpSpPr>
-        <p:cNvPr id="1" name=""/>
-        <p:cNvGrpSpPr/>
-        <p:nvPr/>
-      </p:nvGrpSpPr>
-      <p:grpSpPr>
-        <a:xfrm>
-          <a:off x="0" y="0"/>
-          <a:ext cx="0" cy="0"/>
-          <a:chOff x="0" y="0"/>
-          <a:chExt cx="0" cy="0"/>
-        </a:xfrm>
-      </p:grpSpPr>
-      <p:sp>
-        <p:nvSpPr>
-          <p:cNvPr id="2" name="Slide Image Placeholder 1"/>
-          <p:cNvSpPr>
-            <a:spLocks noGrp="1"/>
-          </p:cNvSpPr>
-          <p:nvPr>
-            <p:ph type="sldImg" idx="2"/>
-          </p:nvPr>
-        </p:nvSpPr>
-        <p:spPr/>
-      </p:sp>
-      <p:sp>
-        <p:nvSpPr>
-          <p:cNvPr id="3" name="Notes Placeholder 2"/>
-          <p:cNvSpPr>
-            <a:spLocks noGrp="1"/>
-          </p:cNvSpPr>
-          <p:nvPr>
-            <p:ph type="body" idx="3" sz="quarter"/>
-          </p:nvPr>
-        </p:nvSpPr>
-        <p:spPr/>
-        <p:txBody>
-          <a:bodyPr/>
-          <a:lstStyle/>
-          <a:p>
-            <a:r>
-              <a:t>We withheld the majority of our test attacks' compositions from training, plus a whole evasion technique, and still catch a quarter of them.</a:t>
-            </a:r>
-          </a:p>
-        </p:txBody>
-      </p:sp>
-      <p:sp>
-        <p:nvSpPr>
-          <p:cNvPr id="4" name="Slide Number Placeholder 3"/>
-          <p:cNvSpPr>
-            <a:spLocks noGrp="1"/>
-          </p:cNvSpPr>
-          <p:nvPr>
-            <p:ph type="sldNum" idx="5" sz="quarter"/>
+            <p:ph type="sldNum" sz="quarter" idx="5"/>
           </p:nvPr>
         </p:nvSpPr>
         <p:spPr/>
@@ -1867,10 +1598,9 @@
           <a:lstStyle/>
           <a:p>
             <a:r>
-              <a:rPr lang="en-US" smtClean="0"/>
+              <a:rPr lang="en-US"/>
               <a:t>Click to edit Master title style</a:t>
             </a:r>
-            <a:endParaRPr lang="en-US"/>
           </a:p>
         </p:txBody>
       </p:sp>
@@ -1986,10 +1716,9 @@
           </a:lstStyle>
           <a:p>
             <a:r>
-              <a:rPr lang="en-US" smtClean="0"/>
+              <a:rPr lang="en-US"/>
               <a:t>Click to edit Master subtitle style</a:t>
             </a:r>
-            <a:endParaRPr lang="en-US"/>
           </a:p>
         </p:txBody>
       </p:sp>
@@ -2010,7 +1739,7 @@
           <a:p>
             <a:fld id="{5BCAD085-E8A6-8845-BD4E-CB4CCA059FC4}" type="datetimeFigureOut">
               <a:rPr lang="en-US" smtClean="0"/>
-              <a:t>1/27/13</a:t>
+              <a:t>8/28/26</a:t>
             </a:fld>
             <a:endParaRPr lang="en-US"/>
           </a:p>
@@ -2104,10 +1833,9 @@
           <a:lstStyle/>
           <a:p>
             <a:r>
-              <a:rPr lang="en-US" smtClean="0"/>
+              <a:rPr lang="en-US"/>
               <a:t>Click to edit Master title style</a:t>
             </a:r>
-            <a:endParaRPr lang="en-US"/>
           </a:p>
         </p:txBody>
       </p:sp>
@@ -2128,38 +1856,37 @@
           <a:p>
             <a:pPr lvl="0"/>
             <a:r>
-              <a:rPr lang="en-US" smtClean="0"/>
+              <a:rPr lang="en-US"/>
               <a:t>Click to edit Master text styles</a:t>
             </a:r>
           </a:p>
           <a:p>
             <a:pPr lvl="1"/>
             <a:r>
-              <a:rPr lang="en-US" smtClean="0"/>
+              <a:rPr lang="en-US"/>
               <a:t>Second level</a:t>
             </a:r>
           </a:p>
           <a:p>
             <a:pPr lvl="2"/>
             <a:r>
-              <a:rPr lang="en-US" smtClean="0"/>
+              <a:rPr lang="en-US"/>
               <a:t>Third level</a:t>
             </a:r>
           </a:p>
           <a:p>
             <a:pPr lvl="3"/>
             <a:r>
-              <a:rPr lang="en-US" smtClean="0"/>
+              <a:rPr lang="en-US"/>
               <a:t>Fourth level</a:t>
             </a:r>
           </a:p>
           <a:p>
             <a:pPr lvl="4"/>
             <a:r>
-              <a:rPr lang="en-US" smtClean="0"/>
+              <a:rPr lang="en-US"/>
               <a:t>Fifth level</a:t>
             </a:r>
-            <a:endParaRPr lang="en-US"/>
           </a:p>
         </p:txBody>
       </p:sp>
@@ -2180,7 +1907,7 @@
           <a:p>
             <a:fld id="{5BCAD085-E8A6-8845-BD4E-CB4CCA059FC4}" type="datetimeFigureOut">
               <a:rPr lang="en-US" smtClean="0"/>
-              <a:t>1/27/13</a:t>
+              <a:t>8/28/26</a:t>
             </a:fld>
             <a:endParaRPr lang="en-US"/>
           </a:p>
@@ -2279,10 +2006,9 @@
           <a:lstStyle/>
           <a:p>
             <a:r>
-              <a:rPr lang="en-US" smtClean="0"/>
+              <a:rPr lang="en-US"/>
               <a:t>Click to edit Master title style</a:t>
             </a:r>
-            <a:endParaRPr lang="en-US"/>
           </a:p>
         </p:txBody>
       </p:sp>
@@ -2308,38 +2034,37 @@
           <a:p>
             <a:pPr lvl="0"/>
             <a:r>
-              <a:rPr lang="en-US" smtClean="0"/>
+              <a:rPr lang="en-US"/>
               <a:t>Click to edit Master text styles</a:t>
             </a:r>
           </a:p>
           <a:p>
             <a:pPr lvl="1"/>
             <a:r>
-              <a:rPr lang="en-US" smtClean="0"/>
+              <a:rPr lang="en-US"/>
               <a:t>Second level</a:t>
             </a:r>
           </a:p>
           <a:p>
             <a:pPr lvl="2"/>
             <a:r>
-              <a:rPr lang="en-US" smtClean="0"/>
+              <a:rPr lang="en-US"/>
               <a:t>Third level</a:t>
             </a:r>
           </a:p>
           <a:p>
             <a:pPr lvl="3"/>
             <a:r>
-              <a:rPr lang="en-US" smtClean="0"/>
+              <a:rPr lang="en-US"/>
               <a:t>Fourth level</a:t>
             </a:r>
           </a:p>
           <a:p>
             <a:pPr lvl="4"/>
             <a:r>
-              <a:rPr lang="en-US" smtClean="0"/>
+              <a:rPr lang="en-US"/>
               <a:t>Fifth level</a:t>
             </a:r>
-            <a:endParaRPr lang="en-US"/>
           </a:p>
         </p:txBody>
       </p:sp>
@@ -2360,7 +2085,7 @@
           <a:p>
             <a:fld id="{5BCAD085-E8A6-8845-BD4E-CB4CCA059FC4}" type="datetimeFigureOut">
               <a:rPr lang="en-US" smtClean="0"/>
-              <a:t>1/27/13</a:t>
+              <a:t>8/28/26</a:t>
             </a:fld>
             <a:endParaRPr lang="en-US"/>
           </a:p>
@@ -2454,10 +2179,9 @@
           <a:lstStyle/>
           <a:p>
             <a:r>
-              <a:rPr lang="en-US" smtClean="0"/>
+              <a:rPr lang="en-US"/>
               <a:t>Click to edit Master title style</a:t>
             </a:r>
-            <a:endParaRPr lang="en-US"/>
           </a:p>
         </p:txBody>
       </p:sp>
@@ -2478,38 +2202,37 @@
           <a:p>
             <a:pPr lvl="0"/>
             <a:r>
-              <a:rPr lang="en-US" smtClean="0"/>
+              <a:rPr lang="en-US"/>
               <a:t>Click to edit Master text styles</a:t>
             </a:r>
           </a:p>
           <a:p>
             <a:pPr lvl="1"/>
             <a:r>
-              <a:rPr lang="en-US" smtClean="0"/>
+              <a:rPr lang="en-US"/>
               <a:t>Second level</a:t>
             </a:r>
           </a:p>
           <a:p>
             <a:pPr lvl="2"/>
             <a:r>
-              <a:rPr lang="en-US" smtClean="0"/>
+              <a:rPr lang="en-US"/>
               <a:t>Third level</a:t>
             </a:r>
           </a:p>
           <a:p>
             <a:pPr lvl="3"/>
             <a:r>
-              <a:rPr lang="en-US" smtClean="0"/>
+              <a:rPr lang="en-US"/>
               <a:t>Fourth level</a:t>
             </a:r>
           </a:p>
           <a:p>
             <a:pPr lvl="4"/>
             <a:r>
-              <a:rPr lang="en-US" smtClean="0"/>
+              <a:rPr lang="en-US"/>
               <a:t>Fifth level</a:t>
             </a:r>
-            <a:endParaRPr lang="en-US"/>
           </a:p>
         </p:txBody>
       </p:sp>
@@ -2530,7 +2253,7 @@
           <a:p>
             <a:fld id="{5BCAD085-E8A6-8845-BD4E-CB4CCA059FC4}" type="datetimeFigureOut">
               <a:rPr lang="en-US" smtClean="0"/>
-              <a:t>1/27/13</a:t>
+              <a:t>8/28/26</a:t>
             </a:fld>
             <a:endParaRPr lang="en-US"/>
           </a:p>
@@ -2633,10 +2356,9 @@
           </a:lstStyle>
           <a:p>
             <a:r>
-              <a:rPr lang="en-US" smtClean="0"/>
+              <a:rPr lang="en-US"/>
               <a:t>Click to edit Master title style</a:t>
             </a:r>
-            <a:endParaRPr lang="en-US"/>
           </a:p>
         </p:txBody>
       </p:sp>
@@ -2753,7 +2475,7 @@
           <a:p>
             <a:pPr lvl="0"/>
             <a:r>
-              <a:rPr lang="en-US" smtClean="0"/>
+              <a:rPr lang="en-US"/>
               <a:t>Click to edit Master text styles</a:t>
             </a:r>
           </a:p>
@@ -2776,7 +2498,7 @@
           <a:p>
             <a:fld id="{5BCAD085-E8A6-8845-BD4E-CB4CCA059FC4}" type="datetimeFigureOut">
               <a:rPr lang="en-US" smtClean="0"/>
-              <a:t>1/27/13</a:t>
+              <a:t>8/28/26</a:t>
             </a:fld>
             <a:endParaRPr lang="en-US"/>
           </a:p>
@@ -2870,10 +2592,9 @@
           <a:lstStyle/>
           <a:p>
             <a:r>
-              <a:rPr lang="en-US" smtClean="0"/>
+              <a:rPr lang="en-US"/>
               <a:t>Click to edit Master title style</a:t>
             </a:r>
-            <a:endParaRPr lang="en-US"/>
           </a:p>
         </p:txBody>
       </p:sp>
@@ -2927,38 +2648,37 @@
           <a:p>
             <a:pPr lvl="0"/>
             <a:r>
-              <a:rPr lang="en-US" smtClean="0"/>
+              <a:rPr lang="en-US"/>
               <a:t>Click to edit Master text styles</a:t>
             </a:r>
           </a:p>
           <a:p>
             <a:pPr lvl="1"/>
             <a:r>
-              <a:rPr lang="en-US" smtClean="0"/>
+              <a:rPr lang="en-US"/>
               <a:t>Second level</a:t>
             </a:r>
           </a:p>
           <a:p>
             <a:pPr lvl="2"/>
             <a:r>
-              <a:rPr lang="en-US" smtClean="0"/>
+              <a:rPr lang="en-US"/>
               <a:t>Third level</a:t>
             </a:r>
           </a:p>
           <a:p>
             <a:pPr lvl="3"/>
             <a:r>
-              <a:rPr lang="en-US" smtClean="0"/>
+              <a:rPr lang="en-US"/>
               <a:t>Fourth level</a:t>
             </a:r>
           </a:p>
           <a:p>
             <a:pPr lvl="4"/>
             <a:r>
-              <a:rPr lang="en-US" smtClean="0"/>
+              <a:rPr lang="en-US"/>
               <a:t>Fifth level</a:t>
             </a:r>
-            <a:endParaRPr lang="en-US"/>
           </a:p>
         </p:txBody>
       </p:sp>
@@ -3012,38 +2732,37 @@
           <a:p>
             <a:pPr lvl="0"/>
             <a:r>
-              <a:rPr lang="en-US" smtClean="0"/>
+              <a:rPr lang="en-US"/>
               <a:t>Click to edit Master text styles</a:t>
             </a:r>
           </a:p>
           <a:p>
             <a:pPr lvl="1"/>
             <a:r>
-              <a:rPr lang="en-US" smtClean="0"/>
+              <a:rPr lang="en-US"/>
               <a:t>Second level</a:t>
             </a:r>
           </a:p>
           <a:p>
             <a:pPr lvl="2"/>
             <a:r>
-              <a:rPr lang="en-US" smtClean="0"/>
+              <a:rPr lang="en-US"/>
               <a:t>Third level</a:t>
             </a:r>
           </a:p>
           <a:p>
             <a:pPr lvl="3"/>
             <a:r>
-              <a:rPr lang="en-US" smtClean="0"/>
+              <a:rPr lang="en-US"/>
               <a:t>Fourth level</a:t>
             </a:r>
           </a:p>
           <a:p>
             <a:pPr lvl="4"/>
             <a:r>
-              <a:rPr lang="en-US" smtClean="0"/>
+              <a:rPr lang="en-US"/>
               <a:t>Fifth level</a:t>
             </a:r>
-            <a:endParaRPr lang="en-US"/>
           </a:p>
         </p:txBody>
       </p:sp>
@@ -3064,7 +2783,7 @@
           <a:p>
             <a:fld id="{5BCAD085-E8A6-8845-BD4E-CB4CCA059FC4}" type="datetimeFigureOut">
               <a:rPr lang="en-US" smtClean="0"/>
-              <a:t>1/27/13</a:t>
+              <a:t>8/28/26</a:t>
             </a:fld>
             <a:endParaRPr lang="en-US"/>
           </a:p>
@@ -3162,10 +2881,9 @@
           </a:lstStyle>
           <a:p>
             <a:r>
-              <a:rPr lang="en-US" smtClean="0"/>
+              <a:rPr lang="en-US"/>
               <a:t>Click to edit Master title style</a:t>
             </a:r>
-            <a:endParaRPr lang="en-US"/>
           </a:p>
         </p:txBody>
       </p:sp>
@@ -3228,7 +2946,7 @@
           <a:p>
             <a:pPr lvl="0"/>
             <a:r>
-              <a:rPr lang="en-US" smtClean="0"/>
+              <a:rPr lang="en-US"/>
               <a:t>Click to edit Master text styles</a:t>
             </a:r>
           </a:p>
@@ -3284,38 +3002,37 @@
           <a:p>
             <a:pPr lvl="0"/>
             <a:r>
-              <a:rPr lang="en-US" smtClean="0"/>
+              <a:rPr lang="en-US"/>
               <a:t>Click to edit Master text styles</a:t>
             </a:r>
           </a:p>
           <a:p>
             <a:pPr lvl="1"/>
             <a:r>
-              <a:rPr lang="en-US" smtClean="0"/>
+              <a:rPr lang="en-US"/>
               <a:t>Second level</a:t>
             </a:r>
           </a:p>
           <a:p>
             <a:pPr lvl="2"/>
             <a:r>
-              <a:rPr lang="en-US" smtClean="0"/>
+              <a:rPr lang="en-US"/>
               <a:t>Third level</a:t>
             </a:r>
           </a:p>
           <a:p>
             <a:pPr lvl="3"/>
             <a:r>
-              <a:rPr lang="en-US" smtClean="0"/>
+              <a:rPr lang="en-US"/>
               <a:t>Fourth level</a:t>
             </a:r>
           </a:p>
           <a:p>
             <a:pPr lvl="4"/>
             <a:r>
-              <a:rPr lang="en-US" smtClean="0"/>
+              <a:rPr lang="en-US"/>
               <a:t>Fifth level</a:t>
             </a:r>
-            <a:endParaRPr lang="en-US"/>
           </a:p>
         </p:txBody>
       </p:sp>
@@ -3378,7 +3095,7 @@
           <a:p>
             <a:pPr lvl="0"/>
             <a:r>
-              <a:rPr lang="en-US" smtClean="0"/>
+              <a:rPr lang="en-US"/>
               <a:t>Click to edit Master text styles</a:t>
             </a:r>
           </a:p>
@@ -3434,38 +3151,37 @@
           <a:p>
             <a:pPr lvl="0"/>
             <a:r>
-              <a:rPr lang="en-US" smtClean="0"/>
+              <a:rPr lang="en-US"/>
               <a:t>Click to edit Master text styles</a:t>
             </a:r>
           </a:p>
           <a:p>
             <a:pPr lvl="1"/>
             <a:r>
-              <a:rPr lang="en-US" smtClean="0"/>
+              <a:rPr lang="en-US"/>
               <a:t>Second level</a:t>
             </a:r>
           </a:p>
           <a:p>
             <a:pPr lvl="2"/>
             <a:r>
-              <a:rPr lang="en-US" smtClean="0"/>
+              <a:rPr lang="en-US"/>
               <a:t>Third level</a:t>
             </a:r>
           </a:p>
           <a:p>
             <a:pPr lvl="3"/>
             <a:r>
-              <a:rPr lang="en-US" smtClean="0"/>
+              <a:rPr lang="en-US"/>
               <a:t>Fourth level</a:t>
             </a:r>
           </a:p>
           <a:p>
             <a:pPr lvl="4"/>
             <a:r>
-              <a:rPr lang="en-US" smtClean="0"/>
+              <a:rPr lang="en-US"/>
               <a:t>Fifth level</a:t>
             </a:r>
-            <a:endParaRPr lang="en-US"/>
           </a:p>
         </p:txBody>
       </p:sp>
@@ -3486,7 +3202,7 @@
           <a:p>
             <a:fld id="{5BCAD085-E8A6-8845-BD4E-CB4CCA059FC4}" type="datetimeFigureOut">
               <a:rPr lang="en-US" smtClean="0"/>
-              <a:t>1/27/13</a:t>
+              <a:t>8/28/26</a:t>
             </a:fld>
             <a:endParaRPr lang="en-US"/>
           </a:p>
@@ -3580,10 +3296,9 @@
           <a:lstStyle/>
           <a:p>
             <a:r>
-              <a:rPr lang="en-US" smtClean="0"/>
+              <a:rPr lang="en-US"/>
               <a:t>Click to edit Master title style</a:t>
             </a:r>
-            <a:endParaRPr lang="en-US"/>
           </a:p>
         </p:txBody>
       </p:sp>
@@ -3604,7 +3319,7 @@
           <a:p>
             <a:fld id="{5BCAD085-E8A6-8845-BD4E-CB4CCA059FC4}" type="datetimeFigureOut">
               <a:rPr lang="en-US" smtClean="0"/>
-              <a:t>1/27/13</a:t>
+              <a:t>8/28/26</a:t>
             </a:fld>
             <a:endParaRPr lang="en-US"/>
           </a:p>
@@ -3699,7 +3414,7 @@
           <a:p>
             <a:fld id="{5BCAD085-E8A6-8845-BD4E-CB4CCA059FC4}" type="datetimeFigureOut">
               <a:rPr lang="en-US" smtClean="0"/>
-              <a:t>1/27/13</a:t>
+              <a:t>8/28/26</a:t>
             </a:fld>
             <a:endParaRPr lang="en-US"/>
           </a:p>
@@ -3802,10 +3517,9 @@
           </a:lstStyle>
           <a:p>
             <a:r>
-              <a:rPr lang="en-US" smtClean="0"/>
+              <a:rPr lang="en-US"/>
               <a:t>Click to edit Master title style</a:t>
             </a:r>
-            <a:endParaRPr lang="en-US"/>
           </a:p>
         </p:txBody>
       </p:sp>
@@ -3859,38 +3573,37 @@
           <a:p>
             <a:pPr lvl="0"/>
             <a:r>
-              <a:rPr lang="en-US" smtClean="0"/>
+              <a:rPr lang="en-US"/>
               <a:t>Click to edit Master text styles</a:t>
             </a:r>
           </a:p>
           <a:p>
             <a:pPr lvl="1"/>
             <a:r>
-              <a:rPr lang="en-US" smtClean="0"/>
+              <a:rPr lang="en-US"/>
               <a:t>Second level</a:t>
             </a:r>
           </a:p>
           <a:p>
             <a:pPr lvl="2"/>
             <a:r>
-              <a:rPr lang="en-US" smtClean="0"/>
+              <a:rPr lang="en-US"/>
               <a:t>Third level</a:t>
             </a:r>
           </a:p>
           <a:p>
             <a:pPr lvl="3"/>
             <a:r>
-              <a:rPr lang="en-US" smtClean="0"/>
+              <a:rPr lang="en-US"/>
               <a:t>Fourth level</a:t>
             </a:r>
           </a:p>
           <a:p>
             <a:pPr lvl="4"/>
             <a:r>
-              <a:rPr lang="en-US" smtClean="0"/>
+              <a:rPr lang="en-US"/>
               <a:t>Fifth level</a:t>
             </a:r>
-            <a:endParaRPr lang="en-US"/>
           </a:p>
         </p:txBody>
       </p:sp>
@@ -3953,7 +3666,7 @@
           <a:p>
             <a:pPr lvl="0"/>
             <a:r>
-              <a:rPr lang="en-US" smtClean="0"/>
+              <a:rPr lang="en-US"/>
               <a:t>Click to edit Master text styles</a:t>
             </a:r>
           </a:p>
@@ -3976,7 +3689,7 @@
           <a:p>
             <a:fld id="{5BCAD085-E8A6-8845-BD4E-CB4CCA059FC4}" type="datetimeFigureOut">
               <a:rPr lang="en-US" smtClean="0"/>
-              <a:t>1/27/13</a:t>
+              <a:t>8/28/26</a:t>
             </a:fld>
             <a:endParaRPr lang="en-US"/>
           </a:p>
@@ -4079,10 +3792,9 @@
           </a:lstStyle>
           <a:p>
             <a:r>
-              <a:rPr lang="en-US" smtClean="0"/>
+              <a:rPr lang="en-US"/>
               <a:t>Click to edit Master title style</a:t>
             </a:r>
-            <a:endParaRPr lang="en-US"/>
           </a:p>
         </p:txBody>
       </p:sp>
@@ -4206,7 +3918,7 @@
           <a:p>
             <a:pPr lvl="0"/>
             <a:r>
-              <a:rPr lang="en-US" smtClean="0"/>
+              <a:rPr lang="en-US"/>
               <a:t>Click to edit Master text styles</a:t>
             </a:r>
           </a:p>
@@ -4229,7 +3941,7 @@
           <a:p>
             <a:fld id="{5BCAD085-E8A6-8845-BD4E-CB4CCA059FC4}" type="datetimeFigureOut">
               <a:rPr lang="en-US" smtClean="0"/>
-              <a:t>1/27/13</a:t>
+              <a:t>8/28/26</a:t>
             </a:fld>
             <a:endParaRPr lang="en-US"/>
           </a:p>
@@ -4338,10 +4050,9 @@
           <a:lstStyle/>
           <a:p>
             <a:r>
-              <a:rPr lang="en-US" smtClean="0"/>
+              <a:rPr lang="en-US"/>
               <a:t>Click to edit Master title style</a:t>
             </a:r>
-            <a:endParaRPr lang="en-US"/>
           </a:p>
         </p:txBody>
       </p:sp>
@@ -4372,38 +4083,37 @@
           <a:p>
             <a:pPr lvl="0"/>
             <a:r>
-              <a:rPr lang="en-US" smtClean="0"/>
+              <a:rPr lang="en-US"/>
               <a:t>Click to edit Master text styles</a:t>
             </a:r>
           </a:p>
           <a:p>
             <a:pPr lvl="1"/>
             <a:r>
-              <a:rPr lang="en-US" smtClean="0"/>
+              <a:rPr lang="en-US"/>
               <a:t>Second level</a:t>
             </a:r>
           </a:p>
           <a:p>
             <a:pPr lvl="2"/>
             <a:r>
-              <a:rPr lang="en-US" smtClean="0"/>
+              <a:rPr lang="en-US"/>
               <a:t>Third level</a:t>
             </a:r>
           </a:p>
           <a:p>
             <a:pPr lvl="3"/>
             <a:r>
-              <a:rPr lang="en-US" smtClean="0"/>
+              <a:rPr lang="en-US"/>
               <a:t>Fourth level</a:t>
             </a:r>
           </a:p>
           <a:p>
             <a:pPr lvl="4"/>
             <a:r>
-              <a:rPr lang="en-US" smtClean="0"/>
+              <a:rPr lang="en-US"/>
               <a:t>Fifth level</a:t>
             </a:r>
-            <a:endParaRPr lang="en-US"/>
           </a:p>
         </p:txBody>
       </p:sp>
@@ -4442,7 +4152,7 @@
           <a:p>
             <a:fld id="{5BCAD085-E8A6-8845-BD4E-CB4CCA059FC4}" type="datetimeFigureOut">
               <a:rPr lang="en-US" smtClean="0"/>
-              <a:t>1/27/13</a:t>
+              <a:t>8/28/26</a:t>
             </a:fld>
             <a:endParaRPr lang="en-US"/>
           </a:p>
@@ -4801,7 +4511,7 @@
 </file>
 
 <file path=ppt/slides/slide1.xml><?xml version="1.0" encoding="utf-8"?>
-<p:sld xmlns:a="http://schemas.openxmlformats.org/drawingml/2006/main" xmlns:p="http://schemas.openxmlformats.org/presentationml/2006/main" xmlns:r="http://schemas.openxmlformats.org/officeDocument/2006/relationships">
+<p:sld xmlns:a="http://schemas.openxmlformats.org/drawingml/2006/main" xmlns:r="http://schemas.openxmlformats.org/officeDocument/2006/relationships" xmlns:p="http://schemas.openxmlformats.org/presentationml/2006/main">
   <p:cSld>
     <p:spTree>
       <p:nvGrpSpPr>
@@ -4809,7 +4519,14 @@
         <p:cNvGrpSpPr/>
         <p:nvPr/>
       </p:nvGrpSpPr>
-      <p:grpSpPr/>
+      <p:grpSpPr>
+        <a:xfrm>
+          <a:off x="0" y="0"/>
+          <a:ext cx="0" cy="0"/>
+          <a:chOff x="0" y="0"/>
+          <a:chExt cx="0" cy="0"/>
+        </a:xfrm>
+      </p:grpSpPr>
       <p:sp>
         <p:nvSpPr>
           <p:cNvPr id="2" name="Rectangle 1"/>
@@ -4851,6 +4568,7 @@
           <a:lstStyle/>
           <a:p>
             <a:pPr algn="ctr"/>
+            <a:endParaRPr/>
           </a:p>
         </p:txBody>
       </p:sp>
@@ -4987,7 +4705,7 @@
           </a:fontRef>
         </p:style>
         <p:txBody>
-          <a:bodyPr rtlCol="0" anchor="ctr" wrap="square">
+          <a:bodyPr wrap="square" rtlCol="0" anchor="ctr">
             <a:normAutofit/>
           </a:bodyPr>
           <a:lstStyle/>
@@ -5058,7 +4776,7 @@
           </a:fontRef>
         </p:style>
         <p:txBody>
-          <a:bodyPr rtlCol="0" anchor="ctr" wrap="square">
+          <a:bodyPr wrap="square" rtlCol="0" anchor="ctr">
             <a:normAutofit/>
           </a:bodyPr>
           <a:lstStyle/>
@@ -5129,7 +4847,7 @@
           </a:fontRef>
         </p:style>
         <p:txBody>
-          <a:bodyPr rtlCol="0" anchor="ctr" wrap="square">
+          <a:bodyPr wrap="square" rtlCol="0" anchor="ctr">
             <a:normAutofit/>
           </a:bodyPr>
           <a:lstStyle/>
@@ -5200,7 +4918,7 @@
           </a:fontRef>
         </p:style>
         <p:txBody>
-          <a:bodyPr rtlCol="0" anchor="ctr" wrap="square">
+          <a:bodyPr wrap="square" rtlCol="0" anchor="ctr">
             <a:normAutofit/>
           </a:bodyPr>
           <a:lstStyle/>
@@ -5319,7 +5037,7 @@
 </file>
 
 <file path=ppt/slides/slide10.xml><?xml version="1.0" encoding="utf-8"?>
-<p:sld xmlns:a="http://schemas.openxmlformats.org/drawingml/2006/main" xmlns:p="http://schemas.openxmlformats.org/presentationml/2006/main" xmlns:r="http://schemas.openxmlformats.org/officeDocument/2006/relationships">
+<p:sld xmlns:a="http://schemas.openxmlformats.org/drawingml/2006/main" xmlns:r="http://schemas.openxmlformats.org/officeDocument/2006/relationships" xmlns:p="http://schemas.openxmlformats.org/presentationml/2006/main">
   <p:cSld>
     <p:spTree>
       <p:nvGrpSpPr>
@@ -5327,7 +5045,14 @@
         <p:cNvGrpSpPr/>
         <p:nvPr/>
       </p:nvGrpSpPr>
-      <p:grpSpPr/>
+      <p:grpSpPr>
+        <a:xfrm>
+          <a:off x="0" y="0"/>
+          <a:ext cx="0" cy="0"/>
+          <a:chOff x="0" y="0"/>
+          <a:chExt cx="0" cy="0"/>
+        </a:xfrm>
+      </p:grpSpPr>
       <p:sp>
         <p:nvSpPr>
           <p:cNvPr id="2" name="Rectangle 1"/>
@@ -5369,6 +5094,7 @@
           <a:lstStyle/>
           <a:p>
             <a:pPr algn="ctr"/>
+            <a:endParaRPr/>
           </a:p>
         </p:txBody>
       </p:sp>
@@ -5390,7 +5116,7 @@
         </p:spPr>
         <p:txBody>
           <a:bodyPr wrap="square" anchor="t">
-            <a:normAutofit/>
+            <a:noAutofit/>
           </a:bodyPr>
           <a:lstStyle/>
           <a:p>
@@ -5400,7 +5126,7 @@
               </a:spcAft>
             </a:pPr>
             <a:r>
-              <a:rPr sz="1150" b="1">
+              <a:rPr sz="1600" b="1" dirty="0">
                 <a:solidFill>
                   <a:srgbClr val="F5B14C"/>
                 </a:solidFill>
@@ -5419,7 +5145,7 @@
         </p:nvSpPr>
         <p:spPr>
           <a:xfrm>
-            <a:off x="548640" y="603504"/>
+            <a:off x="548640" y="747438"/>
             <a:ext cx="11064240" cy="640080"/>
           </a:xfrm>
           <a:prstGeom prst="rect">
@@ -5439,13 +5165,31 @@
               </a:spcAft>
             </a:pPr>
             <a:r>
-              <a:rPr sz="2800" b="1">
+              <a:rPr sz="2800" b="1" dirty="0">
                 <a:solidFill>
                   <a:srgbClr val="F2F2F5"/>
                 </a:solidFill>
                 <a:latin typeface="Arial"/>
               </a:rPr>
-              <a:t>We measured every channel alone — and two were broken</a:t>
+              <a:t>We measured every channel alone</a:t>
+            </a:r>
+            <a:r>
+              <a:rPr lang="en-US" sz="2800" b="1" dirty="0">
+                <a:solidFill>
+                  <a:srgbClr val="F2F2F5"/>
+                </a:solidFill>
+                <a:latin typeface="Arial"/>
+              </a:rPr>
+              <a:t>,</a:t>
+            </a:r>
+            <a:r>
+              <a:rPr sz="2800" b="1" dirty="0">
+                <a:solidFill>
+                  <a:srgbClr val="F2F2F5"/>
+                </a:solidFill>
+                <a:latin typeface="Arial"/>
+              </a:rPr>
+              <a:t> and two were broken</a:t>
             </a:r>
           </a:p>
         </p:txBody>
@@ -5458,8 +5202,8 @@
         </p:nvSpPr>
         <p:spPr>
           <a:xfrm>
-            <a:off x="548640" y="1298448"/>
-            <a:ext cx="1280160" cy="22860"/>
+            <a:off x="650239" y="611800"/>
+            <a:ext cx="2812627" cy="45719"/>
           </a:xfrm>
           <a:prstGeom prst="rect">
             <a:avLst/>
@@ -5491,6 +5235,7 @@
           <a:lstStyle/>
           <a:p>
             <a:pPr algn="ctr"/>
+            <a:endParaRPr/>
           </a:p>
         </p:txBody>
       </p:sp>
@@ -5581,7 +5326,7 @@
           <p:nvPr/>
         </p:nvPicPr>
         <p:blipFill>
-          <a:blip r:embed="rId2"/>
+          <a:blip r:embed="rId3"/>
           <a:stretch>
             <a:fillRect/>
           </a:stretch>
@@ -5644,7 +5389,7 @@
 </file>
 
 <file path=ppt/slides/slide11.xml><?xml version="1.0" encoding="utf-8"?>
-<p:sld xmlns:a="http://schemas.openxmlformats.org/drawingml/2006/main" xmlns:p="http://schemas.openxmlformats.org/presentationml/2006/main" xmlns:r="http://schemas.openxmlformats.org/officeDocument/2006/relationships">
+<p:sld xmlns:a="http://schemas.openxmlformats.org/drawingml/2006/main" xmlns:r="http://schemas.openxmlformats.org/officeDocument/2006/relationships" xmlns:p="http://schemas.openxmlformats.org/presentationml/2006/main">
   <p:cSld>
     <p:spTree>
       <p:nvGrpSpPr>
@@ -5652,7 +5397,14 @@
         <p:cNvGrpSpPr/>
         <p:nvPr/>
       </p:nvGrpSpPr>
-      <p:grpSpPr/>
+      <p:grpSpPr>
+        <a:xfrm>
+          <a:off x="0" y="0"/>
+          <a:ext cx="0" cy="0"/>
+          <a:chOff x="0" y="0"/>
+          <a:chExt cx="0" cy="0"/>
+        </a:xfrm>
+      </p:grpSpPr>
       <p:sp>
         <p:nvSpPr>
           <p:cNvPr id="2" name="Rectangle 1"/>
@@ -5694,6 +5446,7 @@
           <a:lstStyle/>
           <a:p>
             <a:pPr algn="ctr"/>
+            <a:endParaRPr/>
           </a:p>
         </p:txBody>
       </p:sp>
@@ -5715,7 +5468,7 @@
         </p:spPr>
         <p:txBody>
           <a:bodyPr wrap="square" anchor="t">
-            <a:normAutofit/>
+            <a:noAutofit/>
           </a:bodyPr>
           <a:lstStyle/>
           <a:p>
@@ -5725,7 +5478,7 @@
               </a:spcAft>
             </a:pPr>
             <a:r>
-              <a:rPr sz="1150" b="1">
+              <a:rPr sz="1600" b="1" dirty="0">
                 <a:solidFill>
                   <a:srgbClr val="F5B14C"/>
                 </a:solidFill>
@@ -5744,7 +5497,7 @@
         </p:nvSpPr>
         <p:spPr>
           <a:xfrm>
-            <a:off x="548640" y="603504"/>
+            <a:off x="548640" y="705108"/>
             <a:ext cx="11064240" cy="640080"/>
           </a:xfrm>
           <a:prstGeom prst="rect">
@@ -5754,7 +5507,7 @@
         </p:spPr>
         <p:txBody>
           <a:bodyPr wrap="square" anchor="t">
-            <a:normAutofit/>
+            <a:normAutofit fontScale="92500"/>
           </a:bodyPr>
           <a:lstStyle/>
           <a:p>
@@ -5764,7 +5517,7 @@
               </a:spcAft>
             </a:pPr>
             <a:r>
-              <a:rPr sz="2800" b="1">
+              <a:rPr sz="2800" b="1" dirty="0">
                 <a:solidFill>
                   <a:srgbClr val="F2F2F5"/>
                 </a:solidFill>
@@ -5782,9 +5535,9 @@
           <p:nvPr/>
         </p:nvSpPr>
         <p:spPr>
-          <a:xfrm>
-            <a:off x="548640" y="1298448"/>
-            <a:ext cx="1280160" cy="22860"/>
+          <a:xfrm flipV="1">
+            <a:off x="658706" y="599865"/>
+            <a:ext cx="4370493" cy="45719"/>
           </a:xfrm>
           <a:prstGeom prst="rect">
             <a:avLst/>
@@ -5816,6 +5569,7 @@
           <a:lstStyle/>
           <a:p>
             <a:pPr algn="ctr"/>
+            <a:endParaRPr/>
           </a:p>
         </p:txBody>
       </p:sp>
@@ -5906,7 +5660,7 @@
           <p:nvPr/>
         </p:nvPicPr>
         <p:blipFill>
-          <a:blip r:embed="rId2"/>
+          <a:blip r:embed="rId3"/>
           <a:stretch>
             <a:fillRect/>
           </a:stretch>
@@ -5985,7 +5739,7 @@
 </file>
 
 <file path=ppt/slides/slide12.xml><?xml version="1.0" encoding="utf-8"?>
-<p:sld xmlns:a="http://schemas.openxmlformats.org/drawingml/2006/main" xmlns:p="http://schemas.openxmlformats.org/presentationml/2006/main" xmlns:r="http://schemas.openxmlformats.org/officeDocument/2006/relationships">
+<p:sld xmlns:a="http://schemas.openxmlformats.org/drawingml/2006/main" xmlns:r="http://schemas.openxmlformats.org/officeDocument/2006/relationships" xmlns:p="http://schemas.openxmlformats.org/presentationml/2006/main">
   <p:cSld>
     <p:spTree>
       <p:nvGrpSpPr>
@@ -5993,7 +5747,14 @@
         <p:cNvGrpSpPr/>
         <p:nvPr/>
       </p:nvGrpSpPr>
-      <p:grpSpPr/>
+      <p:grpSpPr>
+        <a:xfrm>
+          <a:off x="0" y="0"/>
+          <a:ext cx="0" cy="0"/>
+          <a:chOff x="0" y="0"/>
+          <a:chExt cx="0" cy="0"/>
+        </a:xfrm>
+      </p:grpSpPr>
       <p:sp>
         <p:nvSpPr>
           <p:cNvPr id="2" name="Rectangle 1"/>
@@ -6035,6 +5796,7 @@
           <a:lstStyle/>
           <a:p>
             <a:pPr algn="ctr"/>
+            <a:endParaRPr/>
           </a:p>
         </p:txBody>
       </p:sp>
@@ -6056,7 +5818,7 @@
         </p:spPr>
         <p:txBody>
           <a:bodyPr wrap="square" anchor="t">
-            <a:normAutofit/>
+            <a:noAutofit/>
           </a:bodyPr>
           <a:lstStyle/>
           <a:p>
@@ -6066,7 +5828,7 @@
               </a:spcAft>
             </a:pPr>
             <a:r>
-              <a:rPr sz="1150" b="1">
+              <a:rPr sz="1600" b="1" dirty="0">
                 <a:solidFill>
                   <a:srgbClr val="F5B14C"/>
                 </a:solidFill>
@@ -6085,7 +5847,7 @@
         </p:nvSpPr>
         <p:spPr>
           <a:xfrm>
-            <a:off x="548640" y="603504"/>
+            <a:off x="548640" y="705108"/>
             <a:ext cx="11064240" cy="640080"/>
           </a:xfrm>
           <a:prstGeom prst="rect">
@@ -6105,7 +5867,7 @@
               </a:spcAft>
             </a:pPr>
             <a:r>
-              <a:rPr sz="2800" b="1">
+              <a:rPr sz="2800" b="1" dirty="0">
                 <a:solidFill>
                   <a:srgbClr val="F2F2F5"/>
                 </a:solidFill>
@@ -6124,8 +5886,8 @@
         </p:nvSpPr>
         <p:spPr>
           <a:xfrm>
-            <a:off x="548640" y="1298448"/>
-            <a:ext cx="1280160" cy="22860"/>
+            <a:off x="641774" y="624077"/>
+            <a:ext cx="949959" cy="45719"/>
           </a:xfrm>
           <a:prstGeom prst="rect">
             <a:avLst/>
@@ -6157,6 +5919,7 @@
           <a:lstStyle/>
           <a:p>
             <a:pPr algn="ctr"/>
+            <a:endParaRPr/>
           </a:p>
         </p:txBody>
       </p:sp>
@@ -6247,7 +6010,7 @@
           <p:nvPr/>
         </p:nvPicPr>
         <p:blipFill>
-          <a:blip r:embed="rId2"/>
+          <a:blip r:embed="rId3"/>
           <a:stretch>
             <a:fillRect/>
           </a:stretch>
@@ -6326,7 +6089,7 @@
 </file>
 
 <file path=ppt/slides/slide13.xml><?xml version="1.0" encoding="utf-8"?>
-<p:sld xmlns:a="http://schemas.openxmlformats.org/drawingml/2006/main" xmlns:p="http://schemas.openxmlformats.org/presentationml/2006/main" xmlns:r="http://schemas.openxmlformats.org/officeDocument/2006/relationships">
+<p:sld xmlns:a="http://schemas.openxmlformats.org/drawingml/2006/main" xmlns:r="http://schemas.openxmlformats.org/officeDocument/2006/relationships" xmlns:p="http://schemas.openxmlformats.org/presentationml/2006/main">
   <p:cSld>
     <p:spTree>
       <p:nvGrpSpPr>
@@ -6334,7 +6097,14 @@
         <p:cNvGrpSpPr/>
         <p:nvPr/>
       </p:nvGrpSpPr>
-      <p:grpSpPr/>
+      <p:grpSpPr>
+        <a:xfrm>
+          <a:off x="0" y="0"/>
+          <a:ext cx="0" cy="0"/>
+          <a:chOff x="0" y="0"/>
+          <a:chExt cx="0" cy="0"/>
+        </a:xfrm>
+      </p:grpSpPr>
       <p:sp>
         <p:nvSpPr>
           <p:cNvPr id="2" name="Rectangle 1"/>
@@ -6376,6 +6146,7 @@
           <a:lstStyle/>
           <a:p>
             <a:pPr algn="ctr"/>
+            <a:endParaRPr dirty="0"/>
           </a:p>
         </p:txBody>
       </p:sp>
@@ -6397,7 +6168,7 @@
         </p:spPr>
         <p:txBody>
           <a:bodyPr wrap="square" anchor="t">
-            <a:normAutofit/>
+            <a:noAutofit/>
           </a:bodyPr>
           <a:lstStyle/>
           <a:p>
@@ -6407,7 +6178,7 @@
               </a:spcAft>
             </a:pPr>
             <a:r>
-              <a:rPr sz="1150" b="1">
+              <a:rPr sz="1600" b="1" dirty="0">
                 <a:solidFill>
                   <a:srgbClr val="E8505B"/>
                 </a:solidFill>
@@ -6426,7 +6197,7 @@
         </p:nvSpPr>
         <p:spPr>
           <a:xfrm>
-            <a:off x="548640" y="603504"/>
+            <a:off x="548640" y="764371"/>
             <a:ext cx="11064240" cy="640080"/>
           </a:xfrm>
           <a:prstGeom prst="rect">
@@ -6465,8 +6236,8 @@
         </p:nvSpPr>
         <p:spPr>
           <a:xfrm>
-            <a:off x="548640" y="1298448"/>
-            <a:ext cx="1280160" cy="22860"/>
+            <a:off x="658707" y="612478"/>
+            <a:ext cx="2753360" cy="45719"/>
           </a:xfrm>
           <a:prstGeom prst="rect">
             <a:avLst/>
@@ -6498,6 +6269,7 @@
           <a:lstStyle/>
           <a:p>
             <a:pPr algn="ctr"/>
+            <a:endParaRPr/>
           </a:p>
         </p:txBody>
       </p:sp>
@@ -6587,7 +6359,7 @@
         </p:nvSpPr>
         <p:spPr>
           <a:xfrm>
-            <a:off x="548640" y="1371600"/>
+            <a:off x="548640" y="1464735"/>
             <a:ext cx="11064240" cy="274320"/>
           </a:xfrm>
           <a:prstGeom prst="rect">
@@ -6597,7 +6369,7 @@
         </p:spPr>
         <p:txBody>
           <a:bodyPr wrap="square" anchor="t">
-            <a:normAutofit/>
+            <a:normAutofit lnSpcReduction="10000"/>
           </a:bodyPr>
           <a:lstStyle/>
           <a:p>
@@ -6607,7 +6379,7 @@
               </a:spcAft>
             </a:pPr>
             <a:r>
-              <a:rPr sz="1300" b="0">
+              <a:rPr sz="1300" b="0" dirty="0">
                 <a:solidFill>
                   <a:srgbClr val="9A9AA8"/>
                 </a:solidFill>
@@ -6627,14 +6399,14 @@
           <p:nvPr/>
         </p:nvPicPr>
         <p:blipFill>
-          <a:blip r:embed="rId2"/>
+          <a:blip r:embed="rId3"/>
           <a:stretch>
             <a:fillRect/>
           </a:stretch>
         </p:blipFill>
         <p:spPr>
           <a:xfrm>
-            <a:off x="822960" y="2049058"/>
+            <a:off x="822960" y="2201459"/>
             <a:ext cx="6766560" cy="3399964"/>
           </a:xfrm>
           <a:prstGeom prst="rect">
@@ -6650,7 +6422,7 @@
         </p:nvSpPr>
         <p:spPr>
           <a:xfrm>
-            <a:off x="7726679" y="1783080"/>
+            <a:off x="7726679" y="2291081"/>
             <a:ext cx="4023360" cy="4343400"/>
           </a:xfrm>
           <a:prstGeom prst="rect">
@@ -6670,7 +6442,7 @@
               </a:spcAft>
             </a:pPr>
             <a:r>
-              <a:rPr sz="1350" b="0">
+              <a:rPr sz="1350" b="0" dirty="0">
                 <a:solidFill>
                   <a:srgbClr val="E8505B"/>
                 </a:solidFill>
@@ -6686,13 +6458,31 @@
               </a:spcAft>
             </a:pPr>
             <a:r>
-              <a:rPr sz="1350" b="0">
+              <a:rPr sz="1350" b="0" dirty="0">
                 <a:solidFill>
                   <a:srgbClr val="F2F2F5"/>
                 </a:solidFill>
                 <a:latin typeface="Arial"/>
               </a:rPr>
-              <a:t>It trains on a random split spanning the whole timeline, on fully matured labels, treating unlabelled as negative. It is not a better model. It is a model that was told the answers.</a:t>
+              <a:t>It trains on a random split spanning the whole timeline, on fully matured labels, treating </a:t>
+            </a:r>
+            <a:r>
+              <a:rPr sz="1350" b="0" dirty="0" err="1">
+                <a:solidFill>
+                  <a:srgbClr val="F2F2F5"/>
+                </a:solidFill>
+                <a:latin typeface="Arial"/>
+              </a:rPr>
+              <a:t>unlabelled</a:t>
+            </a:r>
+            <a:r>
+              <a:rPr sz="1350" b="0" dirty="0">
+                <a:solidFill>
+                  <a:srgbClr val="F2F2F5"/>
+                </a:solidFill>
+                <a:latin typeface="Arial"/>
+              </a:rPr>
+              <a:t> as negative. It is not a better model. It is a model that was told the answers.</a:t>
             </a:r>
           </a:p>
           <a:p>
@@ -6702,7 +6492,7 @@
               </a:spcAft>
             </a:pPr>
             <a:r>
-              <a:rPr sz="1350" b="0">
+              <a:rPr sz="1350" b="0" dirty="0">
                 <a:solidFill>
                   <a:srgbClr val="3DD68C"/>
                 </a:solidFill>
@@ -6722,7 +6512,7 @@
 </file>
 
 <file path=ppt/slides/slide14.xml><?xml version="1.0" encoding="utf-8"?>
-<p:sld xmlns:a="http://schemas.openxmlformats.org/drawingml/2006/main" xmlns:p="http://schemas.openxmlformats.org/presentationml/2006/main" xmlns:r="http://schemas.openxmlformats.org/officeDocument/2006/relationships">
+<p:sld xmlns:a="http://schemas.openxmlformats.org/drawingml/2006/main" xmlns:r="http://schemas.openxmlformats.org/officeDocument/2006/relationships" xmlns:p="http://schemas.openxmlformats.org/presentationml/2006/main">
   <p:cSld>
     <p:spTree>
       <p:nvGrpSpPr>
@@ -6730,7 +6520,14 @@
         <p:cNvGrpSpPr/>
         <p:nvPr/>
       </p:nvGrpSpPr>
-      <p:grpSpPr/>
+      <p:grpSpPr>
+        <a:xfrm>
+          <a:off x="0" y="0"/>
+          <a:ext cx="0" cy="0"/>
+          <a:chOff x="0" y="0"/>
+          <a:chExt cx="0" cy="0"/>
+        </a:xfrm>
+      </p:grpSpPr>
       <p:sp>
         <p:nvSpPr>
           <p:cNvPr id="2" name="Rectangle 1"/>
@@ -6772,6 +6569,7 @@
           <a:lstStyle/>
           <a:p>
             <a:pPr algn="ctr"/>
+            <a:endParaRPr/>
           </a:p>
         </p:txBody>
       </p:sp>
@@ -6793,7 +6591,7 @@
         </p:spPr>
         <p:txBody>
           <a:bodyPr wrap="square" anchor="t">
-            <a:normAutofit/>
+            <a:noAutofit/>
           </a:bodyPr>
           <a:lstStyle/>
           <a:p>
@@ -6803,7 +6601,7 @@
               </a:spcAft>
             </a:pPr>
             <a:r>
-              <a:rPr sz="1150" b="1">
+              <a:rPr sz="1600" b="1" dirty="0">
                 <a:solidFill>
                   <a:srgbClr val="4A9EFF"/>
                 </a:solidFill>
@@ -6822,7 +6620,7 @@
         </p:nvSpPr>
         <p:spPr>
           <a:xfrm>
-            <a:off x="548640" y="603504"/>
+            <a:off x="548640" y="781305"/>
             <a:ext cx="11064240" cy="640080"/>
           </a:xfrm>
           <a:prstGeom prst="rect">
@@ -6842,7 +6640,7 @@
               </a:spcAft>
             </a:pPr>
             <a:r>
-              <a:rPr sz="2800" b="1">
+              <a:rPr sz="2800" b="1" dirty="0">
                 <a:solidFill>
                   <a:srgbClr val="F2F2F5"/>
                 </a:solidFill>
@@ -6861,8 +6659,8 @@
         </p:nvSpPr>
         <p:spPr>
           <a:xfrm>
-            <a:off x="548640" y="1298448"/>
-            <a:ext cx="1280160" cy="22860"/>
+            <a:off x="658705" y="617219"/>
+            <a:ext cx="4099561" cy="45719"/>
           </a:xfrm>
           <a:prstGeom prst="rect">
             <a:avLst/>
@@ -6894,6 +6692,7 @@
           <a:lstStyle/>
           <a:p>
             <a:pPr algn="ctr"/>
+            <a:endParaRPr/>
           </a:p>
         </p:txBody>
       </p:sp>
@@ -6984,14 +6783,14 @@
           <p:nvPr/>
         </p:nvPicPr>
         <p:blipFill>
-          <a:blip r:embed="rId2"/>
+          <a:blip r:embed="rId3"/>
           <a:stretch>
             <a:fillRect/>
           </a:stretch>
         </p:blipFill>
         <p:spPr>
           <a:xfrm>
-            <a:off x="457200" y="1617901"/>
+            <a:off x="441960" y="1624586"/>
             <a:ext cx="6035040" cy="3530758"/>
           </a:xfrm>
           <a:prstGeom prst="rect">
@@ -7007,7 +6806,7 @@
         </p:nvSpPr>
         <p:spPr>
           <a:xfrm>
-            <a:off x="6720840" y="1645920"/>
+            <a:off x="6720840" y="1899922"/>
             <a:ext cx="5029200" cy="4434840"/>
           </a:xfrm>
           <a:prstGeom prst="rect">
@@ -7027,7 +6826,7 @@
               </a:spcAft>
             </a:pPr>
             <a:r>
-              <a:rPr sz="1350" b="0">
+              <a:rPr sz="1350" b="0" dirty="0">
                 <a:solidFill>
                   <a:srgbClr val="4A9EFF"/>
                 </a:solidFill>
@@ -7043,7 +6842,7 @@
               </a:spcAft>
             </a:pPr>
             <a:r>
-              <a:rPr sz="1350" b="0">
+              <a:rPr sz="1350" b="0" dirty="0">
                 <a:solidFill>
                   <a:srgbClr val="F5B14C"/>
                 </a:solidFill>
@@ -7059,7 +6858,7 @@
               </a:spcAft>
             </a:pPr>
             <a:r>
-              <a:rPr sz="1350" b="0">
+              <a:rPr sz="1350" b="0" dirty="0">
                 <a:solidFill>
                   <a:srgbClr val="3DD68C"/>
                 </a:solidFill>
@@ -7079,7 +6878,7 @@
 </file>
 
 <file path=ppt/slides/slide15.xml><?xml version="1.0" encoding="utf-8"?>
-<p:sld xmlns:a="http://schemas.openxmlformats.org/drawingml/2006/main" xmlns:p="http://schemas.openxmlformats.org/presentationml/2006/main" xmlns:r="http://schemas.openxmlformats.org/officeDocument/2006/relationships">
+<p:sld xmlns:a="http://schemas.openxmlformats.org/drawingml/2006/main" xmlns:r="http://schemas.openxmlformats.org/officeDocument/2006/relationships" xmlns:p="http://schemas.openxmlformats.org/presentationml/2006/main">
   <p:cSld>
     <p:spTree>
       <p:nvGrpSpPr>
@@ -7087,7 +6886,14 @@
         <p:cNvGrpSpPr/>
         <p:nvPr/>
       </p:nvGrpSpPr>
-      <p:grpSpPr/>
+      <p:grpSpPr>
+        <a:xfrm>
+          <a:off x="0" y="0"/>
+          <a:ext cx="0" cy="0"/>
+          <a:chOff x="0" y="0"/>
+          <a:chExt cx="0" cy="0"/>
+        </a:xfrm>
+      </p:grpSpPr>
       <p:sp>
         <p:nvSpPr>
           <p:cNvPr id="2" name="Rectangle 1"/>
@@ -7129,6 +6935,7 @@
           <a:lstStyle/>
           <a:p>
             <a:pPr algn="ctr"/>
+            <a:endParaRPr/>
           </a:p>
         </p:txBody>
       </p:sp>
@@ -7150,7 +6957,7 @@
         </p:spPr>
         <p:txBody>
           <a:bodyPr wrap="square" anchor="t">
-            <a:normAutofit/>
+            <a:noAutofit/>
           </a:bodyPr>
           <a:lstStyle/>
           <a:p>
@@ -7160,7 +6967,7 @@
               </a:spcAft>
             </a:pPr>
             <a:r>
-              <a:rPr sz="1150" b="1">
+              <a:rPr sz="1600" b="1" dirty="0">
                 <a:solidFill>
                   <a:srgbClr val="4A9EFF"/>
                 </a:solidFill>
@@ -7179,7 +6986,7 @@
         </p:nvSpPr>
         <p:spPr>
           <a:xfrm>
-            <a:off x="548640" y="603504"/>
+            <a:off x="463973" y="730506"/>
             <a:ext cx="11064240" cy="640080"/>
           </a:xfrm>
           <a:prstGeom prst="rect">
@@ -7199,7 +7006,7 @@
               </a:spcAft>
             </a:pPr>
             <a:r>
-              <a:rPr sz="2800" b="1">
+              <a:rPr sz="2800" b="1" dirty="0">
                 <a:solidFill>
                   <a:srgbClr val="F2F2F5"/>
                 </a:solidFill>
@@ -7218,8 +7025,8 @@
         </p:nvSpPr>
         <p:spPr>
           <a:xfrm>
-            <a:off x="548640" y="1298448"/>
-            <a:ext cx="1280160" cy="22860"/>
+            <a:off x="655320" y="615694"/>
+            <a:ext cx="2621279" cy="45719"/>
           </a:xfrm>
           <a:prstGeom prst="rect">
             <a:avLst/>
@@ -7251,6 +7058,7 @@
           <a:lstStyle/>
           <a:p>
             <a:pPr algn="ctr"/>
+            <a:endParaRPr/>
           </a:p>
         </p:txBody>
       </p:sp>
@@ -7338,7 +7146,13 @@
           <p:cNvGraphicFramePr>
             <a:graphicFrameLocks noGrp="1"/>
           </p:cNvGraphicFramePr>
-          <p:nvPr/>
+          <p:nvPr>
+            <p:extLst>
+              <p:ext uri="{D42A27DB-BD31-4B8C-83A1-F6EECF244321}">
+                <p14:modId xmlns:p14="http://schemas.microsoft.com/office/powerpoint/2010/main" val="673089390"/>
+              </p:ext>
+            </p:extLst>
+          </p:nvPr>
         </p:nvGraphicFramePr>
         <p:xfrm>
           <a:off x="548640" y="1572768"/>
@@ -7351,28 +7165,52 @@
                 <a:tableStyleId>{5C22544A-7EE6-4342-B048-85BDC9FD1C3A}</a:tableStyleId>
               </a:tblPr>
               <a:tblGrid>
-                <a:gridCol w="2560320"/>
-                <a:gridCol w="2194560"/>
-                <a:gridCol w="1920240"/>
+                <a:gridCol w="2560320">
+                  <a:extLst>
+                    <a:ext uri="{9D8B030D-6E8A-4147-A177-3AD203B41FA5}">
+                      <a16:colId xmlns:a16="http://schemas.microsoft.com/office/drawing/2014/main" val="20000"/>
+                    </a:ext>
+                  </a:extLst>
+                </a:gridCol>
+                <a:gridCol w="2194560">
+                  <a:extLst>
+                    <a:ext uri="{9D8B030D-6E8A-4147-A177-3AD203B41FA5}">
+                      <a16:colId xmlns:a16="http://schemas.microsoft.com/office/drawing/2014/main" val="20001"/>
+                    </a:ext>
+                  </a:extLst>
+                </a:gridCol>
+                <a:gridCol w="1920240">
+                  <a:extLst>
+                    <a:ext uri="{9D8B030D-6E8A-4147-A177-3AD203B41FA5}">
+                      <a16:colId xmlns:a16="http://schemas.microsoft.com/office/drawing/2014/main" val="20002"/>
+                    </a:ext>
+                  </a:extLst>
+                </a:gridCol>
               </a:tblGrid>
               <a:tr h="378927">
                 <a:tc>
                   <a:txBody>
-                    <a:bodyPr wrap="square"/>
+                    <a:bodyPr/>
                     <a:lstStyle/>
                     <a:p>
                       <a:r>
-                        <a:rPr sz="1150" b="1">
+                        <a:rPr lang="en-US" sz="1150" b="1" dirty="0">
                           <a:solidFill>
                             <a:srgbClr val="4A9EFF"/>
                           </a:solidFill>
                           <a:latin typeface="Arial"/>
                         </a:rPr>
-                        <a:t>rail</a:t>
+                        <a:t>RAIL</a:t>
                       </a:r>
+                      <a:endParaRPr sz="1150" b="1" dirty="0">
+                        <a:solidFill>
+                          <a:srgbClr val="4A9EFF"/>
+                        </a:solidFill>
+                        <a:latin typeface="Arial"/>
+                      </a:endParaRPr>
                     </a:p>
                   </a:txBody>
-                  <a:tcPr marL="91440" marR="91440" marT="18288" marB="18288" anchor="ctr">
+                  <a:tcPr marT="18288" marB="18288" anchor="ctr">
                     <a:solidFill>
                       <a:srgbClr val="0B0B0F"/>
                     </a:solidFill>
@@ -7380,21 +7218,27 @@
                 </a:tc>
                 <a:tc>
                   <a:txBody>
-                    <a:bodyPr wrap="square"/>
+                    <a:bodyPr/>
                     <a:lstStyle/>
                     <a:p>
                       <a:r>
-                        <a:rPr sz="1150" b="1">
+                        <a:rPr lang="en-US" sz="1150" b="1" dirty="0">
                           <a:solidFill>
                             <a:srgbClr val="4A9EFF"/>
                           </a:solidFill>
                           <a:latin typeface="Arial"/>
                         </a:rPr>
-                        <a:t>friction</a:t>
+                        <a:t>FRICTION</a:t>
                       </a:r>
+                      <a:endParaRPr sz="1150" b="1" dirty="0">
+                        <a:solidFill>
+                          <a:srgbClr val="4A9EFF"/>
+                        </a:solidFill>
+                        <a:latin typeface="Arial"/>
+                      </a:endParaRPr>
                     </a:p>
                   </a:txBody>
-                  <a:tcPr marL="91440" marR="91440" marT="18288" marB="18288" anchor="ctr">
+                  <a:tcPr marT="18288" marB="18288" anchor="ctr">
                     <a:solidFill>
                       <a:srgbClr val="0B0B0F"/>
                     </a:solidFill>
@@ -7402,31 +7246,42 @@
                 </a:tc>
                 <a:tc>
                   <a:txBody>
-                    <a:bodyPr wrap="square"/>
+                    <a:bodyPr/>
                     <a:lstStyle/>
                     <a:p>
                       <a:r>
-                        <a:rPr sz="1150" b="1">
+                        <a:rPr lang="en-US" sz="1150" b="1" dirty="0">
                           <a:solidFill>
                             <a:srgbClr val="4A9EFF"/>
                           </a:solidFill>
                           <a:latin typeface="Arial"/>
                         </a:rPr>
-                        <a:t>decline</a:t>
+                        <a:t>DECLINE</a:t>
                       </a:r>
+                      <a:endParaRPr sz="1150" b="1" dirty="0">
+                        <a:solidFill>
+                          <a:srgbClr val="4A9EFF"/>
+                        </a:solidFill>
+                        <a:latin typeface="Arial"/>
+                      </a:endParaRPr>
                     </a:p>
                   </a:txBody>
-                  <a:tcPr marL="91440" marR="91440" marT="18288" marB="18288" anchor="ctr">
+                  <a:tcPr marT="18288" marB="18288" anchor="ctr">
                     <a:solidFill>
                       <a:srgbClr val="0B0B0F"/>
                     </a:solidFill>
                   </a:tcPr>
                 </a:tc>
+                <a:extLst>
+                  <a:ext uri="{0D108BD9-81ED-4DB2-BD59-A6C34878D82A}">
+                    <a16:rowId xmlns:a16="http://schemas.microsoft.com/office/drawing/2014/main" val="10000"/>
+                  </a:ext>
+                </a:extLst>
               </a:tr>
               <a:tr h="378927">
                 <a:tc>
                   <a:txBody>
-                    <a:bodyPr wrap="square"/>
+                    <a:bodyPr/>
                     <a:lstStyle/>
                     <a:p>
                       <a:r>
@@ -7440,7 +7295,7 @@
                       </a:r>
                     </a:p>
                   </a:txBody>
-                  <a:tcPr marL="91440" marR="91440" marT="18288" marB="18288" anchor="ctr">
+                  <a:tcPr marT="18288" marB="18288" anchor="ctr">
                     <a:solidFill>
                       <a:srgbClr val="15161D"/>
                     </a:solidFill>
@@ -7448,7 +7303,7 @@
                 </a:tc>
                 <a:tc>
                   <a:txBody>
-                    <a:bodyPr wrap="square"/>
+                    <a:bodyPr/>
                     <a:lstStyle/>
                     <a:p>
                       <a:r>
@@ -7462,7 +7317,7 @@
                       </a:r>
                     </a:p>
                   </a:txBody>
-                  <a:tcPr marL="91440" marR="91440" marT="18288" marB="18288" anchor="ctr">
+                  <a:tcPr marT="18288" marB="18288" anchor="ctr">
                     <a:solidFill>
                       <a:srgbClr val="15161D"/>
                     </a:solidFill>
@@ -7470,7 +7325,7 @@
                 </a:tc>
                 <a:tc>
                   <a:txBody>
-                    <a:bodyPr wrap="square"/>
+                    <a:bodyPr/>
                     <a:lstStyle/>
                     <a:p>
                       <a:r>
@@ -7484,17 +7339,22 @@
                       </a:r>
                     </a:p>
                   </a:txBody>
-                  <a:tcPr marL="91440" marR="91440" marT="18288" marB="18288" anchor="ctr">
+                  <a:tcPr marT="18288" marB="18288" anchor="ctr">
                     <a:solidFill>
                       <a:srgbClr val="15161D"/>
                     </a:solidFill>
                   </a:tcPr>
                 </a:tc>
+                <a:extLst>
+                  <a:ext uri="{0D108BD9-81ED-4DB2-BD59-A6C34878D82A}">
+                    <a16:rowId xmlns:a16="http://schemas.microsoft.com/office/drawing/2014/main" val="10001"/>
+                  </a:ext>
+                </a:extLst>
               </a:tr>
               <a:tr h="378927">
                 <a:tc>
                   <a:txBody>
-                    <a:bodyPr wrap="square"/>
+                    <a:bodyPr/>
                     <a:lstStyle/>
                     <a:p>
                       <a:r>
@@ -7508,7 +7368,7 @@
                       </a:r>
                     </a:p>
                   </a:txBody>
-                  <a:tcPr marL="91440" marR="91440" marT="18288" marB="18288" anchor="ctr">
+                  <a:tcPr marT="18288" marB="18288" anchor="ctr">
                     <a:solidFill>
                       <a:srgbClr val="15161D"/>
                     </a:solidFill>
@@ -7516,7 +7376,7 @@
                 </a:tc>
                 <a:tc>
                   <a:txBody>
-                    <a:bodyPr wrap="square"/>
+                    <a:bodyPr/>
                     <a:lstStyle/>
                     <a:p>
                       <a:r>
@@ -7530,7 +7390,7 @@
                       </a:r>
                     </a:p>
                   </a:txBody>
-                  <a:tcPr marL="91440" marR="91440" marT="18288" marB="18288" anchor="ctr">
+                  <a:tcPr marT="18288" marB="18288" anchor="ctr">
                     <a:solidFill>
                       <a:srgbClr val="15161D"/>
                     </a:solidFill>
@@ -7538,7 +7398,7 @@
                 </a:tc>
                 <a:tc>
                   <a:txBody>
-                    <a:bodyPr wrap="square"/>
+                    <a:bodyPr/>
                     <a:lstStyle/>
                     <a:p>
                       <a:r>
@@ -7552,17 +7412,22 @@
                       </a:r>
                     </a:p>
                   </a:txBody>
-                  <a:tcPr marL="91440" marR="91440" marT="18288" marB="18288" anchor="ctr">
+                  <a:tcPr marT="18288" marB="18288" anchor="ctr">
                     <a:solidFill>
                       <a:srgbClr val="15161D"/>
                     </a:solidFill>
                   </a:tcPr>
                 </a:tc>
+                <a:extLst>
+                  <a:ext uri="{0D108BD9-81ED-4DB2-BD59-A6C34878D82A}">
+                    <a16:rowId xmlns:a16="http://schemas.microsoft.com/office/drawing/2014/main" val="10002"/>
+                  </a:ext>
+                </a:extLst>
               </a:tr>
               <a:tr h="378927">
                 <a:tc>
                   <a:txBody>
-                    <a:bodyPr wrap="square"/>
+                    <a:bodyPr/>
                     <a:lstStyle/>
                     <a:p>
                       <a:r>
@@ -7576,7 +7441,7 @@
                       </a:r>
                     </a:p>
                   </a:txBody>
-                  <a:tcPr marL="91440" marR="91440" marT="18288" marB="18288" anchor="ctr">
+                  <a:tcPr marT="18288" marB="18288" anchor="ctr">
                     <a:solidFill>
                       <a:srgbClr val="15161D"/>
                     </a:solidFill>
@@ -7584,7 +7449,7 @@
                 </a:tc>
                 <a:tc>
                   <a:txBody>
-                    <a:bodyPr wrap="square"/>
+                    <a:bodyPr/>
                     <a:lstStyle/>
                     <a:p>
                       <a:r>
@@ -7598,7 +7463,7 @@
                       </a:r>
                     </a:p>
                   </a:txBody>
-                  <a:tcPr marL="91440" marR="91440" marT="18288" marB="18288" anchor="ctr">
+                  <a:tcPr marT="18288" marB="18288" anchor="ctr">
                     <a:solidFill>
                       <a:srgbClr val="15161D"/>
                     </a:solidFill>
@@ -7606,7 +7471,7 @@
                 </a:tc>
                 <a:tc>
                   <a:txBody>
-                    <a:bodyPr wrap="square"/>
+                    <a:bodyPr/>
                     <a:lstStyle/>
                     <a:p>
                       <a:r>
@@ -7620,21 +7485,26 @@
                       </a:r>
                     </a:p>
                   </a:txBody>
-                  <a:tcPr marL="91440" marR="91440" marT="18288" marB="18288" anchor="ctr">
+                  <a:tcPr marT="18288" marB="18288" anchor="ctr">
                     <a:solidFill>
                       <a:srgbClr val="15161D"/>
                     </a:solidFill>
                   </a:tcPr>
                 </a:tc>
+                <a:extLst>
+                  <a:ext uri="{0D108BD9-81ED-4DB2-BD59-A6C34878D82A}">
+                    <a16:rowId xmlns:a16="http://schemas.microsoft.com/office/drawing/2014/main" val="10003"/>
+                  </a:ext>
+                </a:extLst>
               </a:tr>
               <a:tr h="378927">
                 <a:tc>
                   <a:txBody>
-                    <a:bodyPr wrap="square"/>
+                    <a:bodyPr/>
                     <a:lstStyle/>
                     <a:p>
                       <a:r>
-                        <a:rPr sz="1250" b="0">
+                        <a:rPr sz="1250" b="0" dirty="0">
                           <a:solidFill>
                             <a:srgbClr val="F2F2F5"/>
                           </a:solidFill>
@@ -7644,7 +7514,7 @@
                       </a:r>
                     </a:p>
                   </a:txBody>
-                  <a:tcPr marL="91440" marR="91440" marT="18288" marB="18288" anchor="ctr">
+                  <a:tcPr marT="18288" marB="18288" anchor="ctr">
                     <a:solidFill>
                       <a:srgbClr val="15161D"/>
                     </a:solidFill>
@@ -7652,7 +7522,7 @@
                 </a:tc>
                 <a:tc>
                   <a:txBody>
-                    <a:bodyPr wrap="square"/>
+                    <a:bodyPr/>
                     <a:lstStyle/>
                     <a:p>
                       <a:r>
@@ -7666,7 +7536,7 @@
                       </a:r>
                     </a:p>
                   </a:txBody>
-                  <a:tcPr marL="91440" marR="91440" marT="18288" marB="18288" anchor="ctr">
+                  <a:tcPr marT="18288" marB="18288" anchor="ctr">
                     <a:solidFill>
                       <a:srgbClr val="15161D"/>
                     </a:solidFill>
@@ -7674,7 +7544,7 @@
                 </a:tc>
                 <a:tc>
                   <a:txBody>
-                    <a:bodyPr wrap="square"/>
+                    <a:bodyPr/>
                     <a:lstStyle/>
                     <a:p>
                       <a:r>
@@ -7688,17 +7558,22 @@
                       </a:r>
                     </a:p>
                   </a:txBody>
-                  <a:tcPr marL="91440" marR="91440" marT="18288" marB="18288" anchor="ctr">
+                  <a:tcPr marT="18288" marB="18288" anchor="ctr">
                     <a:solidFill>
                       <a:srgbClr val="15161D"/>
                     </a:solidFill>
                   </a:tcPr>
                 </a:tc>
+                <a:extLst>
+                  <a:ext uri="{0D108BD9-81ED-4DB2-BD59-A6C34878D82A}">
+                    <a16:rowId xmlns:a16="http://schemas.microsoft.com/office/drawing/2014/main" val="10004"/>
+                  </a:ext>
+                </a:extLst>
               </a:tr>
               <a:tr h="378927">
                 <a:tc>
                   <a:txBody>
-                    <a:bodyPr wrap="square"/>
+                    <a:bodyPr/>
                     <a:lstStyle/>
                     <a:p>
                       <a:r>
@@ -7712,7 +7587,7 @@
                       </a:r>
                     </a:p>
                   </a:txBody>
-                  <a:tcPr marL="91440" marR="91440" marT="18288" marB="18288" anchor="ctr">
+                  <a:tcPr marT="18288" marB="18288" anchor="ctr">
                     <a:solidFill>
                       <a:srgbClr val="15161D"/>
                     </a:solidFill>
@@ -7720,7 +7595,7 @@
                 </a:tc>
                 <a:tc>
                   <a:txBody>
-                    <a:bodyPr wrap="square"/>
+                    <a:bodyPr/>
                     <a:lstStyle/>
                     <a:p>
                       <a:r>
@@ -7734,7 +7609,7 @@
                       </a:r>
                     </a:p>
                   </a:txBody>
-                  <a:tcPr marL="91440" marR="91440" marT="18288" marB="18288" anchor="ctr">
+                  <a:tcPr marT="18288" marB="18288" anchor="ctr">
                     <a:solidFill>
                       <a:srgbClr val="15161D"/>
                     </a:solidFill>
@@ -7742,7 +7617,7 @@
                 </a:tc>
                 <a:tc>
                   <a:txBody>
-                    <a:bodyPr wrap="square"/>
+                    <a:bodyPr/>
                     <a:lstStyle/>
                     <a:p>
                       <a:r>
@@ -7756,17 +7631,22 @@
                       </a:r>
                     </a:p>
                   </a:txBody>
-                  <a:tcPr marL="91440" marR="91440" marT="18288" marB="18288" anchor="ctr">
+                  <a:tcPr marT="18288" marB="18288" anchor="ctr">
                     <a:solidFill>
                       <a:srgbClr val="15161D"/>
                     </a:solidFill>
                   </a:tcPr>
                 </a:tc>
+                <a:extLst>
+                  <a:ext uri="{0D108BD9-81ED-4DB2-BD59-A6C34878D82A}">
+                    <a16:rowId xmlns:a16="http://schemas.microsoft.com/office/drawing/2014/main" val="10005"/>
+                  </a:ext>
+                </a:extLst>
               </a:tr>
               <a:tr h="378927">
                 <a:tc>
                   <a:txBody>
-                    <a:bodyPr wrap="square"/>
+                    <a:bodyPr/>
                     <a:lstStyle/>
                     <a:p>
                       <a:r>
@@ -7780,7 +7660,7 @@
                       </a:r>
                     </a:p>
                   </a:txBody>
-                  <a:tcPr marL="91440" marR="91440" marT="18288" marB="18288" anchor="ctr">
+                  <a:tcPr marT="18288" marB="18288" anchor="ctr">
                     <a:solidFill>
                       <a:srgbClr val="15161D"/>
                     </a:solidFill>
@@ -7788,7 +7668,7 @@
                 </a:tc>
                 <a:tc>
                   <a:txBody>
-                    <a:bodyPr wrap="square"/>
+                    <a:bodyPr/>
                     <a:lstStyle/>
                     <a:p>
                       <a:r>
@@ -7802,7 +7682,7 @@
                       </a:r>
                     </a:p>
                   </a:txBody>
-                  <a:tcPr marL="91440" marR="91440" marT="18288" marB="18288" anchor="ctr">
+                  <a:tcPr marT="18288" marB="18288" anchor="ctr">
                     <a:solidFill>
                       <a:srgbClr val="15161D"/>
                     </a:solidFill>
@@ -7810,11 +7690,11 @@
                 </a:tc>
                 <a:tc>
                   <a:txBody>
-                    <a:bodyPr wrap="square"/>
+                    <a:bodyPr/>
                     <a:lstStyle/>
                     <a:p>
                       <a:r>
-                        <a:rPr sz="1250" b="0">
+                        <a:rPr sz="1250" b="0" dirty="0" err="1">
                           <a:solidFill>
                             <a:srgbClr val="F2F2F5"/>
                           </a:solidFill>
@@ -7822,14 +7702,25 @@
                         </a:rPr>
                         <a:t>mandate_refuse</a:t>
                       </a:r>
+                      <a:endParaRPr sz="1250" b="0" dirty="0">
+                        <a:solidFill>
+                          <a:srgbClr val="F2F2F5"/>
+                        </a:solidFill>
+                        <a:latin typeface="Arial"/>
+                      </a:endParaRPr>
                     </a:p>
                   </a:txBody>
-                  <a:tcPr marL="91440" marR="91440" marT="18288" marB="18288" anchor="ctr">
+                  <a:tcPr marT="18288" marB="18288" anchor="ctr">
                     <a:solidFill>
                       <a:srgbClr val="15161D"/>
                     </a:solidFill>
                   </a:tcPr>
                 </a:tc>
+                <a:extLst>
+                  <a:ext uri="{0D108BD9-81ED-4DB2-BD59-A6C34878D82A}">
+                    <a16:rowId xmlns:a16="http://schemas.microsoft.com/office/drawing/2014/main" val="10006"/>
+                  </a:ext>
+                </a:extLst>
               </a:tr>
             </a:tbl>
           </a:graphicData>
@@ -8018,7 +7909,7 @@
 </file>
 
 <file path=ppt/slides/slide16.xml><?xml version="1.0" encoding="utf-8"?>
-<p:sld xmlns:a="http://schemas.openxmlformats.org/drawingml/2006/main" xmlns:p="http://schemas.openxmlformats.org/presentationml/2006/main" xmlns:r="http://schemas.openxmlformats.org/officeDocument/2006/relationships">
+<p:sld xmlns:a="http://schemas.openxmlformats.org/drawingml/2006/main" xmlns:r="http://schemas.openxmlformats.org/officeDocument/2006/relationships" xmlns:p="http://schemas.openxmlformats.org/presentationml/2006/main">
   <p:cSld>
     <p:spTree>
       <p:nvGrpSpPr>
@@ -8026,7 +7917,14 @@
         <p:cNvGrpSpPr/>
         <p:nvPr/>
       </p:nvGrpSpPr>
-      <p:grpSpPr/>
+      <p:grpSpPr>
+        <a:xfrm>
+          <a:off x="0" y="0"/>
+          <a:ext cx="0" cy="0"/>
+          <a:chOff x="0" y="0"/>
+          <a:chExt cx="0" cy="0"/>
+        </a:xfrm>
+      </p:grpSpPr>
       <p:sp>
         <p:nvSpPr>
           <p:cNvPr id="2" name="Rectangle 1"/>
@@ -8068,6 +7966,7 @@
           <a:lstStyle/>
           <a:p>
             <a:pPr algn="ctr"/>
+            <a:endParaRPr/>
           </a:p>
         </p:txBody>
       </p:sp>
@@ -8089,7 +7988,7 @@
         </p:spPr>
         <p:txBody>
           <a:bodyPr wrap="square" anchor="t">
-            <a:normAutofit/>
+            <a:noAutofit/>
           </a:bodyPr>
           <a:lstStyle/>
           <a:p>
@@ -8099,7 +7998,7 @@
               </a:spcAft>
             </a:pPr>
             <a:r>
-              <a:rPr sz="1150" b="1">
+              <a:rPr sz="1600" b="1" dirty="0">
                 <a:solidFill>
                   <a:srgbClr val="F5B14C"/>
                 </a:solidFill>
@@ -8118,7 +8017,7 @@
         </p:nvSpPr>
         <p:spPr>
           <a:xfrm>
-            <a:off x="548640" y="603504"/>
+            <a:off x="548640" y="764371"/>
             <a:ext cx="11064240" cy="640080"/>
           </a:xfrm>
           <a:prstGeom prst="rect">
@@ -8138,7 +8037,7 @@
               </a:spcAft>
             </a:pPr>
             <a:r>
-              <a:rPr sz="2800" b="1">
+              <a:rPr sz="2800" b="1" dirty="0">
                 <a:solidFill>
                   <a:srgbClr val="F2F2F5"/>
                 </a:solidFill>
@@ -8157,7 +8056,7 @@
         </p:nvSpPr>
         <p:spPr>
           <a:xfrm>
-            <a:off x="548640" y="1298448"/>
+            <a:off x="663789" y="606045"/>
             <a:ext cx="1280160" cy="22860"/>
           </a:xfrm>
           <a:prstGeom prst="rect">
@@ -8190,6 +8089,7 @@
           <a:lstStyle/>
           <a:p>
             <a:pPr algn="ctr"/>
+            <a:endParaRPr/>
           </a:p>
         </p:txBody>
       </p:sp>
@@ -8383,7 +8283,7 @@
 </file>
 
 <file path=ppt/slides/slide17.xml><?xml version="1.0" encoding="utf-8"?>
-<p:sld xmlns:a="http://schemas.openxmlformats.org/drawingml/2006/main" xmlns:p="http://schemas.openxmlformats.org/presentationml/2006/main" xmlns:r="http://schemas.openxmlformats.org/officeDocument/2006/relationships">
+<p:sld xmlns:a="http://schemas.openxmlformats.org/drawingml/2006/main" xmlns:r="http://schemas.openxmlformats.org/officeDocument/2006/relationships" xmlns:p="http://schemas.openxmlformats.org/presentationml/2006/main">
   <p:cSld>
     <p:spTree>
       <p:nvGrpSpPr>
@@ -8391,7 +8291,14 @@
         <p:cNvGrpSpPr/>
         <p:nvPr/>
       </p:nvGrpSpPr>
-      <p:grpSpPr/>
+      <p:grpSpPr>
+        <a:xfrm>
+          <a:off x="0" y="0"/>
+          <a:ext cx="0" cy="0"/>
+          <a:chOff x="0" y="0"/>
+          <a:chExt cx="0" cy="0"/>
+        </a:xfrm>
+      </p:grpSpPr>
       <p:sp>
         <p:nvSpPr>
           <p:cNvPr id="2" name="Rectangle 1"/>
@@ -8433,6 +8340,7 @@
           <a:lstStyle/>
           <a:p>
             <a:pPr algn="ctr"/>
+            <a:endParaRPr/>
           </a:p>
         </p:txBody>
       </p:sp>
@@ -8454,7 +8362,7 @@
         </p:spPr>
         <p:txBody>
           <a:bodyPr wrap="square" anchor="t">
-            <a:normAutofit/>
+            <a:noAutofit/>
           </a:bodyPr>
           <a:lstStyle/>
           <a:p>
@@ -8464,7 +8372,7 @@
               </a:spcAft>
             </a:pPr>
             <a:r>
-              <a:rPr sz="1150" b="1">
+              <a:rPr sz="1600" b="1" dirty="0">
                 <a:solidFill>
                   <a:srgbClr val="3DD68C"/>
                 </a:solidFill>
@@ -8483,7 +8391,7 @@
         </p:nvSpPr>
         <p:spPr>
           <a:xfrm>
-            <a:off x="548640" y="603504"/>
+            <a:off x="548640" y="688964"/>
             <a:ext cx="11064240" cy="640080"/>
           </a:xfrm>
           <a:prstGeom prst="rect">
@@ -8522,8 +8430,8 @@
         </p:nvSpPr>
         <p:spPr>
           <a:xfrm>
-            <a:off x="548640" y="1298448"/>
-            <a:ext cx="1280160" cy="22860"/>
+            <a:off x="651189" y="624326"/>
+            <a:ext cx="1778744" cy="45719"/>
           </a:xfrm>
           <a:prstGeom prst="rect">
             <a:avLst/>
@@ -8555,6 +8463,7 @@
           <a:lstStyle/>
           <a:p>
             <a:pPr algn="ctr"/>
+            <a:endParaRPr/>
           </a:p>
         </p:txBody>
       </p:sp>
@@ -8679,6 +8588,7 @@
           <a:lstStyle/>
           <a:p>
             <a:pPr algn="ctr"/>
+            <a:endParaRPr/>
           </a:p>
         </p:txBody>
       </p:sp>
@@ -8700,7 +8610,7 @@
         </p:spPr>
         <p:txBody>
           <a:bodyPr wrap="square" anchor="t">
-            <a:normAutofit/>
+            <a:normAutofit lnSpcReduction="10000"/>
           </a:bodyPr>
           <a:lstStyle/>
           <a:p>
@@ -8749,7 +8659,7 @@
               </a:spcAft>
             </a:pPr>
             <a:r>
-              <a:rPr sz="1500" b="0">
+              <a:rPr sz="1500" b="0" dirty="0">
                 <a:solidFill>
                   <a:srgbClr val="F2F2F5"/>
                 </a:solidFill>
@@ -8765,13 +8675,31 @@
               </a:spcAft>
             </a:pPr>
             <a:r>
-              <a:rPr sz="1500" b="0">
+              <a:rPr sz="1500" b="0" dirty="0">
                 <a:solidFill>
                   <a:srgbClr val="3DD68C"/>
                 </a:solidFill>
                 <a:latin typeface="Arial"/>
               </a:rPr>
-              <a:t>make demo brings up the web prototype against a COMMITTED offline replay bundle — no training, no network. It works on venue wifi that does not exist.</a:t>
+              <a:t>make demo brings up the web prototype against a COMMITTED offline replay bundle — no training, no network. It works on venue </a:t>
+            </a:r>
+            <a:r>
+              <a:rPr sz="1500" b="0" dirty="0" err="1">
+                <a:solidFill>
+                  <a:srgbClr val="3DD68C"/>
+                </a:solidFill>
+                <a:latin typeface="Arial"/>
+              </a:rPr>
+              <a:t>wifi</a:t>
+            </a:r>
+            <a:r>
+              <a:rPr sz="1500" b="0" dirty="0">
+                <a:solidFill>
+                  <a:srgbClr val="3DD68C"/>
+                </a:solidFill>
+                <a:latin typeface="Arial"/>
+              </a:rPr>
+              <a:t> that does not exist.</a:t>
             </a:r>
           </a:p>
           <a:p>
@@ -8781,13 +8709,31 @@
               </a:spcAft>
             </a:pPr>
             <a:r>
-              <a:rPr sz="1500" b="0">
+              <a:rPr sz="1500" b="0" dirty="0">
                 <a:solidFill>
                   <a:srgbClr val="F2F2F5"/>
                 </a:solidFill>
                 <a:latin typeface="Arial"/>
               </a:rPr>
-              <a:t>Every stage emits structured JSON to reports/. reports/report.md is the evidence index.</a:t>
+              <a:t>Every stage emits structured JSON to reports/. reports/</a:t>
+            </a:r>
+            <a:r>
+              <a:rPr sz="1500" b="0" dirty="0" err="1">
+                <a:solidFill>
+                  <a:srgbClr val="F2F2F5"/>
+                </a:solidFill>
+                <a:latin typeface="Arial"/>
+              </a:rPr>
+              <a:t>report.md</a:t>
+            </a:r>
+            <a:r>
+              <a:rPr sz="1500" b="0" dirty="0">
+                <a:solidFill>
+                  <a:srgbClr val="F2F2F5"/>
+                </a:solidFill>
+                <a:latin typeface="Arial"/>
+              </a:rPr>
+              <a:t> is the evidence index.</a:t>
             </a:r>
           </a:p>
           <a:p>
@@ -8797,7 +8743,7 @@
               </a:spcAft>
             </a:pPr>
             <a:r>
-              <a:rPr sz="1500" b="0">
+              <a:rPr sz="1500" b="0" dirty="0">
                 <a:solidFill>
                   <a:srgbClr val="3DD68C"/>
                 </a:solidFill>
@@ -8819,7 +8765,25 @@
                 </a:solidFill>
                 <a:latin typeface="Arial"/>
               </a:rPr>
-              <a:t>The repository is a git history and the leakage suite reads it — commit_order_audit proves the sealed manifest predates the detector code.</a:t>
+              <a:t>The repository is a git history and the leakage suite reads it — </a:t>
+            </a:r>
+            <a:r>
+              <a:rPr sz="1500" b="0" dirty="0" err="1">
+                <a:solidFill>
+                  <a:srgbClr val="F2F2F5"/>
+                </a:solidFill>
+                <a:latin typeface="Arial"/>
+              </a:rPr>
+              <a:t>commit_order_audit</a:t>
+            </a:r>
+            <a:r>
+              <a:rPr sz="1500" b="0" dirty="0">
+                <a:solidFill>
+                  <a:srgbClr val="F2F2F5"/>
+                </a:solidFill>
+                <a:latin typeface="Arial"/>
+              </a:rPr>
+              <a:t> proves the sealed manifest predates the detector code.</a:t>
             </a:r>
           </a:p>
         </p:txBody>
@@ -8833,7 +8797,7 @@
 </file>
 
 <file path=ppt/slides/slide18.xml><?xml version="1.0" encoding="utf-8"?>
-<p:sld xmlns:a="http://schemas.openxmlformats.org/drawingml/2006/main" xmlns:p="http://schemas.openxmlformats.org/presentationml/2006/main" xmlns:r="http://schemas.openxmlformats.org/officeDocument/2006/relationships">
+<p:sld xmlns:a="http://schemas.openxmlformats.org/drawingml/2006/main" xmlns:r="http://schemas.openxmlformats.org/officeDocument/2006/relationships" xmlns:p="http://schemas.openxmlformats.org/presentationml/2006/main">
   <p:cSld>
     <p:spTree>
       <p:nvGrpSpPr>
@@ -8841,7 +8805,14 @@
         <p:cNvGrpSpPr/>
         <p:nvPr/>
       </p:nvGrpSpPr>
-      <p:grpSpPr/>
+      <p:grpSpPr>
+        <a:xfrm>
+          <a:off x="0" y="0"/>
+          <a:ext cx="0" cy="0"/>
+          <a:chOff x="0" y="0"/>
+          <a:chExt cx="0" cy="0"/>
+        </a:xfrm>
+      </p:grpSpPr>
       <p:sp>
         <p:nvSpPr>
           <p:cNvPr id="2" name="Rectangle 1"/>
@@ -8883,6 +8854,7 @@
           <a:lstStyle/>
           <a:p>
             <a:pPr algn="ctr"/>
+            <a:endParaRPr/>
           </a:p>
         </p:txBody>
       </p:sp>
@@ -8914,7 +8886,7 @@
               </a:spcAft>
             </a:pPr>
             <a:r>
-              <a:rPr sz="1400" b="1">
+              <a:rPr b="1" dirty="0">
                 <a:solidFill>
                   <a:srgbClr val="4A9EFF"/>
                 </a:solidFill>
@@ -8930,13 +8902,13 @@
               </a:spcAft>
             </a:pPr>
             <a:r>
-              <a:rPr sz="1800" b="0">
+              <a:rPr sz="1800" b="0" dirty="0">
                 <a:solidFill>
                   <a:srgbClr val="F2F2F5"/>
                 </a:solidFill>
                 <a:latin typeface="Arial"/>
               </a:rPr>
-              <a:t>A grammar that generates 15,271 type-legal attacks. A simulator whose build refuses to violate rail semantics. A detector that catches 25% of attack compositions it has never seen, at 99.5% precision on a staffed queue — and +28.3 points of recall over the incumbent.</a:t>
+              <a:t>A grammar that generates 15,271 type-legal attacks. A simulator whose build refuses to violate rail semantics. A detector that catches 25% of attack compositions it has never seen, at 99.5% precision on a staffed queue and +28.3 points of recall over the incumbent.</a:t>
             </a:r>
           </a:p>
         </p:txBody>
@@ -8949,7 +8921,7 @@
         </p:nvSpPr>
         <p:spPr>
           <a:xfrm>
-            <a:off x="731520" y="3246120"/>
+            <a:off x="722974" y="2955562"/>
             <a:ext cx="10698480" cy="1554480"/>
           </a:xfrm>
           <a:prstGeom prst="rect">
@@ -8969,7 +8941,7 @@
               </a:spcAft>
             </a:pPr>
             <a:r>
-              <a:rPr sz="1400" b="1">
+              <a:rPr sz="1900" b="1" dirty="0">
                 <a:solidFill>
                   <a:srgbClr val="F5B14C"/>
                 </a:solidFill>
@@ -8985,13 +8957,13 @@
               </a:spcAft>
             </a:pPr>
             <a:r>
-              <a:rPr sz="1800" b="0">
+              <a:rPr sz="1800" b="0" dirty="0">
                 <a:solidFill>
                   <a:srgbClr val="F2F2F5"/>
                 </a:solidFill>
                 <a:latin typeface="Arial"/>
               </a:rPr>
-              <a:t>We built the instruments that found our own 4× fusion defect, our own policy bug, and our own generator artifacts — and we are showing you all three.</a:t>
+              <a:t>We built the instruments that found our own 4× fusion defect, our own policy bug, and our own generator artifacts and we are showing you all three.</a:t>
             </a:r>
           </a:p>
         </p:txBody>
@@ -9004,7 +8976,7 @@
         </p:nvSpPr>
         <p:spPr>
           <a:xfrm>
-            <a:off x="731520" y="5029200"/>
+            <a:off x="731520" y="4644636"/>
             <a:ext cx="2606040" cy="868680"/>
           </a:xfrm>
           <a:prstGeom prst="rect">
@@ -9035,7 +9007,7 @@
           </a:fontRef>
         </p:style>
         <p:txBody>
-          <a:bodyPr rtlCol="0" anchor="ctr" wrap="square">
+          <a:bodyPr wrap="square" rtlCol="0" anchor="ctr">
             <a:normAutofit/>
           </a:bodyPr>
           <a:lstStyle/>
@@ -9075,7 +9047,7 @@
         </p:nvSpPr>
         <p:spPr>
           <a:xfrm>
-            <a:off x="3538728" y="5029200"/>
+            <a:off x="3538728" y="4644636"/>
             <a:ext cx="2606040" cy="868680"/>
           </a:xfrm>
           <a:prstGeom prst="rect">
@@ -9106,7 +9078,7 @@
           </a:fontRef>
         </p:style>
         <p:txBody>
-          <a:bodyPr rtlCol="0" anchor="ctr" wrap="square">
+          <a:bodyPr wrap="square" rtlCol="0" anchor="ctr">
             <a:normAutofit/>
           </a:bodyPr>
           <a:lstStyle/>
@@ -9146,7 +9118,7 @@
         </p:nvSpPr>
         <p:spPr>
           <a:xfrm>
-            <a:off x="6345936" y="5029200"/>
+            <a:off x="6345936" y="4644636"/>
             <a:ext cx="2606040" cy="868680"/>
           </a:xfrm>
           <a:prstGeom prst="rect">
@@ -9177,7 +9149,7 @@
           </a:fontRef>
         </p:style>
         <p:txBody>
-          <a:bodyPr rtlCol="0" anchor="ctr" wrap="square">
+          <a:bodyPr wrap="square" rtlCol="0" anchor="ctr">
             <a:normAutofit/>
           </a:bodyPr>
           <a:lstStyle/>
@@ -9217,7 +9189,7 @@
         </p:nvSpPr>
         <p:spPr>
           <a:xfrm>
-            <a:off x="9153144" y="5029200"/>
+            <a:off x="9153144" y="4644636"/>
             <a:ext cx="2606040" cy="868680"/>
           </a:xfrm>
           <a:prstGeom prst="rect">
@@ -9248,7 +9220,7 @@
           </a:fontRef>
         </p:style>
         <p:txBody>
-          <a:bodyPr rtlCol="0" anchor="ctr" wrap="square">
+          <a:bodyPr wrap="square" rtlCol="0" anchor="ctr">
             <a:normAutofit/>
           </a:bodyPr>
           <a:lstStyle/>
@@ -9354,1098 +9326,6 @@
                 <a:latin typeface="Arial"/>
               </a:rPr>
               <a:t>18</a:t>
-            </a:r>
-          </a:p>
-        </p:txBody>
-      </p:sp>
-    </p:spTree>
-  </p:cSld>
-  <p:clrMapOvr>
-    <a:masterClrMapping/>
-  </p:clrMapOvr>
-</p:sld>
-</file>
-
-<file path=ppt/slides/slide19.xml><?xml version="1.0" encoding="utf-8"?>
-<p:sld xmlns:a="http://schemas.openxmlformats.org/drawingml/2006/main" xmlns:p="http://schemas.openxmlformats.org/presentationml/2006/main" xmlns:r="http://schemas.openxmlformats.org/officeDocument/2006/relationships">
-  <p:cSld>
-    <p:spTree>
-      <p:nvGrpSpPr>
-        <p:cNvPr id="1" name=""/>
-        <p:cNvGrpSpPr/>
-        <p:nvPr/>
-      </p:nvGrpSpPr>
-      <p:grpSpPr/>
-      <p:sp>
-        <p:nvSpPr>
-          <p:cNvPr id="2" name="Rectangle 1"/>
-          <p:cNvSpPr/>
-          <p:nvPr/>
-        </p:nvSpPr>
-        <p:spPr>
-          <a:xfrm>
-            <a:off x="0" y="0"/>
-            <a:ext cx="12191695" cy="6858000"/>
-          </a:xfrm>
-          <a:prstGeom prst="rect">
-            <a:avLst/>
-          </a:prstGeom>
-          <a:solidFill>
-            <a:srgbClr val="0B0B0F"/>
-          </a:solidFill>
-          <a:ln>
-            <a:noFill/>
-          </a:ln>
-          <a:effectLst/>
-        </p:spPr>
-        <p:style>
-          <a:lnRef idx="1">
-            <a:schemeClr val="accent1"/>
-          </a:lnRef>
-          <a:fillRef idx="3">
-            <a:schemeClr val="accent1"/>
-          </a:fillRef>
-          <a:effectRef idx="2">
-            <a:schemeClr val="accent1"/>
-          </a:effectRef>
-          <a:fontRef idx="minor">
-            <a:schemeClr val="lt1"/>
-          </a:fontRef>
-        </p:style>
-        <p:txBody>
-          <a:bodyPr rtlCol="0" anchor="ctr"/>
-          <a:lstStyle/>
-          <a:p>
-            <a:pPr algn="ctr"/>
-          </a:p>
-        </p:txBody>
-      </p:sp>
-      <p:sp>
-        <p:nvSpPr>
-          <p:cNvPr id="3" name="TextBox 2"/>
-          <p:cNvSpPr txBox="1"/>
-          <p:nvPr/>
-        </p:nvSpPr>
-        <p:spPr>
-          <a:xfrm>
-            <a:off x="548640" y="310896"/>
-            <a:ext cx="11064240" cy="329184"/>
-          </a:xfrm>
-          <a:prstGeom prst="rect">
-            <a:avLst/>
-          </a:prstGeom>
-          <a:noFill/>
-        </p:spPr>
-        <p:txBody>
-          <a:bodyPr wrap="square" anchor="t">
-            <a:normAutofit/>
-          </a:bodyPr>
-          <a:lstStyle/>
-          <a:p>
-            <a:pPr algn="l">
-              <a:spcAft>
-                <a:spcPts val="0"/>
-              </a:spcAft>
-            </a:pPr>
-            <a:r>
-              <a:rPr sz="1150" b="1">
-                <a:solidFill>
-                  <a:srgbClr val="4A9EFF"/>
-                </a:solidFill>
-                <a:latin typeface="Arial"/>
-              </a:rPr>
-              <a:t>APPENDIX</a:t>
-            </a:r>
-          </a:p>
-        </p:txBody>
-      </p:sp>
-      <p:sp>
-        <p:nvSpPr>
-          <p:cNvPr id="4" name="TextBox 3"/>
-          <p:cNvSpPr txBox="1"/>
-          <p:nvPr/>
-        </p:nvSpPr>
-        <p:spPr>
-          <a:xfrm>
-            <a:off x="548640" y="603504"/>
-            <a:ext cx="11064240" cy="640080"/>
-          </a:xfrm>
-          <a:prstGeom prst="rect">
-            <a:avLst/>
-          </a:prstGeom>
-          <a:noFill/>
-        </p:spPr>
-        <p:txBody>
-          <a:bodyPr wrap="square" anchor="t">
-            <a:normAutofit/>
-          </a:bodyPr>
-          <a:lstStyle/>
-          <a:p>
-            <a:pPr algn="l">
-              <a:spcAft>
-                <a:spcPts val="0"/>
-              </a:spcAft>
-            </a:pPr>
-            <a:r>
-              <a:rPr sz="2800" b="1">
-                <a:solidFill>
-                  <a:srgbClr val="F2F2F5"/>
-                </a:solidFill>
-                <a:latin typeface="Arial"/>
-              </a:rPr>
-              <a:t>Numbers a judge may probe</a:t>
-            </a:r>
-          </a:p>
-        </p:txBody>
-      </p:sp>
-      <p:sp>
-        <p:nvSpPr>
-          <p:cNvPr id="5" name="Rectangle 4"/>
-          <p:cNvSpPr/>
-          <p:nvPr/>
-        </p:nvSpPr>
-        <p:spPr>
-          <a:xfrm>
-            <a:off x="548640" y="1298448"/>
-            <a:ext cx="1280160" cy="22860"/>
-          </a:xfrm>
-          <a:prstGeom prst="rect">
-            <a:avLst/>
-          </a:prstGeom>
-          <a:solidFill>
-            <a:srgbClr val="4A9EFF"/>
-          </a:solidFill>
-          <a:ln>
-            <a:noFill/>
-          </a:ln>
-          <a:effectLst/>
-        </p:spPr>
-        <p:style>
-          <a:lnRef idx="1">
-            <a:schemeClr val="accent1"/>
-          </a:lnRef>
-          <a:fillRef idx="3">
-            <a:schemeClr val="accent1"/>
-          </a:fillRef>
-          <a:effectRef idx="2">
-            <a:schemeClr val="accent1"/>
-          </a:effectRef>
-          <a:fontRef idx="minor">
-            <a:schemeClr val="lt1"/>
-          </a:fontRef>
-        </p:style>
-        <p:txBody>
-          <a:bodyPr rtlCol="0" anchor="ctr"/>
-          <a:lstStyle/>
-          <a:p>
-            <a:pPr algn="ctr"/>
-          </a:p>
-        </p:txBody>
-      </p:sp>
-      <p:sp>
-        <p:nvSpPr>
-          <p:cNvPr id="6" name="TextBox 5"/>
-          <p:cNvSpPr txBox="1"/>
-          <p:nvPr/>
-        </p:nvSpPr>
-        <p:spPr>
-          <a:xfrm>
-            <a:off x="548640" y="6419088"/>
-            <a:ext cx="10241280" cy="292608"/>
-          </a:xfrm>
-          <a:prstGeom prst="rect">
-            <a:avLst/>
-          </a:prstGeom>
-          <a:noFill/>
-        </p:spPr>
-        <p:txBody>
-          <a:bodyPr wrap="square" anchor="t">
-            <a:normAutofit/>
-          </a:bodyPr>
-          <a:lstStyle/>
-          <a:p>
-            <a:pPr algn="l">
-              <a:spcAft>
-                <a:spcPts val="0"/>
-              </a:spcAft>
-            </a:pPr>
-            <a:r>
-              <a:rPr sz="950" b="0">
-                <a:solidFill>
-                  <a:srgbClr val="9A9AA8"/>
-                </a:solidFill>
-                <a:latin typeface="Arial"/>
-              </a:rPr>
-              <a:t>VAJRA · Mastercard Innovation Challenge 2026</a:t>
-            </a:r>
-          </a:p>
-        </p:txBody>
-      </p:sp>
-      <p:sp>
-        <p:nvSpPr>
-          <p:cNvPr id="7" name="TextBox 6"/>
-          <p:cNvSpPr txBox="1"/>
-          <p:nvPr/>
-        </p:nvSpPr>
-        <p:spPr>
-          <a:xfrm>
-            <a:off x="11155680" y="6419088"/>
-            <a:ext cx="548640" cy="292608"/>
-          </a:xfrm>
-          <a:prstGeom prst="rect">
-            <a:avLst/>
-          </a:prstGeom>
-          <a:noFill/>
-        </p:spPr>
-        <p:txBody>
-          <a:bodyPr wrap="square" anchor="t">
-            <a:normAutofit/>
-          </a:bodyPr>
-          <a:lstStyle/>
-          <a:p>
-            <a:pPr algn="r">
-              <a:spcAft>
-                <a:spcPts val="0"/>
-              </a:spcAft>
-            </a:pPr>
-            <a:r>
-              <a:rPr sz="950" b="0">
-                <a:solidFill>
-                  <a:srgbClr val="9A9AA8"/>
-                </a:solidFill>
-                <a:latin typeface="Arial"/>
-              </a:rPr>
-              <a:t>19</a:t>
-            </a:r>
-          </a:p>
-        </p:txBody>
-      </p:sp>
-      <p:graphicFrame>
-        <p:nvGraphicFramePr>
-          <p:cNvPr id="8" name="Table 7"/>
-          <p:cNvGraphicFramePr>
-            <a:graphicFrameLocks noGrp="1"/>
-          </p:cNvGraphicFramePr>
-          <p:nvPr/>
-        </p:nvGraphicFramePr>
-        <p:xfrm>
-          <a:off x="548640" y="1463040"/>
-          <a:ext cx="11064240" cy="3661251"/>
-        </p:xfrm>
-        <a:graphic>
-          <a:graphicData uri="http://schemas.openxmlformats.org/drawingml/2006/table">
-            <a:tbl>
-              <a:tblPr firstRow="1" bandRow="1">
-                <a:tableStyleId>{5C22544A-7EE6-4342-B048-85BDC9FD1C3A}</a:tableStyleId>
-              </a:tblPr>
-              <a:tblGrid>
-                <a:gridCol w="4023360"/>
-                <a:gridCol w="2926080"/>
-                <a:gridCol w="4114800"/>
-              </a:tblGrid>
-              <a:tr h="332841">
-                <a:tc>
-                  <a:txBody>
-                    <a:bodyPr wrap="square"/>
-                    <a:lstStyle/>
-                    <a:p>
-                      <a:r>
-                        <a:rPr sz="1050" b="1">
-                          <a:solidFill>
-                            <a:srgbClr val="4A9EFF"/>
-                          </a:solidFill>
-                          <a:latin typeface="Arial"/>
-                        </a:rPr>
-                        <a:t>claim</a:t>
-                      </a:r>
-                    </a:p>
-                  </a:txBody>
-                  <a:tcPr marL="91440" marR="91440" marT="18288" marB="18288" anchor="ctr">
-                    <a:solidFill>
-                      <a:srgbClr val="0B0B0F"/>
-                    </a:solidFill>
-                  </a:tcPr>
-                </a:tc>
-                <a:tc>
-                  <a:txBody>
-                    <a:bodyPr wrap="square"/>
-                    <a:lstStyle/>
-                    <a:p>
-                      <a:r>
-                        <a:rPr sz="1050" b="1">
-                          <a:solidFill>
-                            <a:srgbClr val="4A9EFF"/>
-                          </a:solidFill>
-                          <a:latin typeface="Arial"/>
-                        </a:rPr>
-                        <a:t>value</a:t>
-                      </a:r>
-                    </a:p>
-                  </a:txBody>
-                  <a:tcPr marL="91440" marR="91440" marT="18288" marB="18288" anchor="ctr">
-                    <a:solidFill>
-                      <a:srgbClr val="0B0B0F"/>
-                    </a:solidFill>
-                  </a:tcPr>
-                </a:tc>
-                <a:tc>
-                  <a:txBody>
-                    <a:bodyPr wrap="square"/>
-                    <a:lstStyle/>
-                    <a:p>
-                      <a:r>
-                        <a:rPr sz="1050" b="1">
-                          <a:solidFill>
-                            <a:srgbClr val="4A9EFF"/>
-                          </a:solidFill>
-                          <a:latin typeface="Arial"/>
-                        </a:rPr>
-                        <a:t>source</a:t>
-                      </a:r>
-                    </a:p>
-                  </a:txBody>
-                  <a:tcPr marL="91440" marR="91440" marT="18288" marB="18288" anchor="ctr">
-                    <a:solidFill>
-                      <a:srgbClr val="0B0B0F"/>
-                    </a:solidFill>
-                  </a:tcPr>
-                </a:tc>
-              </a:tr>
-              <a:tr h="332841">
-                <a:tc>
-                  <a:txBody>
-                    <a:bodyPr wrap="square"/>
-                    <a:lstStyle/>
-                    <a:p>
-                      <a:r>
-                        <a:rPr sz="1150" b="0">
-                          <a:solidFill>
-                            <a:srgbClr val="F2F2F5"/>
-                          </a:solidFill>
-                          <a:latin typeface="Arial"/>
-                        </a:rPr>
-                        <a:t>events / label records</a:t>
-                      </a:r>
-                    </a:p>
-                  </a:txBody>
-                  <a:tcPr marL="91440" marR="91440" marT="18288" marB="18288" anchor="ctr">
-                    <a:solidFill>
-                      <a:srgbClr val="15161D"/>
-                    </a:solidFill>
-                  </a:tcPr>
-                </a:tc>
-                <a:tc>
-                  <a:txBody>
-                    <a:bodyPr wrap="square"/>
-                    <a:lstStyle/>
-                    <a:p>
-                      <a:r>
-                        <a:rPr sz="1150" b="0">
-                          <a:solidFill>
-                            <a:srgbClr val="F2F2F5"/>
-                          </a:solidFill>
-                          <a:latin typeface="Arial"/>
-                        </a:rPr>
-                        <a:t>9,899,667 / 374,077</a:t>
-                      </a:r>
-                    </a:p>
-                  </a:txBody>
-                  <a:tcPr marL="91440" marR="91440" marT="18288" marB="18288" anchor="ctr">
-                    <a:solidFill>
-                      <a:srgbClr val="15161D"/>
-                    </a:solidFill>
-                  </a:tcPr>
-                </a:tc>
-                <a:tc>
-                  <a:txBody>
-                    <a:bodyPr wrap="square"/>
-                    <a:lstStyle/>
-                    <a:p>
-                      <a:r>
-                        <a:rPr sz="1150" b="0">
-                          <a:solidFill>
-                            <a:srgbClr val="F2F2F5"/>
-                          </a:solidFill>
-                          <a:latin typeface="Arial"/>
-                        </a:rPr>
-                        <a:t>reports/sim_report_vajra-sim.json</a:t>
-                      </a:r>
-                    </a:p>
-                  </a:txBody>
-                  <a:tcPr marL="91440" marR="91440" marT="18288" marB="18288" anchor="ctr">
-                    <a:solidFill>
-                      <a:srgbClr val="15161D"/>
-                    </a:solidFill>
-                  </a:tcPr>
-                </a:tc>
-              </a:tr>
-              <a:tr h="332841">
-                <a:tc>
-                  <a:txBody>
-                    <a:bodyPr wrap="square"/>
-                    <a:lstStyle/>
-                    <a:p>
-                      <a:r>
-                        <a:rPr sz="1150" b="0">
-                          <a:solidFill>
-                            <a:srgbClr val="F2F2F5"/>
-                          </a:solidFill>
-                          <a:latin typeface="Arial"/>
-                        </a:rPr>
-                        <a:t>type-legal compositions</a:t>
-                      </a:r>
-                    </a:p>
-                  </a:txBody>
-                  <a:tcPr marL="91440" marR="91440" marT="18288" marB="18288" anchor="ctr">
-                    <a:solidFill>
-                      <a:srgbClr val="15161D"/>
-                    </a:solidFill>
-                  </a:tcPr>
-                </a:tc>
-                <a:tc>
-                  <a:txBody>
-                    <a:bodyPr wrap="square"/>
-                    <a:lstStyle/>
-                    <a:p>
-                      <a:r>
-                        <a:rPr sz="1150" b="0">
-                          <a:solidFill>
-                            <a:srgbClr val="F2F2F5"/>
-                          </a:solidFill>
-                          <a:latin typeface="Arial"/>
-                        </a:rPr>
-                        <a:t>15,271</a:t>
-                      </a:r>
-                    </a:p>
-                  </a:txBody>
-                  <a:tcPr marL="91440" marR="91440" marT="18288" marB="18288" anchor="ctr">
-                    <a:solidFill>
-                      <a:srgbClr val="15161D"/>
-                    </a:solidFill>
-                  </a:tcPr>
-                </a:tc>
-                <a:tc>
-                  <a:txBody>
-                    <a:bodyPr wrap="square"/>
-                    <a:lstStyle/>
-                    <a:p>
-                      <a:r>
-                        <a:rPr sz="1150" b="0">
-                          <a:solidFill>
-                            <a:srgbClr val="F2F2F5"/>
-                          </a:solidFill>
-                          <a:latin typeface="Arial"/>
-                        </a:rPr>
-                        <a:t>make grammar</a:t>
-                      </a:r>
-                    </a:p>
-                  </a:txBody>
-                  <a:tcPr marL="91440" marR="91440" marT="18288" marB="18288" anchor="ctr">
-                    <a:solidFill>
-                      <a:srgbClr val="15161D"/>
-                    </a:solidFill>
-                  </a:tcPr>
-                </a:tc>
-              </a:tr>
-              <a:tr h="332841">
-                <a:tc>
-                  <a:txBody>
-                    <a:bodyPr wrap="square"/>
-                    <a:lstStyle/>
-                    <a:p>
-                      <a:r>
-                        <a:rPr sz="1150" b="0">
-                          <a:solidFill>
-                            <a:srgbClr val="F2F2F5"/>
-                          </a:solidFill>
-                          <a:latin typeface="Arial"/>
-                        </a:rPr>
-                        <a:t>archive cells reachable</a:t>
-                      </a:r>
-                    </a:p>
-                  </a:txBody>
-                  <a:tcPr marL="91440" marR="91440" marT="18288" marB="18288" anchor="ctr">
-                    <a:solidFill>
-                      <a:srgbClr val="15161D"/>
-                    </a:solidFill>
-                  </a:tcPr>
-                </a:tc>
-                <a:tc>
-                  <a:txBody>
-                    <a:bodyPr wrap="square"/>
-                    <a:lstStyle/>
-                    <a:p>
-                      <a:r>
-                        <a:rPr sz="1150" b="0">
-                          <a:solidFill>
-                            <a:srgbClr val="F2F2F5"/>
-                          </a:solidFill>
-                          <a:latin typeface="Arial"/>
-                        </a:rPr>
-                        <a:t>268 of 380</a:t>
-                      </a:r>
-                    </a:p>
-                  </a:txBody>
-                  <a:tcPr marL="91440" marR="91440" marT="18288" marB="18288" anchor="ctr">
-                    <a:solidFill>
-                      <a:srgbClr val="15161D"/>
-                    </a:solidFill>
-                  </a:tcPr>
-                </a:tc>
-                <a:tc>
-                  <a:txBody>
-                    <a:bodyPr wrap="square"/>
-                    <a:lstStyle/>
-                    <a:p>
-                      <a:r>
-                        <a:rPr sz="1150" b="0">
-                          <a:solidFill>
-                            <a:srgbClr val="F2F2F5"/>
-                          </a:solidFill>
-                          <a:latin typeface="Arial"/>
-                        </a:rPr>
-                        <a:t>reports/archive_report.json</a:t>
-                      </a:r>
-                    </a:p>
-                  </a:txBody>
-                  <a:tcPr marL="91440" marR="91440" marT="18288" marB="18288" anchor="ctr">
-                    <a:solidFill>
-                      <a:srgbClr val="15161D"/>
-                    </a:solidFill>
-                  </a:tcPr>
-                </a:tc>
-              </a:tr>
-              <a:tr h="332841">
-                <a:tc>
-                  <a:txBody>
-                    <a:bodyPr wrap="square"/>
-                    <a:lstStyle/>
-                    <a:p>
-                      <a:r>
-                        <a:rPr sz="1150" b="0">
-                          <a:solidFill>
-                            <a:srgbClr val="F2F2F5"/>
-                          </a:solidFill>
-                          <a:latin typeface="Arial"/>
-                        </a:rPr>
-                        <a:t>F1 rail invariants</a:t>
-                      </a:r>
-                    </a:p>
-                  </a:txBody>
-                  <a:tcPr marL="91440" marR="91440" marT="18288" marB="18288" anchor="ctr">
-                    <a:solidFill>
-                      <a:srgbClr val="15161D"/>
-                    </a:solidFill>
-                  </a:tcPr>
-                </a:tc>
-                <a:tc>
-                  <a:txBody>
-                    <a:bodyPr wrap="square"/>
-                    <a:lstStyle/>
-                    <a:p>
-                      <a:r>
-                        <a:rPr sz="1150" b="0">
-                          <a:solidFill>
-                            <a:srgbClr val="F2F2F5"/>
-                          </a:solidFill>
-                          <a:latin typeface="Arial"/>
-                        </a:rPr>
-                        <a:t>126</a:t>
-                      </a:r>
-                    </a:p>
-                  </a:txBody>
-                  <a:tcPr marL="91440" marR="91440" marT="18288" marB="18288" anchor="ctr">
-                    <a:solidFill>
-                      <a:srgbClr val="15161D"/>
-                    </a:solidFill>
-                  </a:tcPr>
-                </a:tc>
-                <a:tc>
-                  <a:txBody>
-                    <a:bodyPr wrap="square"/>
-                    <a:lstStyle/>
-                    <a:p>
-                      <a:r>
-                        <a:rPr sz="1150" b="0">
-                          <a:solidFill>
-                            <a:srgbClr val="F2F2F5"/>
-                          </a:solidFill>
-                          <a:latin typeface="Arial"/>
-                        </a:rPr>
-                        <a:t>make sim</a:t>
-                      </a:r>
-                    </a:p>
-                  </a:txBody>
-                  <a:tcPr marL="91440" marR="91440" marT="18288" marB="18288" anchor="ctr">
-                    <a:solidFill>
-                      <a:srgbClr val="15161D"/>
-                    </a:solidFill>
-                  </a:tcPr>
-                </a:tc>
-              </a:tr>
-              <a:tr h="332841">
-                <a:tc>
-                  <a:txBody>
-                    <a:bodyPr wrap="square"/>
-                    <a:lstStyle/>
-                    <a:p>
-                      <a:r>
-                        <a:rPr sz="1150" b="0">
-                          <a:solidFill>
-                            <a:srgbClr val="F2F2F5"/>
-                          </a:solidFill>
-                          <a:latin typeface="Arial"/>
-                        </a:rPr>
-                        <a:t>model features (issuer view)</a:t>
-                      </a:r>
-                    </a:p>
-                  </a:txBody>
-                  <a:tcPr marL="91440" marR="91440" marT="18288" marB="18288" anchor="ctr">
-                    <a:solidFill>
-                      <a:srgbClr val="15161D"/>
-                    </a:solidFill>
-                  </a:tcPr>
-                </a:tc>
-                <a:tc>
-                  <a:txBody>
-                    <a:bodyPr wrap="square"/>
-                    <a:lstStyle/>
-                    <a:p>
-                      <a:r>
-                        <a:rPr sz="1150" b="0">
-                          <a:solidFill>
-                            <a:srgbClr val="F2F2F5"/>
-                          </a:solidFill>
-                          <a:latin typeface="Arial"/>
-                        </a:rPr>
-                        <a:t>392 (319)</a:t>
-                      </a:r>
-                    </a:p>
-                  </a:txBody>
-                  <a:tcPr marL="91440" marR="91440" marT="18288" marB="18288" anchor="ctr">
-                    <a:solidFill>
-                      <a:srgbClr val="15161D"/>
-                    </a:solidFill>
-                  </a:tcPr>
-                </a:tc>
-                <a:tc>
-                  <a:txBody>
-                    <a:bodyPr wrap="square"/>
-                    <a:lstStyle/>
-                    <a:p>
-                      <a:r>
-                        <a:rPr sz="1150" b="0">
-                          <a:solidFill>
-                            <a:srgbClr val="F2F2F5"/>
-                          </a:solidFill>
-                          <a:latin typeface="Arial"/>
-                        </a:rPr>
-                        <a:t>reports/train_report_issuer.json</a:t>
-                      </a:r>
-                    </a:p>
-                  </a:txBody>
-                  <a:tcPr marL="91440" marR="91440" marT="18288" marB="18288" anchor="ctr">
-                    <a:solidFill>
-                      <a:srgbClr val="15161D"/>
-                    </a:solidFill>
-                  </a:tcPr>
-                </a:tc>
-              </a:tr>
-              <a:tr h="332841">
-                <a:tc>
-                  <a:txBody>
-                    <a:bodyPr wrap="square"/>
-                    <a:lstStyle/>
-                    <a:p>
-                      <a:r>
-                        <a:rPr sz="1150" b="0">
-                          <a:solidFill>
-                            <a:srgbClr val="F2F2F5"/>
-                          </a:solidFill>
-                          <a:latin typeface="Arial"/>
-                        </a:rPr>
-                        <a:t>best boosting iteration</a:t>
-                      </a:r>
-                    </a:p>
-                  </a:txBody>
-                  <a:tcPr marL="91440" marR="91440" marT="18288" marB="18288" anchor="ctr">
-                    <a:solidFill>
-                      <a:srgbClr val="15161D"/>
-                    </a:solidFill>
-                  </a:tcPr>
-                </a:tc>
-                <a:tc>
-                  <a:txBody>
-                    <a:bodyPr wrap="square"/>
-                    <a:lstStyle/>
-                    <a:p>
-                      <a:r>
-                        <a:rPr sz="1150" b="0">
-                          <a:solidFill>
-                            <a:srgbClr val="F2F2F5"/>
-                          </a:solidFill>
-                          <a:latin typeface="Arial"/>
-                        </a:rPr>
-                        <a:t>221 of 600</a:t>
-                      </a:r>
-                    </a:p>
-                  </a:txBody>
-                  <a:tcPr marL="91440" marR="91440" marT="18288" marB="18288" anchor="ctr">
-                    <a:solidFill>
-                      <a:srgbClr val="15161D"/>
-                    </a:solidFill>
-                  </a:tcPr>
-                </a:tc>
-                <a:tc>
-                  <a:txBody>
-                    <a:bodyPr wrap="square"/>
-                    <a:lstStyle/>
-                    <a:p>
-                      <a:r>
-                        <a:rPr sz="1150" b="0">
-                          <a:solidFill>
-                            <a:srgbClr val="F2F2F5"/>
-                          </a:solidFill>
-                          <a:latin typeface="Arial"/>
-                        </a:rPr>
-                        <a:t>same</a:t>
-                      </a:r>
-                    </a:p>
-                  </a:txBody>
-                  <a:tcPr marL="91440" marR="91440" marT="18288" marB="18288" anchor="ctr">
-                    <a:solidFill>
-                      <a:srgbClr val="15161D"/>
-                    </a:solidFill>
-                  </a:tcPr>
-                </a:tc>
-              </a:tr>
-              <a:tr h="332841">
-                <a:tc>
-                  <a:txBody>
-                    <a:bodyPr wrap="square"/>
-                    <a:lstStyle/>
-                    <a:p>
-                      <a:r>
-                        <a:rPr sz="1150" b="0">
-                          <a:solidFill>
-                            <a:srgbClr val="F2F2F5"/>
-                          </a:solidFill>
-                          <a:latin typeface="Arial"/>
-                        </a:rPr>
-                        <a:t>leakage suite</a:t>
-                      </a:r>
-                    </a:p>
-                  </a:txBody>
-                  <a:tcPr marL="91440" marR="91440" marT="18288" marB="18288" anchor="ctr">
-                    <a:solidFill>
-                      <a:srgbClr val="15161D"/>
-                    </a:solidFill>
-                  </a:tcPr>
-                </a:tc>
-                <a:tc>
-                  <a:txBody>
-                    <a:bodyPr wrap="square"/>
-                    <a:lstStyle/>
-                    <a:p>
-                      <a:r>
-                        <a:rPr sz="1150" b="0">
-                          <a:solidFill>
-                            <a:srgbClr val="F2F2F5"/>
-                          </a:solidFill>
-                          <a:latin typeface="Arial"/>
-                        </a:rPr>
-                        <a:t>6/6 PASS</a:t>
-                      </a:r>
-                    </a:p>
-                  </a:txBody>
-                  <a:tcPr marL="91440" marR="91440" marT="18288" marB="18288" anchor="ctr">
-                    <a:solidFill>
-                      <a:srgbClr val="15161D"/>
-                    </a:solidFill>
-                  </a:tcPr>
-                </a:tc>
-                <a:tc>
-                  <a:txBody>
-                    <a:bodyPr wrap="square"/>
-                    <a:lstStyle/>
-                    <a:p>
-                      <a:r>
-                        <a:rPr sz="1150" b="0">
-                          <a:solidFill>
-                            <a:srgbClr val="F2F2F5"/>
-                          </a:solidFill>
-                          <a:latin typeface="Arial"/>
-                        </a:rPr>
-                        <a:t>reports/metrics_issuer.json</a:t>
-                      </a:r>
-                    </a:p>
-                  </a:txBody>
-                  <a:tcPr marL="91440" marR="91440" marT="18288" marB="18288" anchor="ctr">
-                    <a:solidFill>
-                      <a:srgbClr val="15161D"/>
-                    </a:solidFill>
-                  </a:tcPr>
-                </a:tc>
-              </a:tr>
-              <a:tr h="332841">
-                <a:tc>
-                  <a:txBody>
-                    <a:bodyPr wrap="square"/>
-                    <a:lstStyle/>
-                    <a:p>
-                      <a:r>
-                        <a:rPr sz="1150" b="0">
-                          <a:solidFill>
-                            <a:srgbClr val="F2F2F5"/>
-                          </a:solidFill>
-                          <a:latin typeface="Arial"/>
-                        </a:rPr>
-                        <a:t>sealed rows excluded from training</a:t>
-                      </a:r>
-                    </a:p>
-                  </a:txBody>
-                  <a:tcPr marL="91440" marR="91440" marT="18288" marB="18288" anchor="ctr">
-                    <a:solidFill>
-                      <a:srgbClr val="15161D"/>
-                    </a:solidFill>
-                  </a:tcPr>
-                </a:tc>
-                <a:tc>
-                  <a:txBody>
-                    <a:bodyPr wrap="square"/>
-                    <a:lstStyle/>
-                    <a:p>
-                      <a:r>
-                        <a:rPr sz="1150" b="0">
-                          <a:solidFill>
-                            <a:srgbClr val="F2F2F5"/>
-                          </a:solidFill>
-                          <a:latin typeface="Arial"/>
-                        </a:rPr>
-                        <a:t>1,791,118</a:t>
-                      </a:r>
-                    </a:p>
-                  </a:txBody>
-                  <a:tcPr marL="91440" marR="91440" marT="18288" marB="18288" anchor="ctr">
-                    <a:solidFill>
-                      <a:srgbClr val="15161D"/>
-                    </a:solidFill>
-                  </a:tcPr>
-                </a:tc>
-                <a:tc>
-                  <a:txBody>
-                    <a:bodyPr wrap="square"/>
-                    <a:lstStyle/>
-                    <a:p>
-                      <a:r>
-                        <a:rPr sz="1150" b="0">
-                          <a:solidFill>
-                            <a:srgbClr val="F2F2F5"/>
-                          </a:solidFill>
-                          <a:latin typeface="Arial"/>
-                        </a:rPr>
-                        <a:t>same</a:t>
-                      </a:r>
-                    </a:p>
-                  </a:txBody>
-                  <a:tcPr marL="91440" marR="91440" marT="18288" marB="18288" anchor="ctr">
-                    <a:solidFill>
-                      <a:srgbClr val="15161D"/>
-                    </a:solidFill>
-                  </a:tcPr>
-                </a:tc>
-              </a:tr>
-              <a:tr h="332841">
-                <a:tc>
-                  <a:txBody>
-                    <a:bodyPr wrap="square"/>
-                    <a:lstStyle/>
-                    <a:p>
-                      <a:r>
-                        <a:rPr sz="1150" b="0">
-                          <a:solidFill>
-                            <a:srgbClr val="F2F2F5"/>
-                          </a:solidFill>
-                          <a:latin typeface="Arial"/>
-                        </a:rPr>
-                        <a:t>reason codes</a:t>
-                      </a:r>
-                    </a:p>
-                  </a:txBody>
-                  <a:tcPr marL="91440" marR="91440" marT="18288" marB="18288" anchor="ctr">
-                    <a:solidFill>
-                      <a:srgbClr val="15161D"/>
-                    </a:solidFill>
-                  </a:tcPr>
-                </a:tc>
-                <a:tc>
-                  <a:txBody>
-                    <a:bodyPr wrap="square"/>
-                    <a:lstStyle/>
-                    <a:p>
-                      <a:r>
-                        <a:rPr sz="1150" b="0">
-                          <a:solidFill>
-                            <a:srgbClr val="F2F2F5"/>
-                          </a:solidFill>
-                          <a:latin typeface="Arial"/>
-                        </a:rPr>
-                        <a:t>54</a:t>
-                      </a:r>
-                    </a:p>
-                  </a:txBody>
-                  <a:tcPr marL="91440" marR="91440" marT="18288" marB="18288" anchor="ctr">
-                    <a:solidFill>
-                      <a:srgbClr val="15161D"/>
-                    </a:solidFill>
-                  </a:tcPr>
-                </a:tc>
-                <a:tc>
-                  <a:txBody>
-                    <a:bodyPr wrap="square"/>
-                    <a:lstStyle/>
-                    <a:p>
-                      <a:r>
-                        <a:rPr sz="1150" b="0">
-                          <a:solidFill>
-                            <a:srgbClr val="F2F2F5"/>
-                          </a:solidFill>
-                          <a:latin typeface="Arial"/>
-                        </a:rPr>
-                        <a:t>make grammar</a:t>
-                      </a:r>
-                    </a:p>
-                  </a:txBody>
-                  <a:tcPr marL="91440" marR="91440" marT="18288" marB="18288" anchor="ctr">
-                    <a:solidFill>
-                      <a:srgbClr val="15161D"/>
-                    </a:solidFill>
-                  </a:tcPr>
-                </a:tc>
-              </a:tr>
-              <a:tr h="332841">
-                <a:tc>
-                  <a:txBody>
-                    <a:bodyPr wrap="square"/>
-                    <a:lstStyle/>
-                    <a:p>
-                      <a:r>
-                        <a:rPr sz="1150" b="0">
-                          <a:solidFill>
-                            <a:srgbClr val="F2F2F5"/>
-                          </a:solidFill>
-                          <a:latin typeface="Arial"/>
-                        </a:rPr>
-                        <a:t>fusion arm selected, all four views</a:t>
-                      </a:r>
-                    </a:p>
-                  </a:txBody>
-                  <a:tcPr marL="91440" marR="91440" marT="18288" marB="18288" anchor="ctr">
-                    <a:solidFill>
-                      <a:srgbClr val="15161D"/>
-                    </a:solidFill>
-                  </a:tcPr>
-                </a:tc>
-                <a:tc>
-                  <a:txBody>
-                    <a:bodyPr wrap="square"/>
-                    <a:lstStyle/>
-                    <a:p>
-                      <a:r>
-                        <a:rPr sz="1150" b="0">
-                          <a:solidFill>
-                            <a:srgbClr val="F2F2F5"/>
-                          </a:solidFill>
-                          <a:latin typeface="Arial"/>
-                        </a:rPr>
-                        <a:t>g1_only</a:t>
-                      </a:r>
-                    </a:p>
-                  </a:txBody>
-                  <a:tcPr marL="91440" marR="91440" marT="18288" marB="18288" anchor="ctr">
-                    <a:solidFill>
-                      <a:srgbClr val="15161D"/>
-                    </a:solidFill>
-                  </a:tcPr>
-                </a:tc>
-                <a:tc>
-                  <a:txBody>
-                    <a:bodyPr wrap="square"/>
-                    <a:lstStyle/>
-                    <a:p>
-                      <a:r>
-                        <a:rPr sz="1150" b="0">
-                          <a:solidFill>
-                            <a:srgbClr val="F2F2F5"/>
-                          </a:solidFill>
-                          <a:latin typeface="Arial"/>
-                        </a:rPr>
-                        <a:t>reports/fusion_ablation_*.json</a:t>
-                      </a:r>
-                    </a:p>
-                  </a:txBody>
-                  <a:tcPr marL="91440" marR="91440" marT="18288" marB="18288" anchor="ctr">
-                    <a:solidFill>
-                      <a:srgbClr val="15161D"/>
-                    </a:solidFill>
-                  </a:tcPr>
-                </a:tc>
-              </a:tr>
-            </a:tbl>
-          </a:graphicData>
-        </a:graphic>
-      </p:graphicFrame>
-      <p:sp>
-        <p:nvSpPr>
-          <p:cNvPr id="9" name="TextBox 8"/>
-          <p:cNvSpPr txBox="1"/>
-          <p:nvPr/>
-        </p:nvSpPr>
-        <p:spPr>
-          <a:xfrm>
-            <a:off x="548640" y="4892040"/>
-            <a:ext cx="11064240" cy="1463040"/>
-          </a:xfrm>
-          <a:prstGeom prst="rect">
-            <a:avLst/>
-          </a:prstGeom>
-          <a:noFill/>
-        </p:spPr>
-        <p:txBody>
-          <a:bodyPr wrap="square" anchor="t">
-            <a:normAutofit/>
-          </a:bodyPr>
-          <a:lstStyle/>
-          <a:p>
-            <a:pPr algn="l">
-              <a:spcAft>
-                <a:spcPts val="800"/>
-              </a:spcAft>
-            </a:pPr>
-            <a:r>
-              <a:rPr sz="1200" b="0">
-                <a:solidFill>
-                  <a:srgbClr val="F5B14C"/>
-                </a:solidFill>
-                <a:latin typeface="Arial"/>
-              </a:rPr>
-              <a:t>SAY PRECISELY: precision@k = 0.9953 at k = 641 against 14,918 attacks means the QUEUE IS NEARLY PURE, not that we catch nearly everything. Always pair it with recall 0.3142.</a:t>
-            </a:r>
-          </a:p>
-          <a:p>
-            <a:pPr>
-              <a:spcAft>
-                <a:spcPts val="800"/>
-              </a:spcAft>
-            </a:pPr>
-            <a:r>
-              <a:rPr sz="1200" b="0">
-                <a:solidFill>
-                  <a:srgbClr val="F5B14C"/>
-                </a:solidFill>
-                <a:latin typeface="Arial"/>
-              </a:rPr>
-              <a:t>Our headline is measured against ORACLE attack truth. Agreement with the realised label channel is a different question: PR-AUC 0.2573 over 21,723 positives, of which 6,805 (31.3%) are not attacks. Both are reported; neither hides inside the other.</a:t>
             </a:r>
           </a:p>
         </p:txBody>
@@ -10459,7 +9339,7 @@
 </file>
 
 <file path=ppt/slides/slide2.xml><?xml version="1.0" encoding="utf-8"?>
-<p:sld xmlns:a="http://schemas.openxmlformats.org/drawingml/2006/main" xmlns:p="http://schemas.openxmlformats.org/presentationml/2006/main" xmlns:r="http://schemas.openxmlformats.org/officeDocument/2006/relationships">
+<p:sld xmlns:a="http://schemas.openxmlformats.org/drawingml/2006/main" xmlns:r="http://schemas.openxmlformats.org/officeDocument/2006/relationships" xmlns:p="http://schemas.openxmlformats.org/presentationml/2006/main">
   <p:cSld>
     <p:spTree>
       <p:nvGrpSpPr>
@@ -10467,7 +9347,14 @@
         <p:cNvGrpSpPr/>
         <p:nvPr/>
       </p:nvGrpSpPr>
-      <p:grpSpPr/>
+      <p:grpSpPr>
+        <a:xfrm>
+          <a:off x="0" y="0"/>
+          <a:ext cx="0" cy="0"/>
+          <a:chOff x="0" y="0"/>
+          <a:chExt cx="0" cy="0"/>
+        </a:xfrm>
+      </p:grpSpPr>
       <p:sp>
         <p:nvSpPr>
           <p:cNvPr id="2" name="Rectangle 1"/>
@@ -10509,6 +9396,7 @@
           <a:lstStyle/>
           <a:p>
             <a:pPr algn="ctr"/>
+            <a:endParaRPr/>
           </a:p>
         </p:txBody>
       </p:sp>
@@ -10631,6 +9519,7 @@
           <a:lstStyle/>
           <a:p>
             <a:pPr algn="ctr"/>
+            <a:endParaRPr/>
           </a:p>
         </p:txBody>
       </p:sp>
@@ -10721,14 +9610,14 @@
           <p:nvPr/>
         </p:nvPicPr>
         <p:blipFill>
-          <a:blip r:embed="rId2"/>
+          <a:blip r:embed="rId3"/>
           <a:stretch>
             <a:fillRect/>
           </a:stretch>
         </p:blipFill>
         <p:spPr>
           <a:xfrm>
-            <a:off x="1607864" y="1536192"/>
+            <a:off x="1421598" y="1545335"/>
             <a:ext cx="8945791" cy="2286000"/>
           </a:xfrm>
           <a:prstGeom prst="rect">
@@ -10764,13 +9653,31 @@
               </a:spcAft>
             </a:pPr>
             <a:r>
-              <a:rPr sz="1400" b="0">
+              <a:rPr sz="1400" b="0" dirty="0">
                 <a:solidFill>
                   <a:srgbClr val="F2F2F5"/>
                 </a:solidFill>
                 <a:latin typeface="Arial"/>
               </a:rPr>
-              <a:t>A six-slot typed grammar: ACCESS 8 × TRUST 7 × RAIL 12 × EVASION 8 × MONETISATION 7 × LABEL 5. The 172,889 rejected strings are physically impossible on the rail — a beneficiary leg on AePS, which terminates in cash.</a:t>
+              <a:t>A six-slot typed grammar: ACCESS 8 × TRUST 7 × RAIL 12 × EVASION 8 × MONETISATION 7 × LABEL 5. The 172,889 rejected strings are physically impossible on the rail — a beneficiary leg on </a:t>
+            </a:r>
+            <a:r>
+              <a:rPr sz="1400" b="0" dirty="0" err="1">
+                <a:solidFill>
+                  <a:srgbClr val="F2F2F5"/>
+                </a:solidFill>
+                <a:latin typeface="Arial"/>
+              </a:rPr>
+              <a:t>AePS</a:t>
+            </a:r>
+            <a:r>
+              <a:rPr sz="1400" b="0" dirty="0">
+                <a:solidFill>
+                  <a:srgbClr val="F2F2F5"/>
+                </a:solidFill>
+                <a:latin typeface="Arial"/>
+              </a:rPr>
+              <a:t>, which terminates in cash.</a:t>
             </a:r>
           </a:p>
           <a:p>
@@ -10780,13 +9687,31 @@
               </a:spcAft>
             </a:pPr>
             <a:r>
-              <a:rPr sz="1400" b="0">
+              <a:rPr sz="1400" b="0" dirty="0">
                 <a:solidFill>
                   <a:srgbClr val="F2F2F5"/>
                 </a:solidFill>
                 <a:latin typeface="Arial"/>
               </a:rPr>
-              <a:t>51 seed families across 12 rails — UPI pay / collect / autopay / Lite-offline · card CNP-3DS / CNP-keyed / CP-EMV / clearing-dispute / token-provisioning · A2A · AePS-microATM · agentic-commerce</a:t>
+              <a:t>51 seed families across 12 rails — UPI pay / collect / autopay / Lite-offline · card CNP-3DS / CNP-keyed / CP-EMV / clearing-dispute / token-provisioning · A2A · </a:t>
+            </a:r>
+            <a:r>
+              <a:rPr sz="1400" b="0" dirty="0" err="1">
+                <a:solidFill>
+                  <a:srgbClr val="F2F2F5"/>
+                </a:solidFill>
+                <a:latin typeface="Arial"/>
+              </a:rPr>
+              <a:t>AePS-microATM</a:t>
+            </a:r>
+            <a:r>
+              <a:rPr sz="1400" b="0" dirty="0">
+                <a:solidFill>
+                  <a:srgbClr val="F2F2F5"/>
+                </a:solidFill>
+                <a:latin typeface="Arial"/>
+              </a:rPr>
+              <a:t> · agentic-commerce</a:t>
             </a:r>
           </a:p>
           <a:p>
@@ -10796,7 +9721,7 @@
               </a:spcAft>
             </a:pPr>
             <a:r>
-              <a:rPr sz="1400" b="0">
+              <a:rPr sz="1400" b="0" dirty="0">
                 <a:solidFill>
                   <a:srgbClr val="F5B14C"/>
                 </a:solidFill>
@@ -10816,7 +9741,7 @@
 </file>
 
 <file path=ppt/slides/slide3.xml><?xml version="1.0" encoding="utf-8"?>
-<p:sld xmlns:a="http://schemas.openxmlformats.org/drawingml/2006/main" xmlns:p="http://schemas.openxmlformats.org/presentationml/2006/main" xmlns:r="http://schemas.openxmlformats.org/officeDocument/2006/relationships">
+<p:sld xmlns:a="http://schemas.openxmlformats.org/drawingml/2006/main" xmlns:r="http://schemas.openxmlformats.org/officeDocument/2006/relationships" xmlns:p="http://schemas.openxmlformats.org/presentationml/2006/main">
   <p:cSld>
     <p:spTree>
       <p:nvGrpSpPr>
@@ -10824,7 +9749,14 @@
         <p:cNvGrpSpPr/>
         <p:nvPr/>
       </p:nvGrpSpPr>
-      <p:grpSpPr/>
+      <p:grpSpPr>
+        <a:xfrm>
+          <a:off x="0" y="0"/>
+          <a:ext cx="0" cy="0"/>
+          <a:chOff x="0" y="0"/>
+          <a:chExt cx="0" cy="0"/>
+        </a:xfrm>
+      </p:grpSpPr>
       <p:sp>
         <p:nvSpPr>
           <p:cNvPr id="2" name="Rectangle 1"/>
@@ -10866,6 +9798,7 @@
           <a:lstStyle/>
           <a:p>
             <a:pPr algn="ctr"/>
+            <a:endParaRPr/>
           </a:p>
         </p:txBody>
       </p:sp>
@@ -10878,7 +9811,7 @@
           <p:nvPr/>
         </p:nvPicPr>
         <p:blipFill>
-          <a:blip r:embed="rId2"/>
+          <a:blip r:embed="rId3"/>
           <a:stretch>
             <a:fillRect/>
           </a:stretch>
@@ -10886,7 +9819,7 @@
         <p:spPr>
           <a:xfrm>
             <a:off x="1471935" y="164592"/>
-            <a:ext cx="9245082" cy="6053328"/>
+            <a:ext cx="9245082" cy="5880608"/>
           </a:xfrm>
           <a:prstGeom prst="rect">
             <a:avLst/>
@@ -10901,7 +9834,7 @@
         </p:nvSpPr>
         <p:spPr>
           <a:xfrm>
-            <a:off x="548640" y="6327648"/>
+            <a:off x="548640" y="6014378"/>
             <a:ext cx="11064240" cy="384048"/>
           </a:xfrm>
           <a:prstGeom prst="rect">
@@ -10911,7 +9844,7 @@
         </p:spPr>
         <p:txBody>
           <a:bodyPr wrap="square" anchor="t">
-            <a:normAutofit/>
+            <a:normAutofit lnSpcReduction="10000"/>
           </a:bodyPr>
           <a:lstStyle/>
           <a:p>
@@ -10921,7 +9854,7 @@
               </a:spcAft>
             </a:pPr>
             <a:r>
-              <a:rPr sz="1050" b="0">
+              <a:rPr sz="1050" b="0" dirty="0">
                 <a:solidFill>
                   <a:srgbClr val="F5B14C"/>
                 </a:solidFill>
@@ -10940,7 +9873,7 @@
         </p:nvSpPr>
         <p:spPr>
           <a:xfrm>
-            <a:off x="548640" y="6419088"/>
+            <a:off x="548640" y="6537625"/>
             <a:ext cx="10241280" cy="292608"/>
           </a:xfrm>
           <a:prstGeom prst="rect">
@@ -10960,7 +9893,7 @@
               </a:spcAft>
             </a:pPr>
             <a:r>
-              <a:rPr sz="950" b="0">
+              <a:rPr sz="950" b="0" dirty="0">
                 <a:solidFill>
                   <a:srgbClr val="9A9AA8"/>
                 </a:solidFill>
@@ -11019,7 +9952,7 @@
 </file>
 
 <file path=ppt/slides/slide4.xml><?xml version="1.0" encoding="utf-8"?>
-<p:sld xmlns:a="http://schemas.openxmlformats.org/drawingml/2006/main" xmlns:p="http://schemas.openxmlformats.org/presentationml/2006/main" xmlns:r="http://schemas.openxmlformats.org/officeDocument/2006/relationships">
+<p:sld xmlns:a="http://schemas.openxmlformats.org/drawingml/2006/main" xmlns:r="http://schemas.openxmlformats.org/officeDocument/2006/relationships" xmlns:p="http://schemas.openxmlformats.org/presentationml/2006/main">
   <p:cSld>
     <p:spTree>
       <p:nvGrpSpPr>
@@ -11027,7 +9960,14 @@
         <p:cNvGrpSpPr/>
         <p:nvPr/>
       </p:nvGrpSpPr>
-      <p:grpSpPr/>
+      <p:grpSpPr>
+        <a:xfrm>
+          <a:off x="0" y="0"/>
+          <a:ext cx="0" cy="0"/>
+          <a:chOff x="0" y="0"/>
+          <a:chExt cx="0" cy="0"/>
+        </a:xfrm>
+      </p:grpSpPr>
       <p:sp>
         <p:nvSpPr>
           <p:cNvPr id="2" name="Rectangle 1"/>
@@ -11069,6 +10009,7 @@
           <a:lstStyle/>
           <a:p>
             <a:pPr algn="ctr"/>
+            <a:endParaRPr/>
           </a:p>
         </p:txBody>
       </p:sp>
@@ -11090,7 +10031,7 @@
         </p:spPr>
         <p:txBody>
           <a:bodyPr wrap="square" anchor="t">
-            <a:normAutofit/>
+            <a:noAutofit/>
           </a:bodyPr>
           <a:lstStyle/>
           <a:p>
@@ -11100,7 +10041,7 @@
               </a:spcAft>
             </a:pPr>
             <a:r>
-              <a:rPr sz="1150" b="1">
+              <a:rPr sz="1600" b="1" dirty="0">
                 <a:solidFill>
                   <a:srgbClr val="3DD68C"/>
                 </a:solidFill>
@@ -11119,7 +10060,7 @@
         </p:nvSpPr>
         <p:spPr>
           <a:xfrm>
-            <a:off x="548640" y="603504"/>
+            <a:off x="502920" y="838877"/>
             <a:ext cx="11064240" cy="640080"/>
           </a:xfrm>
           <a:prstGeom prst="rect">
@@ -11139,7 +10080,7 @@
               </a:spcAft>
             </a:pPr>
             <a:r>
-              <a:rPr sz="2800" b="1">
+              <a:rPr sz="2800" b="1" dirty="0">
                 <a:solidFill>
                   <a:srgbClr val="F2F2F5"/>
                 </a:solidFill>
@@ -11157,9 +10098,9 @@
           <p:nvPr/>
         </p:nvSpPr>
         <p:spPr>
-          <a:xfrm>
-            <a:off x="548640" y="1298448"/>
-            <a:ext cx="1280160" cy="22860"/>
+          <a:xfrm flipV="1">
+            <a:off x="692572" y="612651"/>
+            <a:ext cx="3930227" cy="45719"/>
           </a:xfrm>
           <a:prstGeom prst="rect">
             <a:avLst/>
@@ -11191,6 +10132,7 @@
           <a:lstStyle/>
           <a:p>
             <a:pPr algn="ctr"/>
+            <a:endParaRPr/>
           </a:p>
         </p:txBody>
       </p:sp>
@@ -11202,7 +10144,7 @@
         </p:nvSpPr>
         <p:spPr>
           <a:xfrm>
-            <a:off x="548640" y="6419088"/>
+            <a:off x="548640" y="6579956"/>
             <a:ext cx="10241280" cy="292608"/>
           </a:xfrm>
           <a:prstGeom prst="rect">
@@ -11222,7 +10164,7 @@
               </a:spcAft>
             </a:pPr>
             <a:r>
-              <a:rPr sz="950" b="0">
+              <a:rPr sz="950" b="0" dirty="0">
                 <a:solidFill>
                   <a:srgbClr val="9A9AA8"/>
                 </a:solidFill>
@@ -11280,7 +10222,7 @@
         </p:nvSpPr>
         <p:spPr>
           <a:xfrm>
-            <a:off x="548640" y="1572768"/>
+            <a:off x="548640" y="1911435"/>
             <a:ext cx="2670048" cy="1051560"/>
           </a:xfrm>
           <a:prstGeom prst="rect">
@@ -11311,7 +10253,7 @@
           </a:fontRef>
         </p:style>
         <p:txBody>
-          <a:bodyPr rtlCol="0" anchor="ctr" wrap="square">
+          <a:bodyPr wrap="square" rtlCol="0" anchor="ctr">
             <a:normAutofit/>
           </a:bodyPr>
           <a:lstStyle/>
@@ -11322,7 +10264,7 @@
               </a:spcAft>
             </a:pPr>
             <a:r>
-              <a:rPr sz="1300" b="1">
+              <a:rPr sz="1300" b="1" dirty="0">
                 <a:solidFill>
                   <a:srgbClr val="3DD68C"/>
                 </a:solidFill>
@@ -11330,9 +10272,11 @@
               </a:rPr>
               <a:t>126</a:t>
             </a:r>
-            <a:br/>
-            <a:r>
-              <a:rPr sz="1300" b="1">
+            <a:br>
+              <a:rPr dirty="0"/>
+            </a:br>
+            <a:r>
+              <a:rPr sz="1300" b="1" dirty="0">
                 <a:solidFill>
                   <a:srgbClr val="3DD68C"/>
                 </a:solidFill>
@@ -11351,7 +10295,7 @@
         </p:nvSpPr>
         <p:spPr>
           <a:xfrm>
-            <a:off x="3364992" y="1572768"/>
+            <a:off x="3364992" y="1911435"/>
             <a:ext cx="2670048" cy="1051560"/>
           </a:xfrm>
           <a:prstGeom prst="rect">
@@ -11382,7 +10326,7 @@
           </a:fontRef>
         </p:style>
         <p:txBody>
-          <a:bodyPr rtlCol="0" anchor="ctr" wrap="square">
+          <a:bodyPr wrap="square" rtlCol="0" anchor="ctr">
             <a:normAutofit/>
           </a:bodyPr>
           <a:lstStyle/>
@@ -11422,7 +10366,7 @@
         </p:nvSpPr>
         <p:spPr>
           <a:xfrm>
-            <a:off x="6181344" y="1572768"/>
+            <a:off x="6181344" y="1911435"/>
             <a:ext cx="2670048" cy="1051560"/>
           </a:xfrm>
           <a:prstGeom prst="rect">
@@ -11453,7 +10397,7 @@
           </a:fontRef>
         </p:style>
         <p:txBody>
-          <a:bodyPr rtlCol="0" anchor="ctr" wrap="square">
+          <a:bodyPr wrap="square" rtlCol="0" anchor="ctr">
             <a:normAutofit/>
           </a:bodyPr>
           <a:lstStyle/>
@@ -11493,7 +10437,7 @@
         </p:nvSpPr>
         <p:spPr>
           <a:xfrm>
-            <a:off x="8997696" y="1572768"/>
+            <a:off x="8997696" y="1911435"/>
             <a:ext cx="2670048" cy="1051560"/>
           </a:xfrm>
           <a:prstGeom prst="rect">
@@ -11524,7 +10468,7 @@
           </a:fontRef>
         </p:style>
         <p:txBody>
-          <a:bodyPr rtlCol="0" anchor="ctr" wrap="square">
+          <a:bodyPr wrap="square" rtlCol="0" anchor="ctr">
             <a:normAutofit/>
           </a:bodyPr>
           <a:lstStyle/>
@@ -11564,8 +10508,8 @@
         </p:nvSpPr>
         <p:spPr>
           <a:xfrm>
-            <a:off x="548640" y="2788920"/>
-            <a:ext cx="11064240" cy="3520440"/>
+            <a:off x="548640" y="3542455"/>
+            <a:ext cx="11064240" cy="2198624"/>
           </a:xfrm>
           <a:prstGeom prst="rect">
             <a:avLst/>
@@ -11584,13 +10528,31 @@
               </a:spcAft>
             </a:pPr>
             <a:r>
-              <a:rPr sz="1500" b="0">
+              <a:rPr sz="1500" b="0" dirty="0">
                 <a:solidFill>
                   <a:srgbClr val="F2F2F5"/>
                 </a:solidFill>
                 <a:latin typeface="Arial"/>
               </a:rPr>
-              <a:t>Message ordering per rail — authorisation before presentment; presentment spills to T+1, never backwards. Derived legs strictly after their antecedent. One hour-convention chokepoint (HOUR_MAX = 23.99).</a:t>
+              <a:t>Message ordering per rail — </a:t>
+            </a:r>
+            <a:r>
+              <a:rPr sz="1500" b="0" dirty="0" err="1">
+                <a:solidFill>
+                  <a:srgbClr val="F2F2F5"/>
+                </a:solidFill>
+                <a:latin typeface="Arial"/>
+              </a:rPr>
+              <a:t>authorisation</a:t>
+            </a:r>
+            <a:r>
+              <a:rPr sz="1500" b="0" dirty="0">
+                <a:solidFill>
+                  <a:srgbClr val="F2F2F5"/>
+                </a:solidFill>
+                <a:latin typeface="Arial"/>
+              </a:rPr>
+              <a:t> before presentment; presentment spills to T+1, never backwards. Derived legs strictly after their antecedent. One hour-convention chokepoint (HOUR_MAX = 23.99).</a:t>
             </a:r>
           </a:p>
           <a:p>
@@ -11600,7 +10562,7 @@
               </a:spcAft>
             </a:pPr>
             <a:r>
-              <a:rPr sz="1500" b="0">
+              <a:rPr sz="1500" b="0" dirty="0">
                 <a:solidFill>
                   <a:srgbClr val="F2F2F5"/>
                 </a:solidFill>
@@ -11616,13 +10578,58 @@
               </a:spcAft>
             </a:pPr>
             <a:r>
-              <a:rPr sz="1500" b="0">
+              <a:rPr sz="1500" b="0" dirty="0" err="1">
                 <a:solidFill>
                   <a:srgbClr val="3DD68C"/>
                 </a:solidFill>
                 <a:latin typeface="Arial"/>
               </a:rPr>
-              <a:t>Realised attack share π = 0.0069 against a configured 0.0050 — and the trainer uses the REALISED value, because nnPU's risk estimator is parameterised by it.</a:t>
+              <a:t>Realised</a:t>
+            </a:r>
+            <a:r>
+              <a:rPr sz="1500" b="0" dirty="0">
+                <a:solidFill>
+                  <a:srgbClr val="3DD68C"/>
+                </a:solidFill>
+                <a:latin typeface="Arial"/>
+              </a:rPr>
+              <a:t> attack share π = 0.0069 against a configured 0.0050 — and the trainer uses the REALISED value, because </a:t>
+            </a:r>
+            <a:r>
+              <a:rPr sz="1500" b="0" dirty="0" err="1">
+                <a:solidFill>
+                  <a:srgbClr val="3DD68C"/>
+                </a:solidFill>
+                <a:latin typeface="Arial"/>
+              </a:rPr>
+              <a:t>nnPU's</a:t>
+            </a:r>
+            <a:r>
+              <a:rPr sz="1500" b="0" dirty="0">
+                <a:solidFill>
+                  <a:srgbClr val="3DD68C"/>
+                </a:solidFill>
+                <a:latin typeface="Arial"/>
+              </a:rPr>
+              <a:t> risk estimator is </a:t>
+            </a:r>
+            <a:r>
+              <a:rPr sz="1500" b="0" dirty="0" err="1">
+                <a:solidFill>
+                  <a:srgbClr val="3DD68C"/>
+                </a:solidFill>
+                <a:latin typeface="Arial"/>
+              </a:rPr>
+              <a:t>parameterised</a:t>
+            </a:r>
+            <a:r>
+              <a:rPr sz="1500" b="0" dirty="0">
+                <a:solidFill>
+                  <a:srgbClr val="3DD68C"/>
+                </a:solidFill>
+                <a:latin typeface="Arial"/>
+              </a:rPr>
+              <a:t> by it.</a:t>
             </a:r>
           </a:p>
           <a:p>
@@ -11632,7 +10639,7 @@
               </a:spcAft>
             </a:pPr>
             <a:r>
-              <a:rPr sz="1500" b="0">
+              <a:rPr sz="1500" b="0" dirty="0">
                 <a:solidFill>
                   <a:srgbClr val="F5B14C"/>
                 </a:solidFill>
@@ -11652,7 +10659,7 @@
 </file>
 
 <file path=ppt/slides/slide5.xml><?xml version="1.0" encoding="utf-8"?>
-<p:sld xmlns:a="http://schemas.openxmlformats.org/drawingml/2006/main" xmlns:p="http://schemas.openxmlformats.org/presentationml/2006/main" xmlns:r="http://schemas.openxmlformats.org/officeDocument/2006/relationships">
+<p:sld xmlns:a="http://schemas.openxmlformats.org/drawingml/2006/main" xmlns:r="http://schemas.openxmlformats.org/officeDocument/2006/relationships" xmlns:p="http://schemas.openxmlformats.org/presentationml/2006/main">
   <p:cSld>
     <p:spTree>
       <p:nvGrpSpPr>
@@ -11660,7 +10667,14 @@
         <p:cNvGrpSpPr/>
         <p:nvPr/>
       </p:nvGrpSpPr>
-      <p:grpSpPr/>
+      <p:grpSpPr>
+        <a:xfrm>
+          <a:off x="0" y="0"/>
+          <a:ext cx="0" cy="0"/>
+          <a:chOff x="0" y="0"/>
+          <a:chExt cx="0" cy="0"/>
+        </a:xfrm>
+      </p:grpSpPr>
       <p:sp>
         <p:nvSpPr>
           <p:cNvPr id="2" name="Rectangle 1"/>
@@ -11702,6 +10716,7 @@
           <a:lstStyle/>
           <a:p>
             <a:pPr algn="ctr"/>
+            <a:endParaRPr/>
           </a:p>
         </p:txBody>
       </p:sp>
@@ -11723,7 +10738,7 @@
         </p:spPr>
         <p:txBody>
           <a:bodyPr wrap="square" anchor="t">
-            <a:normAutofit/>
+            <a:noAutofit/>
           </a:bodyPr>
           <a:lstStyle/>
           <a:p>
@@ -11733,7 +10748,7 @@
               </a:spcAft>
             </a:pPr>
             <a:r>
-              <a:rPr sz="1150" b="1">
+              <a:rPr sz="1600" b="1" dirty="0">
                 <a:solidFill>
                   <a:srgbClr val="4A9EFF"/>
                 </a:solidFill>
@@ -11752,7 +10767,7 @@
         </p:nvSpPr>
         <p:spPr>
           <a:xfrm>
-            <a:off x="548640" y="603504"/>
+            <a:off x="548640" y="755905"/>
             <a:ext cx="11064240" cy="640080"/>
           </a:xfrm>
           <a:prstGeom prst="rect">
@@ -11772,7 +10787,7 @@
               </a:spcAft>
             </a:pPr>
             <a:r>
-              <a:rPr sz="2800" b="1">
+              <a:rPr sz="2800" b="1" dirty="0">
                 <a:solidFill>
                   <a:srgbClr val="F2F2F5"/>
                 </a:solidFill>
@@ -11791,8 +10806,8 @@
         </p:nvSpPr>
         <p:spPr>
           <a:xfrm>
-            <a:off x="548640" y="1298448"/>
-            <a:ext cx="1280160" cy="22860"/>
+            <a:off x="684106" y="606044"/>
+            <a:ext cx="1652694" cy="45719"/>
           </a:xfrm>
           <a:prstGeom prst="rect">
             <a:avLst/>
@@ -11824,6 +10839,7 @@
           <a:lstStyle/>
           <a:p>
             <a:pPr algn="ctr"/>
+            <a:endParaRPr/>
           </a:p>
         </p:txBody>
       </p:sp>
@@ -11948,6 +10964,7 @@
           <a:lstStyle/>
           <a:p>
             <a:pPr algn="ctr"/>
+            <a:endParaRPr/>
           </a:p>
         </p:txBody>
       </p:sp>
@@ -12049,6 +11066,7 @@
           <a:lstStyle/>
           <a:p>
             <a:pPr algn="ctr"/>
+            <a:endParaRPr/>
           </a:p>
         </p:txBody>
       </p:sp>
@@ -12150,6 +11168,7 @@
           <a:lstStyle/>
           <a:p>
             <a:pPr algn="ctr"/>
+            <a:endParaRPr/>
           </a:p>
         </p:txBody>
       </p:sp>
@@ -12217,7 +11236,7 @@
         <p:spPr>
           <a:xfrm>
             <a:off x="548640" y="4572000"/>
-            <a:ext cx="11064240" cy="1463040"/>
+            <a:ext cx="11064240" cy="1091183"/>
           </a:xfrm>
           <a:prstGeom prst="rect">
             <a:avLst/>
@@ -12251,6 +11270,7 @@
           <a:lstStyle/>
           <a:p>
             <a:pPr algn="ctr"/>
+            <a:endParaRPr/>
           </a:p>
         </p:txBody>
       </p:sp>
@@ -12263,7 +11283,7 @@
         <p:spPr>
           <a:xfrm>
             <a:off x="868680" y="4709160"/>
-            <a:ext cx="10424160" cy="1280160"/>
+            <a:ext cx="10424160" cy="965706"/>
           </a:xfrm>
           <a:prstGeom prst="rect">
             <a:avLst/>
@@ -12318,7 +11338,7 @@
 </file>
 
 <file path=ppt/slides/slide6.xml><?xml version="1.0" encoding="utf-8"?>
-<p:sld xmlns:a="http://schemas.openxmlformats.org/drawingml/2006/main" xmlns:p="http://schemas.openxmlformats.org/presentationml/2006/main" xmlns:r="http://schemas.openxmlformats.org/officeDocument/2006/relationships">
+<p:sld xmlns:a="http://schemas.openxmlformats.org/drawingml/2006/main" xmlns:r="http://schemas.openxmlformats.org/officeDocument/2006/relationships" xmlns:p="http://schemas.openxmlformats.org/presentationml/2006/main">
   <p:cSld>
     <p:spTree>
       <p:nvGrpSpPr>
@@ -12326,7 +11346,14 @@
         <p:cNvGrpSpPr/>
         <p:nvPr/>
       </p:nvGrpSpPr>
-      <p:grpSpPr/>
+      <p:grpSpPr>
+        <a:xfrm>
+          <a:off x="0" y="0"/>
+          <a:ext cx="0" cy="0"/>
+          <a:chOff x="0" y="0"/>
+          <a:chExt cx="0" cy="0"/>
+        </a:xfrm>
+      </p:grpSpPr>
       <p:sp>
         <p:nvSpPr>
           <p:cNvPr id="2" name="Rectangle 1"/>
@@ -12368,6 +11395,7 @@
           <a:lstStyle/>
           <a:p>
             <a:pPr algn="ctr"/>
+            <a:endParaRPr/>
           </a:p>
         </p:txBody>
       </p:sp>
@@ -12418,7 +11446,7 @@
         </p:nvSpPr>
         <p:spPr>
           <a:xfrm>
-            <a:off x="548640" y="603504"/>
+            <a:off x="548640" y="705104"/>
             <a:ext cx="11064240" cy="640080"/>
           </a:xfrm>
           <a:prstGeom prst="rect">
@@ -12438,7 +11466,7 @@
               </a:spcAft>
             </a:pPr>
             <a:r>
-              <a:rPr sz="2800" b="1">
+              <a:rPr sz="2800" b="1" dirty="0">
                 <a:solidFill>
                   <a:srgbClr val="F2F2F5"/>
                 </a:solidFill>
@@ -12457,8 +11485,8 @@
         </p:nvSpPr>
         <p:spPr>
           <a:xfrm>
-            <a:off x="548640" y="1298448"/>
-            <a:ext cx="1280160" cy="22860"/>
+            <a:off x="650240" y="580643"/>
+            <a:ext cx="2042160" cy="45719"/>
           </a:xfrm>
           <a:prstGeom prst="rect">
             <a:avLst/>
@@ -12490,6 +11518,7 @@
           <a:lstStyle/>
           <a:p>
             <a:pPr algn="ctr"/>
+            <a:endParaRPr/>
           </a:p>
         </p:txBody>
       </p:sp>
@@ -12580,7 +11609,7 @@
           <p:nvPr/>
         </p:nvPicPr>
         <p:blipFill>
-          <a:blip r:embed="rId2"/>
+          <a:blip r:embed="rId3"/>
           <a:stretch>
             <a:fillRect/>
           </a:stretch>
@@ -12614,17 +11643,29 @@
                 <a:tableStyleId>{5C22544A-7EE6-4342-B048-85BDC9FD1C3A}</a:tableStyleId>
               </a:tblPr>
               <a:tblGrid>
-                <a:gridCol w="3657600"/>
-                <a:gridCol w="2194560"/>
+                <a:gridCol w="3657600">
+                  <a:extLst>
+                    <a:ext uri="{9D8B030D-6E8A-4147-A177-3AD203B41FA5}">
+                      <a16:colId xmlns:a16="http://schemas.microsoft.com/office/drawing/2014/main" val="20000"/>
+                    </a:ext>
+                  </a:extLst>
+                </a:gridCol>
+                <a:gridCol w="2194560">
+                  <a:extLst>
+                    <a:ext uri="{9D8B030D-6E8A-4147-A177-3AD203B41FA5}">
+                      <a16:colId xmlns:a16="http://schemas.microsoft.com/office/drawing/2014/main" val="20001"/>
+                    </a:ext>
+                  </a:extLst>
+                </a:gridCol>
               </a:tblGrid>
               <a:tr h="430133">
                 <a:tc>
                   <a:txBody>
-                    <a:bodyPr wrap="square"/>
+                    <a:bodyPr/>
                     <a:lstStyle/>
                     <a:p>
                       <a:r>
-                        <a:rPr sz="1200" b="1">
+                        <a:rPr sz="1200" b="1" dirty="0">
                           <a:solidFill>
                             <a:srgbClr val="F5B14C"/>
                           </a:solidFill>
@@ -12634,7 +11675,7 @@
                       </a:r>
                     </a:p>
                   </a:txBody>
-                  <a:tcPr marL="91440" marR="91440" marT="18288" marB="18288" anchor="ctr">
+                  <a:tcPr marT="18288" marB="18288" anchor="ctr">
                     <a:solidFill>
                       <a:srgbClr val="0B0B0F"/>
                     </a:solidFill>
@@ -12642,7 +11683,7 @@
                 </a:tc>
                 <a:tc>
                   <a:txBody>
-                    <a:bodyPr wrap="square"/>
+                    <a:bodyPr/>
                     <a:lstStyle/>
                     <a:p>
                       <a:r>
@@ -12656,17 +11697,22 @@
                       </a:r>
                     </a:p>
                   </a:txBody>
-                  <a:tcPr marL="91440" marR="91440" marT="18288" marB="18288" anchor="ctr">
+                  <a:tcPr marT="18288" marB="18288" anchor="ctr">
                     <a:solidFill>
                       <a:srgbClr val="0B0B0F"/>
                     </a:solidFill>
                   </a:tcPr>
                 </a:tc>
+                <a:extLst>
+                  <a:ext uri="{0D108BD9-81ED-4DB2-BD59-A6C34878D82A}">
+                    <a16:rowId xmlns:a16="http://schemas.microsoft.com/office/drawing/2014/main" val="10000"/>
+                  </a:ext>
+                </a:extLst>
               </a:tr>
               <a:tr h="430133">
                 <a:tc>
                   <a:txBody>
-                    <a:bodyPr wrap="square"/>
+                    <a:bodyPr/>
                     <a:lstStyle/>
                     <a:p>
                       <a:r>
@@ -12680,7 +11726,7 @@
                       </a:r>
                     </a:p>
                   </a:txBody>
-                  <a:tcPr marL="91440" marR="91440" marT="18288" marB="18288" anchor="ctr">
+                  <a:tcPr marT="18288" marB="18288" anchor="ctr">
                     <a:solidFill>
                       <a:srgbClr val="15161D"/>
                     </a:solidFill>
@@ -12688,7 +11734,7 @@
                 </a:tc>
                 <a:tc>
                   <a:txBody>
-                    <a:bodyPr wrap="square"/>
+                    <a:bodyPr/>
                     <a:lstStyle/>
                     <a:p>
                       <a:r>
@@ -12702,17 +11748,22 @@
                       </a:r>
                     </a:p>
                   </a:txBody>
-                  <a:tcPr marL="91440" marR="91440" marT="18288" marB="18288" anchor="ctr">
+                  <a:tcPr marT="18288" marB="18288" anchor="ctr">
                     <a:solidFill>
                       <a:srgbClr val="15161D"/>
                     </a:solidFill>
                   </a:tcPr>
                 </a:tc>
+                <a:extLst>
+                  <a:ext uri="{0D108BD9-81ED-4DB2-BD59-A6C34878D82A}">
+                    <a16:rowId xmlns:a16="http://schemas.microsoft.com/office/drawing/2014/main" val="10001"/>
+                  </a:ext>
+                </a:extLst>
               </a:tr>
               <a:tr h="430133">
                 <a:tc>
                   <a:txBody>
-                    <a:bodyPr wrap="square"/>
+                    <a:bodyPr/>
                     <a:lstStyle/>
                     <a:p>
                       <a:r>
@@ -12726,7 +11777,7 @@
                       </a:r>
                     </a:p>
                   </a:txBody>
-                  <a:tcPr marL="91440" marR="91440" marT="18288" marB="18288" anchor="ctr">
+                  <a:tcPr marT="18288" marB="18288" anchor="ctr">
                     <a:solidFill>
                       <a:srgbClr val="15161D"/>
                     </a:solidFill>
@@ -12734,7 +11785,7 @@
                 </a:tc>
                 <a:tc>
                   <a:txBody>
-                    <a:bodyPr wrap="square"/>
+                    <a:bodyPr/>
                     <a:lstStyle/>
                     <a:p>
                       <a:r>
@@ -12748,17 +11799,22 @@
                       </a:r>
                     </a:p>
                   </a:txBody>
-                  <a:tcPr marL="91440" marR="91440" marT="18288" marB="18288" anchor="ctr">
+                  <a:tcPr marT="18288" marB="18288" anchor="ctr">
                     <a:solidFill>
                       <a:srgbClr val="15161D"/>
                     </a:solidFill>
                   </a:tcPr>
                 </a:tc>
+                <a:extLst>
+                  <a:ext uri="{0D108BD9-81ED-4DB2-BD59-A6C34878D82A}">
+                    <a16:rowId xmlns:a16="http://schemas.microsoft.com/office/drawing/2014/main" val="10002"/>
+                  </a:ext>
+                </a:extLst>
               </a:tr>
               <a:tr h="430133">
                 <a:tc>
                   <a:txBody>
-                    <a:bodyPr wrap="square"/>
+                    <a:bodyPr/>
                     <a:lstStyle/>
                     <a:p>
                       <a:r>
@@ -12772,7 +11828,7 @@
                       </a:r>
                     </a:p>
                   </a:txBody>
-                  <a:tcPr marL="91440" marR="91440" marT="18288" marB="18288" anchor="ctr">
+                  <a:tcPr marT="18288" marB="18288" anchor="ctr">
                     <a:solidFill>
                       <a:srgbClr val="15161D"/>
                     </a:solidFill>
@@ -12780,11 +11836,11 @@
                 </a:tc>
                 <a:tc>
                   <a:txBody>
-                    <a:bodyPr wrap="square"/>
+                    <a:bodyPr/>
                     <a:lstStyle/>
                     <a:p>
                       <a:r>
-                        <a:rPr sz="1300" b="0">
+                        <a:rPr sz="1300" b="0" dirty="0">
                           <a:solidFill>
                             <a:srgbClr val="F2F2F5"/>
                           </a:solidFill>
@@ -12794,12 +11850,17 @@
                       </a:r>
                     </a:p>
                   </a:txBody>
-                  <a:tcPr marL="91440" marR="91440" marT="18288" marB="18288" anchor="ctr">
+                  <a:tcPr marT="18288" marB="18288" anchor="ctr">
                     <a:solidFill>
                       <a:srgbClr val="15161D"/>
                     </a:solidFill>
                   </a:tcPr>
                 </a:tc>
+                <a:extLst>
+                  <a:ext uri="{0D108BD9-81ED-4DB2-BD59-A6C34878D82A}">
+                    <a16:rowId xmlns:a16="http://schemas.microsoft.com/office/drawing/2014/main" val="10003"/>
+                  </a:ext>
+                </a:extLst>
               </a:tr>
             </a:tbl>
           </a:graphicData>
@@ -12813,7 +11874,7 @@
         </p:nvSpPr>
         <p:spPr>
           <a:xfrm>
-            <a:off x="5760720" y="3429000"/>
+            <a:off x="5760720" y="3733801"/>
             <a:ext cx="5852160" cy="2377440"/>
           </a:xfrm>
           <a:prstGeom prst="rect">
@@ -12833,13 +11894,49 @@
               </a:spcAft>
             </a:pPr>
             <a:r>
-              <a:rPr sz="1350" b="0">
+              <a:rPr sz="1350" b="0" dirty="0">
                 <a:solidFill>
                   <a:srgbClr val="3DD68C"/>
                 </a:solidFill>
                 <a:latin typeface="Arial"/>
               </a:rPr>
-              <a:t>We train with nnPU at the realised prior, IPW reject inference against the logged incumbent policy, and label-maturity weights.</a:t>
+              <a:t>We train with </a:t>
+            </a:r>
+            <a:r>
+              <a:rPr sz="1350" b="0" dirty="0" err="1">
+                <a:solidFill>
+                  <a:srgbClr val="3DD68C"/>
+                </a:solidFill>
+                <a:latin typeface="Arial"/>
+              </a:rPr>
+              <a:t>nnPU</a:t>
+            </a:r>
+            <a:r>
+              <a:rPr sz="1350" b="0" dirty="0">
+                <a:solidFill>
+                  <a:srgbClr val="3DD68C"/>
+                </a:solidFill>
+                <a:latin typeface="Arial"/>
+              </a:rPr>
+              <a:t> at the </a:t>
+            </a:r>
+            <a:r>
+              <a:rPr sz="1350" b="0" dirty="0" err="1">
+                <a:solidFill>
+                  <a:srgbClr val="3DD68C"/>
+                </a:solidFill>
+                <a:latin typeface="Arial"/>
+              </a:rPr>
+              <a:t>realised</a:t>
+            </a:r>
+            <a:r>
+              <a:rPr sz="1350" b="0" dirty="0">
+                <a:solidFill>
+                  <a:srgbClr val="3DD68C"/>
+                </a:solidFill>
+                <a:latin typeface="Arial"/>
+              </a:rPr>
+              <a:t> prior, IPW reject inference against the logged incumbent policy, and label-maturity weights.</a:t>
             </a:r>
           </a:p>
           <a:p>
@@ -12849,13 +11946,31 @@
               </a:spcAft>
             </a:pPr>
             <a:r>
-              <a:rPr sz="1350" b="0">
+              <a:rPr sz="1350" b="0" dirty="0">
                 <a:solidFill>
                   <a:srgbClr val="F2F2F5"/>
                 </a:solidFill>
                 <a:latin typeface="Arial"/>
               </a:rPr>
-              <a:t>Treating unlabelled as legitimate is the notebook default — and it teaches the model that absence of a complaint is evidence of innocence.</a:t>
+              <a:t>Treating </a:t>
+            </a:r>
+            <a:r>
+              <a:rPr sz="1350" b="0" dirty="0" err="1">
+                <a:solidFill>
+                  <a:srgbClr val="F2F2F5"/>
+                </a:solidFill>
+                <a:latin typeface="Arial"/>
+              </a:rPr>
+              <a:t>unlabelled</a:t>
+            </a:r>
+            <a:r>
+              <a:rPr sz="1350" b="0" dirty="0">
+                <a:solidFill>
+                  <a:srgbClr val="F2F2F5"/>
+                </a:solidFill>
+                <a:latin typeface="Arial"/>
+              </a:rPr>
+              <a:t> as legitimate is the notebook default — and it teaches the model that absence of a complaint is evidence of innocence.</a:t>
             </a:r>
           </a:p>
         </p:txBody>
@@ -12888,13 +12003,31 @@
               </a:spcAft>
             </a:pPr>
             <a:r>
-              <a:rPr sz="1300" b="0">
+              <a:rPr sz="1300" b="0" dirty="0">
                 <a:solidFill>
                   <a:srgbClr val="F5B14C"/>
                 </a:solidFill>
                 <a:latin typeface="Arial"/>
               </a:rPr>
-              <a:t>This is the constraint that bounds our result — and the reason the baseline on slide 13 beats us.</a:t>
+              <a:t>This is the constraint that bounds our result</a:t>
+            </a:r>
+            <a:r>
+              <a:rPr lang="en-US" sz="1300" b="0" dirty="0">
+                <a:solidFill>
+                  <a:srgbClr val="F5B14C"/>
+                </a:solidFill>
+                <a:latin typeface="Arial"/>
+              </a:rPr>
+              <a:t>, </a:t>
+            </a:r>
+            <a:r>
+              <a:rPr sz="1300" b="0" dirty="0">
+                <a:solidFill>
+                  <a:srgbClr val="F5B14C"/>
+                </a:solidFill>
+                <a:latin typeface="Arial"/>
+              </a:rPr>
+              <a:t>and the reason the baseline on slide 13 beats us.</a:t>
             </a:r>
           </a:p>
         </p:txBody>
@@ -12908,7 +12041,7 @@
 </file>
 
 <file path=ppt/slides/slide7.xml><?xml version="1.0" encoding="utf-8"?>
-<p:sld xmlns:a="http://schemas.openxmlformats.org/drawingml/2006/main" xmlns:p="http://schemas.openxmlformats.org/presentationml/2006/main" xmlns:r="http://schemas.openxmlformats.org/officeDocument/2006/relationships">
+<p:sld xmlns:a="http://schemas.openxmlformats.org/drawingml/2006/main" xmlns:r="http://schemas.openxmlformats.org/officeDocument/2006/relationships" xmlns:p="http://schemas.openxmlformats.org/presentationml/2006/main">
   <p:cSld>
     <p:spTree>
       <p:nvGrpSpPr>
@@ -12916,7 +12049,14 @@
         <p:cNvGrpSpPr/>
         <p:nvPr/>
       </p:nvGrpSpPr>
-      <p:grpSpPr/>
+      <p:grpSpPr>
+        <a:xfrm>
+          <a:off x="0" y="0"/>
+          <a:ext cx="0" cy="0"/>
+          <a:chOff x="0" y="0"/>
+          <a:chExt cx="0" cy="0"/>
+        </a:xfrm>
+      </p:grpSpPr>
       <p:sp>
         <p:nvSpPr>
           <p:cNvPr id="2" name="Rectangle 1"/>
@@ -12958,6 +12098,7 @@
           <a:lstStyle/>
           <a:p>
             <a:pPr algn="ctr"/>
+            <a:endParaRPr/>
           </a:p>
         </p:txBody>
       </p:sp>
@@ -12979,7 +12120,7 @@
         </p:spPr>
         <p:txBody>
           <a:bodyPr wrap="square" anchor="t">
-            <a:normAutofit/>
+            <a:noAutofit/>
           </a:bodyPr>
           <a:lstStyle/>
           <a:p>
@@ -12989,7 +12130,7 @@
               </a:spcAft>
             </a:pPr>
             <a:r>
-              <a:rPr sz="1150" b="1">
+              <a:rPr sz="1600" b="1" dirty="0">
                 <a:solidFill>
                   <a:srgbClr val="3DD68C"/>
                 </a:solidFill>
@@ -13008,7 +12149,7 @@
         </p:nvSpPr>
         <p:spPr>
           <a:xfrm>
-            <a:off x="548640" y="603504"/>
+            <a:off x="548640" y="671239"/>
             <a:ext cx="11064240" cy="640080"/>
           </a:xfrm>
           <a:prstGeom prst="rect">
@@ -13028,13 +12169,31 @@
               </a:spcAft>
             </a:pPr>
             <a:r>
-              <a:rPr sz="2800" b="1">
+              <a:rPr sz="2800" b="1" dirty="0">
                 <a:solidFill>
                   <a:srgbClr val="F2F2F5"/>
                 </a:solidFill>
                 <a:latin typeface="Arial"/>
               </a:rPr>
-              <a:t>Six leakage controls — any failure fails the build</a:t>
+              <a:t>Six leakage controls</a:t>
+            </a:r>
+            <a:r>
+              <a:rPr lang="en-US" sz="2800" b="1" dirty="0">
+                <a:solidFill>
+                  <a:srgbClr val="F2F2F5"/>
+                </a:solidFill>
+                <a:latin typeface="Arial"/>
+              </a:rPr>
+              <a:t>: </a:t>
+            </a:r>
+            <a:r>
+              <a:rPr sz="2800" b="1" dirty="0">
+                <a:solidFill>
+                  <a:srgbClr val="F2F2F5"/>
+                </a:solidFill>
+                <a:latin typeface="Arial"/>
+              </a:rPr>
+              <a:t>any failure fails the build</a:t>
             </a:r>
           </a:p>
         </p:txBody>
@@ -13046,9 +12205,9 @@
           <p:nvPr/>
         </p:nvSpPr>
         <p:spPr>
-          <a:xfrm>
-            <a:off x="548640" y="1298448"/>
-            <a:ext cx="1280160" cy="22860"/>
+          <a:xfrm flipV="1">
+            <a:off x="692572" y="576581"/>
+            <a:ext cx="1923627" cy="45719"/>
           </a:xfrm>
           <a:prstGeom prst="rect">
             <a:avLst/>
@@ -13080,6 +12239,7 @@
           <a:lstStyle/>
           <a:p>
             <a:pPr algn="ctr"/>
+            <a:endParaRPr/>
           </a:p>
         </p:txBody>
       </p:sp>
@@ -13180,14 +12340,32 @@
                 <a:tableStyleId>{5C22544A-7EE6-4342-B048-85BDC9FD1C3A}</a:tableStyleId>
               </a:tblPr>
               <a:tblGrid>
-                <a:gridCol w="2743200"/>
-                <a:gridCol w="7223760"/>
-                <a:gridCol w="1097280"/>
+                <a:gridCol w="2743200">
+                  <a:extLst>
+                    <a:ext uri="{9D8B030D-6E8A-4147-A177-3AD203B41FA5}">
+                      <a16:colId xmlns:a16="http://schemas.microsoft.com/office/drawing/2014/main" val="20000"/>
+                    </a:ext>
+                  </a:extLst>
+                </a:gridCol>
+                <a:gridCol w="7223760">
+                  <a:extLst>
+                    <a:ext uri="{9D8B030D-6E8A-4147-A177-3AD203B41FA5}">
+                      <a16:colId xmlns:a16="http://schemas.microsoft.com/office/drawing/2014/main" val="20001"/>
+                    </a:ext>
+                  </a:extLst>
+                </a:gridCol>
+                <a:gridCol w="1097280">
+                  <a:extLst>
+                    <a:ext uri="{9D8B030D-6E8A-4147-A177-3AD203B41FA5}">
+                      <a16:colId xmlns:a16="http://schemas.microsoft.com/office/drawing/2014/main" val="20002"/>
+                    </a:ext>
+                  </a:extLst>
+                </a:gridCol>
               </a:tblGrid>
               <a:tr h="450616">
                 <a:tc>
                   <a:txBody>
-                    <a:bodyPr wrap="square"/>
+                    <a:bodyPr/>
                     <a:lstStyle/>
                     <a:p>
                       <a:r>
@@ -13201,7 +12379,7 @@
                       </a:r>
                     </a:p>
                   </a:txBody>
-                  <a:tcPr marL="91440" marR="91440" marT="18288" marB="18288" anchor="ctr">
+                  <a:tcPr marT="18288" marB="18288" anchor="ctr">
                     <a:solidFill>
                       <a:srgbClr val="0B0B0F"/>
                     </a:solidFill>
@@ -13209,7 +12387,7 @@
                 </a:tc>
                 <a:tc>
                   <a:txBody>
-                    <a:bodyPr wrap="square"/>
+                    <a:bodyPr/>
                     <a:lstStyle/>
                     <a:p>
                       <a:r>
@@ -13223,7 +12401,7 @@
                       </a:r>
                     </a:p>
                   </a:txBody>
-                  <a:tcPr marL="91440" marR="91440" marT="18288" marB="18288" anchor="ctr">
+                  <a:tcPr marT="18288" marB="18288" anchor="ctr">
                     <a:solidFill>
                       <a:srgbClr val="0B0B0F"/>
                     </a:solidFill>
@@ -13231,21 +12409,28 @@
                 </a:tc>
                 <a:tc>
                   <a:txBody>
-                    <a:bodyPr wrap="square"/>
+                    <a:bodyPr/>
                     <a:lstStyle/>
-                    <a:p/>
+                    <a:p>
+                      <a:endParaRPr/>
+                    </a:p>
                   </a:txBody>
-                  <a:tcPr marL="91440" marR="91440" marT="18288" marB="18288" anchor="ctr">
+                  <a:tcPr marT="18288" marB="18288" anchor="ctr">
                     <a:solidFill>
                       <a:srgbClr val="0B0B0F"/>
                     </a:solidFill>
                   </a:tcPr>
                 </a:tc>
+                <a:extLst>
+                  <a:ext uri="{0D108BD9-81ED-4DB2-BD59-A6C34878D82A}">
+                    <a16:rowId xmlns:a16="http://schemas.microsoft.com/office/drawing/2014/main" val="10000"/>
+                  </a:ext>
+                </a:extLst>
               </a:tr>
               <a:tr h="450616">
                 <a:tc>
                   <a:txBody>
-                    <a:bodyPr wrap="square"/>
+                    <a:bodyPr/>
                     <a:lstStyle/>
                     <a:p>
                       <a:r>
@@ -13259,7 +12444,7 @@
                       </a:r>
                     </a:p>
                   </a:txBody>
-                  <a:tcPr marL="91440" marR="91440" marT="18288" marB="18288" anchor="ctr">
+                  <a:tcPr marT="18288" marB="18288" anchor="ctr">
                     <a:solidFill>
                       <a:srgbClr val="15161D"/>
                     </a:solidFill>
@@ -13267,7 +12452,7 @@
                 </a:tc>
                 <a:tc>
                   <a:txBody>
-                    <a:bodyPr wrap="square"/>
+                    <a:bodyPr/>
                     <a:lstStyle/>
                     <a:p>
                       <a:r>
@@ -13281,7 +12466,7 @@
                       </a:r>
                     </a:p>
                   </a:txBody>
-                  <a:tcPr marL="91440" marR="91440" marT="18288" marB="18288" anchor="ctr">
+                  <a:tcPr marT="18288" marB="18288" anchor="ctr">
                     <a:solidFill>
                       <a:srgbClr val="15161D"/>
                     </a:solidFill>
@@ -13289,7 +12474,7 @@
                 </a:tc>
                 <a:tc>
                   <a:txBody>
-                    <a:bodyPr wrap="square"/>
+                    <a:bodyPr/>
                     <a:lstStyle/>
                     <a:p>
                       <a:r>
@@ -13303,17 +12488,22 @@
                       </a:r>
                     </a:p>
                   </a:txBody>
-                  <a:tcPr marL="91440" marR="91440" marT="18288" marB="18288" anchor="ctr">
+                  <a:tcPr marT="18288" marB="18288" anchor="ctr">
                     <a:solidFill>
                       <a:srgbClr val="15161D"/>
                     </a:solidFill>
                   </a:tcPr>
                 </a:tc>
+                <a:extLst>
+                  <a:ext uri="{0D108BD9-81ED-4DB2-BD59-A6C34878D82A}">
+                    <a16:rowId xmlns:a16="http://schemas.microsoft.com/office/drawing/2014/main" val="10001"/>
+                  </a:ext>
+                </a:extLst>
               </a:tr>
               <a:tr h="450616">
                 <a:tc>
                   <a:txBody>
-                    <a:bodyPr wrap="square"/>
+                    <a:bodyPr/>
                     <a:lstStyle/>
                     <a:p>
                       <a:r>
@@ -13327,7 +12517,7 @@
                       </a:r>
                     </a:p>
                   </a:txBody>
-                  <a:tcPr marL="91440" marR="91440" marT="18288" marB="18288" anchor="ctr">
+                  <a:tcPr marT="18288" marB="18288" anchor="ctr">
                     <a:solidFill>
                       <a:srgbClr val="15161D"/>
                     </a:solidFill>
@@ -13335,11 +12525,11 @@
                 </a:tc>
                 <a:tc>
                   <a:txBody>
-                    <a:bodyPr wrap="square"/>
+                    <a:bodyPr/>
                     <a:lstStyle/>
                     <a:p>
                       <a:r>
-                        <a:rPr sz="1250" b="0">
+                        <a:rPr sz="1250" b="0" dirty="0">
                           <a:solidFill>
                             <a:srgbClr val="F2F2F5"/>
                           </a:solidFill>
@@ -13349,7 +12539,7 @@
                       </a:r>
                     </a:p>
                   </a:txBody>
-                  <a:tcPr marL="91440" marR="91440" marT="18288" marB="18288" anchor="ctr">
+                  <a:tcPr marT="18288" marB="18288" anchor="ctr">
                     <a:solidFill>
                       <a:srgbClr val="15161D"/>
                     </a:solidFill>
@@ -13357,7 +12547,7 @@
                 </a:tc>
                 <a:tc>
                   <a:txBody>
-                    <a:bodyPr wrap="square"/>
+                    <a:bodyPr/>
                     <a:lstStyle/>
                     <a:p>
                       <a:r>
@@ -13371,17 +12561,22 @@
                       </a:r>
                     </a:p>
                   </a:txBody>
-                  <a:tcPr marL="91440" marR="91440" marT="18288" marB="18288" anchor="ctr">
+                  <a:tcPr marT="18288" marB="18288" anchor="ctr">
                     <a:solidFill>
                       <a:srgbClr val="15161D"/>
                     </a:solidFill>
                   </a:tcPr>
                 </a:tc>
+                <a:extLst>
+                  <a:ext uri="{0D108BD9-81ED-4DB2-BD59-A6C34878D82A}">
+                    <a16:rowId xmlns:a16="http://schemas.microsoft.com/office/drawing/2014/main" val="10002"/>
+                  </a:ext>
+                </a:extLst>
               </a:tr>
               <a:tr h="450616">
                 <a:tc>
                   <a:txBody>
-                    <a:bodyPr wrap="square"/>
+                    <a:bodyPr/>
                     <a:lstStyle/>
                     <a:p>
                       <a:r>
@@ -13395,7 +12590,7 @@
                       </a:r>
                     </a:p>
                   </a:txBody>
-                  <a:tcPr marL="91440" marR="91440" marT="18288" marB="18288" anchor="ctr">
+                  <a:tcPr marT="18288" marB="18288" anchor="ctr">
                     <a:solidFill>
                       <a:srgbClr val="15161D"/>
                     </a:solidFill>
@@ -13403,7 +12598,7 @@
                 </a:tc>
                 <a:tc>
                   <a:txBody>
-                    <a:bodyPr wrap="square"/>
+                    <a:bodyPr/>
                     <a:lstStyle/>
                     <a:p>
                       <a:r>
@@ -13417,7 +12612,7 @@
                       </a:r>
                     </a:p>
                   </a:txBody>
-                  <a:tcPr marL="91440" marR="91440" marT="18288" marB="18288" anchor="ctr">
+                  <a:tcPr marT="18288" marB="18288" anchor="ctr">
                     <a:solidFill>
                       <a:srgbClr val="15161D"/>
                     </a:solidFill>
@@ -13425,7 +12620,7 @@
                 </a:tc>
                 <a:tc>
                   <a:txBody>
-                    <a:bodyPr wrap="square"/>
+                    <a:bodyPr/>
                     <a:lstStyle/>
                     <a:p>
                       <a:r>
@@ -13439,17 +12634,22 @@
                       </a:r>
                     </a:p>
                   </a:txBody>
-                  <a:tcPr marL="91440" marR="91440" marT="18288" marB="18288" anchor="ctr">
+                  <a:tcPr marT="18288" marB="18288" anchor="ctr">
                     <a:solidFill>
                       <a:srgbClr val="15161D"/>
                     </a:solidFill>
                   </a:tcPr>
                 </a:tc>
+                <a:extLst>
+                  <a:ext uri="{0D108BD9-81ED-4DB2-BD59-A6C34878D82A}">
+                    <a16:rowId xmlns:a16="http://schemas.microsoft.com/office/drawing/2014/main" val="10003"/>
+                  </a:ext>
+                </a:extLst>
               </a:tr>
               <a:tr h="450616">
                 <a:tc>
                   <a:txBody>
-                    <a:bodyPr wrap="square"/>
+                    <a:bodyPr/>
                     <a:lstStyle/>
                     <a:p>
                       <a:r>
@@ -13463,7 +12663,7 @@
                       </a:r>
                     </a:p>
                   </a:txBody>
-                  <a:tcPr marL="91440" marR="91440" marT="18288" marB="18288" anchor="ctr">
+                  <a:tcPr marT="18288" marB="18288" anchor="ctr">
                     <a:solidFill>
                       <a:srgbClr val="15161D"/>
                     </a:solidFill>
@@ -13471,7 +12671,7 @@
                 </a:tc>
                 <a:tc>
                   <a:txBody>
-                    <a:bodyPr wrap="square"/>
+                    <a:bodyPr/>
                     <a:lstStyle/>
                     <a:p>
                       <a:r>
@@ -13485,7 +12685,7 @@
                       </a:r>
                     </a:p>
                   </a:txBody>
-                  <a:tcPr marL="91440" marR="91440" marT="18288" marB="18288" anchor="ctr">
+                  <a:tcPr marT="18288" marB="18288" anchor="ctr">
                     <a:solidFill>
                       <a:srgbClr val="15161D"/>
                     </a:solidFill>
@@ -13493,7 +12693,7 @@
                 </a:tc>
                 <a:tc>
                   <a:txBody>
-                    <a:bodyPr wrap="square"/>
+                    <a:bodyPr/>
                     <a:lstStyle/>
                     <a:p>
                       <a:r>
@@ -13507,17 +12707,22 @@
                       </a:r>
                     </a:p>
                   </a:txBody>
-                  <a:tcPr marL="91440" marR="91440" marT="18288" marB="18288" anchor="ctr">
+                  <a:tcPr marT="18288" marB="18288" anchor="ctr">
                     <a:solidFill>
                       <a:srgbClr val="15161D"/>
                     </a:solidFill>
                   </a:tcPr>
                 </a:tc>
+                <a:extLst>
+                  <a:ext uri="{0D108BD9-81ED-4DB2-BD59-A6C34878D82A}">
+                    <a16:rowId xmlns:a16="http://schemas.microsoft.com/office/drawing/2014/main" val="10004"/>
+                  </a:ext>
+                </a:extLst>
               </a:tr>
               <a:tr h="450616">
                 <a:tc>
                   <a:txBody>
-                    <a:bodyPr wrap="square"/>
+                    <a:bodyPr/>
                     <a:lstStyle/>
                     <a:p>
                       <a:r>
@@ -13531,7 +12736,7 @@
                       </a:r>
                     </a:p>
                   </a:txBody>
-                  <a:tcPr marL="91440" marR="91440" marT="18288" marB="18288" anchor="ctr">
+                  <a:tcPr marT="18288" marB="18288" anchor="ctr">
                     <a:solidFill>
                       <a:srgbClr val="15161D"/>
                     </a:solidFill>
@@ -13539,7 +12744,7 @@
                 </a:tc>
                 <a:tc>
                   <a:txBody>
-                    <a:bodyPr wrap="square"/>
+                    <a:bodyPr/>
                     <a:lstStyle/>
                     <a:p>
                       <a:r>
@@ -13553,7 +12758,7 @@
                       </a:r>
                     </a:p>
                   </a:txBody>
-                  <a:tcPr marL="91440" marR="91440" marT="18288" marB="18288" anchor="ctr">
+                  <a:tcPr marT="18288" marB="18288" anchor="ctr">
                     <a:solidFill>
                       <a:srgbClr val="15161D"/>
                     </a:solidFill>
@@ -13561,7 +12766,7 @@
                 </a:tc>
                 <a:tc>
                   <a:txBody>
-                    <a:bodyPr wrap="square"/>
+                    <a:bodyPr/>
                     <a:lstStyle/>
                     <a:p>
                       <a:r>
@@ -13575,17 +12780,22 @@
                       </a:r>
                     </a:p>
                   </a:txBody>
-                  <a:tcPr marL="91440" marR="91440" marT="18288" marB="18288" anchor="ctr">
+                  <a:tcPr marT="18288" marB="18288" anchor="ctr">
                     <a:solidFill>
                       <a:srgbClr val="15161D"/>
                     </a:solidFill>
                   </a:tcPr>
                 </a:tc>
+                <a:extLst>
+                  <a:ext uri="{0D108BD9-81ED-4DB2-BD59-A6C34878D82A}">
+                    <a16:rowId xmlns:a16="http://schemas.microsoft.com/office/drawing/2014/main" val="10005"/>
+                  </a:ext>
+                </a:extLst>
               </a:tr>
               <a:tr h="450616">
                 <a:tc>
                   <a:txBody>
-                    <a:bodyPr wrap="square"/>
+                    <a:bodyPr/>
                     <a:lstStyle/>
                     <a:p>
                       <a:r>
@@ -13599,7 +12809,7 @@
                       </a:r>
                     </a:p>
                   </a:txBody>
-                  <a:tcPr marL="91440" marR="91440" marT="18288" marB="18288" anchor="ctr">
+                  <a:tcPr marT="18288" marB="18288" anchor="ctr">
                     <a:solidFill>
                       <a:srgbClr val="15161D"/>
                     </a:solidFill>
@@ -13607,7 +12817,7 @@
                 </a:tc>
                 <a:tc>
                   <a:txBody>
-                    <a:bodyPr wrap="square"/>
+                    <a:bodyPr/>
                     <a:lstStyle/>
                     <a:p>
                       <a:r>
@@ -13621,7 +12831,7 @@
                       </a:r>
                     </a:p>
                   </a:txBody>
-                  <a:tcPr marL="91440" marR="91440" marT="18288" marB="18288" anchor="ctr">
+                  <a:tcPr marT="18288" marB="18288" anchor="ctr">
                     <a:solidFill>
                       <a:srgbClr val="15161D"/>
                     </a:solidFill>
@@ -13629,11 +12839,11 @@
                 </a:tc>
                 <a:tc>
                   <a:txBody>
-                    <a:bodyPr wrap="square"/>
+                    <a:bodyPr/>
                     <a:lstStyle/>
                     <a:p>
                       <a:r>
-                        <a:rPr sz="1250" b="0">
+                        <a:rPr sz="1250" b="0" dirty="0">
                           <a:solidFill>
                             <a:srgbClr val="F2F2F5"/>
                           </a:solidFill>
@@ -13643,12 +12853,17 @@
                       </a:r>
                     </a:p>
                   </a:txBody>
-                  <a:tcPr marL="91440" marR="91440" marT="18288" marB="18288" anchor="ctr">
+                  <a:tcPr marT="18288" marB="18288" anchor="ctr">
                     <a:solidFill>
                       <a:srgbClr val="15161D"/>
                     </a:solidFill>
                   </a:tcPr>
                 </a:tc>
+                <a:extLst>
+                  <a:ext uri="{0D108BD9-81ED-4DB2-BD59-A6C34878D82A}">
+                    <a16:rowId xmlns:a16="http://schemas.microsoft.com/office/drawing/2014/main" val="10006"/>
+                  </a:ext>
+                </a:extLst>
               </a:tr>
             </a:tbl>
           </a:graphicData>
@@ -13662,7 +12877,7 @@
         </p:nvSpPr>
         <p:spPr>
           <a:xfrm>
-            <a:off x="548640" y="4526280"/>
+            <a:off x="548640" y="4932681"/>
             <a:ext cx="11064240" cy="1737360"/>
           </a:xfrm>
           <a:prstGeom prst="rect">
@@ -13682,13 +12897,31 @@
               </a:spcAft>
             </a:pPr>
             <a:r>
-              <a:rPr sz="1450" b="0">
+              <a:rPr sz="1450" b="0" dirty="0">
                 <a:solidFill>
                   <a:srgbClr val="F2F2F5"/>
                 </a:solidFill>
                 <a:latin typeface="Arial"/>
               </a:rPr>
-              <a:t>TIME-FORWARD SPLIT, no random splits anywhere — train 5,444,817 / stats 989,967 / test 2,672,910, with a 5.3-day purge and 5.2-day embargo. 791,973 boundary rows dropped.</a:t>
+              <a:t>TIME-FORWARD SPLIT, no random splits anywhere</a:t>
+            </a:r>
+            <a:r>
+              <a:rPr lang="en-US" sz="1450" b="0" dirty="0">
+                <a:solidFill>
+                  <a:srgbClr val="F2F2F5"/>
+                </a:solidFill>
+                <a:latin typeface="Arial"/>
+              </a:rPr>
+              <a:t>, </a:t>
+            </a:r>
+            <a:r>
+              <a:rPr sz="1450" b="0" dirty="0">
+                <a:solidFill>
+                  <a:srgbClr val="F2F2F5"/>
+                </a:solidFill>
+                <a:latin typeface="Arial"/>
+              </a:rPr>
+              <a:t> train 5,444,817 / stats 989,967 / test 2,672,910, with a 5.3-day purge and 5.2-day embargo. 791,973 boundary rows dropped.</a:t>
             </a:r>
           </a:p>
           <a:p>
@@ -13698,13 +12931,31 @@
               </a:spcAft>
             </a:pPr>
             <a:r>
-              <a:rPr sz="1450" b="0">
+              <a:rPr sz="1450" b="0" dirty="0">
                 <a:solidFill>
                   <a:srgbClr val="3DD68C"/>
                 </a:solidFill>
                 <a:latin typeface="Arial"/>
               </a:rPr>
-              <a:t>ENTITY-LEVEL SEALED HOLDOUT — 1,791,118 rows excluded from training: 12 sealed families PLUS a leave-one-morpheme-out arm (EVASION = low-visibility-rail).</a:t>
+              <a:t>ENTITY-LEVEL SEALED HOLDOUT</a:t>
+            </a:r>
+            <a:r>
+              <a:rPr lang="en-US" sz="1450" b="0" dirty="0">
+                <a:solidFill>
+                  <a:srgbClr val="3DD68C"/>
+                </a:solidFill>
+                <a:latin typeface="Arial"/>
+              </a:rPr>
+              <a:t>,</a:t>
+            </a:r>
+            <a:r>
+              <a:rPr sz="1450" b="0" dirty="0">
+                <a:solidFill>
+                  <a:srgbClr val="3DD68C"/>
+                </a:solidFill>
+                <a:latin typeface="Arial"/>
+              </a:rPr>
+              <a:t> 1,791,118 rows excluded from training: 12 sealed families PLUS a leave-one-morpheme-out arm (EVASION = low-visibility-rail).</a:t>
             </a:r>
           </a:p>
         </p:txBody>
@@ -13718,7 +12969,7 @@
 </file>
 
 <file path=ppt/slides/slide8.xml><?xml version="1.0" encoding="utf-8"?>
-<p:sld xmlns:a="http://schemas.openxmlformats.org/drawingml/2006/main" xmlns:p="http://schemas.openxmlformats.org/presentationml/2006/main" xmlns:r="http://schemas.openxmlformats.org/officeDocument/2006/relationships">
+<p:sld xmlns:a="http://schemas.openxmlformats.org/drawingml/2006/main" xmlns:r="http://schemas.openxmlformats.org/officeDocument/2006/relationships" xmlns:p="http://schemas.openxmlformats.org/presentationml/2006/main">
   <p:cSld>
     <p:spTree>
       <p:nvGrpSpPr>
@@ -13726,7 +12977,14 @@
         <p:cNvGrpSpPr/>
         <p:nvPr/>
       </p:nvGrpSpPr>
-      <p:grpSpPr/>
+      <p:grpSpPr>
+        <a:xfrm>
+          <a:off x="0" y="0"/>
+          <a:ext cx="0" cy="0"/>
+          <a:chOff x="0" y="0"/>
+          <a:chExt cx="0" cy="0"/>
+        </a:xfrm>
+      </p:grpSpPr>
       <p:sp>
         <p:nvSpPr>
           <p:cNvPr id="2" name="Rectangle 1"/>
@@ -13768,6 +13026,7 @@
           <a:lstStyle/>
           <a:p>
             <a:pPr algn="ctr"/>
+            <a:endParaRPr/>
           </a:p>
         </p:txBody>
       </p:sp>
@@ -13789,7 +13048,7 @@
         </p:spPr>
         <p:txBody>
           <a:bodyPr wrap="square" anchor="t">
-            <a:normAutofit/>
+            <a:noAutofit/>
           </a:bodyPr>
           <a:lstStyle/>
           <a:p>
@@ -13799,7 +13058,7 @@
               </a:spcAft>
             </a:pPr>
             <a:r>
-              <a:rPr sz="1150" b="1">
+              <a:rPr sz="1600" b="1" dirty="0">
                 <a:solidFill>
                   <a:srgbClr val="4A9EFF"/>
                 </a:solidFill>
@@ -13818,7 +13077,7 @@
         </p:nvSpPr>
         <p:spPr>
           <a:xfrm>
-            <a:off x="548640" y="603504"/>
+            <a:off x="548640" y="705104"/>
             <a:ext cx="11064240" cy="640080"/>
           </a:xfrm>
           <a:prstGeom prst="rect">
@@ -13838,7 +13097,7 @@
               </a:spcAft>
             </a:pPr>
             <a:r>
-              <a:rPr sz="2800" b="1">
+              <a:rPr sz="2800" b="1" dirty="0">
                 <a:solidFill>
                   <a:srgbClr val="F2F2F5"/>
                 </a:solidFill>
@@ -13857,8 +13116,8 @@
         </p:nvSpPr>
         <p:spPr>
           <a:xfrm>
-            <a:off x="548640" y="1298448"/>
-            <a:ext cx="1280160" cy="22860"/>
+            <a:off x="658706" y="592074"/>
+            <a:ext cx="3608493" cy="48006"/>
           </a:xfrm>
           <a:prstGeom prst="rect">
             <a:avLst/>
@@ -13890,6 +13149,7 @@
           <a:lstStyle/>
           <a:p>
             <a:pPr algn="ctr"/>
+            <a:endParaRPr/>
           </a:p>
         </p:txBody>
       </p:sp>
@@ -13901,7 +13161,7 @@
         </p:nvSpPr>
         <p:spPr>
           <a:xfrm>
-            <a:off x="548640" y="6419088"/>
+            <a:off x="548640" y="6512221"/>
             <a:ext cx="10241280" cy="292608"/>
           </a:xfrm>
           <a:prstGeom prst="rect">
@@ -13921,7 +13181,7 @@
               </a:spcAft>
             </a:pPr>
             <a:r>
-              <a:rPr sz="950" b="0">
+              <a:rPr sz="950" b="0" dirty="0">
                 <a:solidFill>
                   <a:srgbClr val="9A9AA8"/>
                 </a:solidFill>
@@ -13979,7 +13239,7 @@
         </p:nvSpPr>
         <p:spPr>
           <a:xfrm>
-            <a:off x="548640" y="1371600"/>
+            <a:off x="548640" y="1439334"/>
             <a:ext cx="11064240" cy="274320"/>
           </a:xfrm>
           <a:prstGeom prst="rect">
@@ -13989,7 +13249,7 @@
         </p:spPr>
         <p:txBody>
           <a:bodyPr wrap="square" anchor="t">
-            <a:normAutofit/>
+            <a:normAutofit lnSpcReduction="10000"/>
           </a:bodyPr>
           <a:lstStyle/>
           <a:p>
@@ -13999,7 +13259,7 @@
               </a:spcAft>
             </a:pPr>
             <a:r>
-              <a:rPr sz="1250" b="0">
+              <a:rPr sz="1250" b="0" dirty="0">
                 <a:solidFill>
                   <a:srgbClr val="9A9AA8"/>
                 </a:solidFill>
@@ -14019,7 +13279,7 @@
           <p:nvPr/>
         </p:nvPicPr>
         <p:blipFill>
-          <a:blip r:embed="rId2"/>
+          <a:blip r:embed="rId3"/>
           <a:stretch>
             <a:fillRect/>
           </a:stretch>
@@ -14053,14 +13313,32 @@
                 <a:tableStyleId>{5C22544A-7EE6-4342-B048-85BDC9FD1C3A}</a:tableStyleId>
               </a:tblPr>
               <a:tblGrid>
-                <a:gridCol w="3108960"/>
-                <a:gridCol w="4023360"/>
-                <a:gridCol w="3931920"/>
+                <a:gridCol w="3108960">
+                  <a:extLst>
+                    <a:ext uri="{9D8B030D-6E8A-4147-A177-3AD203B41FA5}">
+                      <a16:colId xmlns:a16="http://schemas.microsoft.com/office/drawing/2014/main" val="20000"/>
+                    </a:ext>
+                  </a:extLst>
+                </a:gridCol>
+                <a:gridCol w="4023360">
+                  <a:extLst>
+                    <a:ext uri="{9D8B030D-6E8A-4147-A177-3AD203B41FA5}">
+                      <a16:colId xmlns:a16="http://schemas.microsoft.com/office/drawing/2014/main" val="20001"/>
+                    </a:ext>
+                  </a:extLst>
+                </a:gridCol>
+                <a:gridCol w="3931920">
+                  <a:extLst>
+                    <a:ext uri="{9D8B030D-6E8A-4147-A177-3AD203B41FA5}">
+                      <a16:colId xmlns:a16="http://schemas.microsoft.com/office/drawing/2014/main" val="20002"/>
+                    </a:ext>
+                  </a:extLst>
+                </a:gridCol>
               </a:tblGrid>
               <a:tr h="430133">
                 <a:tc>
                   <a:txBody>
-                    <a:bodyPr wrap="square"/>
+                    <a:bodyPr/>
                     <a:lstStyle/>
                     <a:p>
                       <a:r>
@@ -14074,7 +13352,7 @@
                       </a:r>
                     </a:p>
                   </a:txBody>
-                  <a:tcPr marL="91440" marR="91440" marT="18288" marB="18288" anchor="ctr">
+                  <a:tcPr marT="18288" marB="18288" anchor="ctr">
                     <a:solidFill>
                       <a:srgbClr val="0B0B0F"/>
                     </a:solidFill>
@@ -14082,7 +13360,7 @@
                 </a:tc>
                 <a:tc>
                   <a:txBody>
-                    <a:bodyPr wrap="square"/>
+                    <a:bodyPr/>
                     <a:lstStyle/>
                     <a:p>
                       <a:r>
@@ -14096,7 +13374,7 @@
                       </a:r>
                     </a:p>
                   </a:txBody>
-                  <a:tcPr marL="91440" marR="91440" marT="18288" marB="18288" anchor="ctr">
+                  <a:tcPr marT="18288" marB="18288" anchor="ctr">
                     <a:solidFill>
                       <a:srgbClr val="0B0B0F"/>
                     </a:solidFill>
@@ -14104,7 +13382,7 @@
                 </a:tc>
                 <a:tc>
                   <a:txBody>
-                    <a:bodyPr wrap="square"/>
+                    <a:bodyPr/>
                     <a:lstStyle/>
                     <a:p>
                       <a:r>
@@ -14118,17 +13396,22 @@
                       </a:r>
                     </a:p>
                   </a:txBody>
-                  <a:tcPr marL="91440" marR="91440" marT="18288" marB="18288" anchor="ctr">
+                  <a:tcPr marT="18288" marB="18288" anchor="ctr">
                     <a:solidFill>
                       <a:srgbClr val="0B0B0F"/>
                     </a:solidFill>
                   </a:tcPr>
                 </a:tc>
+                <a:extLst>
+                  <a:ext uri="{0D108BD9-81ED-4DB2-BD59-A6C34878D82A}">
+                    <a16:rowId xmlns:a16="http://schemas.microsoft.com/office/drawing/2014/main" val="10000"/>
+                  </a:ext>
+                </a:extLst>
               </a:tr>
               <a:tr h="430133">
                 <a:tc>
                   <a:txBody>
-                    <a:bodyPr wrap="square"/>
+                    <a:bodyPr/>
                     <a:lstStyle/>
                     <a:p>
                       <a:r>
@@ -14142,7 +13425,7 @@
                       </a:r>
                     </a:p>
                   </a:txBody>
-                  <a:tcPr marL="91440" marR="91440" marT="18288" marB="18288" anchor="ctr">
+                  <a:tcPr marT="18288" marB="18288" anchor="ctr">
                     <a:solidFill>
                       <a:srgbClr val="15161D"/>
                     </a:solidFill>
@@ -14150,7 +13433,7 @@
                 </a:tc>
                 <a:tc>
                   <a:txBody>
-                    <a:bodyPr wrap="square"/>
+                    <a:bodyPr/>
                     <a:lstStyle/>
                     <a:p>
                       <a:r>
@@ -14164,7 +13447,7 @@
                       </a:r>
                     </a:p>
                   </a:txBody>
-                  <a:tcPr marL="91440" marR="91440" marT="18288" marB="18288" anchor="ctr">
+                  <a:tcPr marT="18288" marB="18288" anchor="ctr">
                     <a:solidFill>
                       <a:srgbClr val="15161D"/>
                     </a:solidFill>
@@ -14172,7 +13455,7 @@
                 </a:tc>
                 <a:tc>
                   <a:txBody>
-                    <a:bodyPr wrap="square"/>
+                    <a:bodyPr/>
                     <a:lstStyle/>
                     <a:p>
                       <a:r>
@@ -14186,17 +13469,22 @@
                       </a:r>
                     </a:p>
                   </a:txBody>
-                  <a:tcPr marL="91440" marR="91440" marT="18288" marB="18288" anchor="ctr">
+                  <a:tcPr marT="18288" marB="18288" anchor="ctr">
                     <a:solidFill>
                       <a:srgbClr val="15161D"/>
                     </a:solidFill>
                   </a:tcPr>
                 </a:tc>
+                <a:extLst>
+                  <a:ext uri="{0D108BD9-81ED-4DB2-BD59-A6C34878D82A}">
+                    <a16:rowId xmlns:a16="http://schemas.microsoft.com/office/drawing/2014/main" val="10001"/>
+                  </a:ext>
+                </a:extLst>
               </a:tr>
               <a:tr h="430133">
                 <a:tc>
                   <a:txBody>
-                    <a:bodyPr wrap="square"/>
+                    <a:bodyPr/>
                     <a:lstStyle/>
                     <a:p>
                       <a:r>
@@ -14210,7 +13498,7 @@
                       </a:r>
                     </a:p>
                   </a:txBody>
-                  <a:tcPr marL="91440" marR="91440" marT="18288" marB="18288" anchor="ctr">
+                  <a:tcPr marT="18288" marB="18288" anchor="ctr">
                     <a:solidFill>
                       <a:srgbClr val="15161D"/>
                     </a:solidFill>
@@ -14218,7 +13506,7 @@
                 </a:tc>
                 <a:tc>
                   <a:txBody>
-                    <a:bodyPr wrap="square"/>
+                    <a:bodyPr/>
                     <a:lstStyle/>
                     <a:p>
                       <a:r>
@@ -14232,7 +13520,7 @@
                       </a:r>
                     </a:p>
                   </a:txBody>
-                  <a:tcPr marL="91440" marR="91440" marT="18288" marB="18288" anchor="ctr">
+                  <a:tcPr marT="18288" marB="18288" anchor="ctr">
                     <a:solidFill>
                       <a:srgbClr val="15161D"/>
                     </a:solidFill>
@@ -14240,7 +13528,7 @@
                 </a:tc>
                 <a:tc>
                   <a:txBody>
-                    <a:bodyPr wrap="square"/>
+                    <a:bodyPr/>
                     <a:lstStyle/>
                     <a:p>
                       <a:r>
@@ -14254,17 +13542,22 @@
                       </a:r>
                     </a:p>
                   </a:txBody>
-                  <a:tcPr marL="91440" marR="91440" marT="18288" marB="18288" anchor="ctr">
+                  <a:tcPr marT="18288" marB="18288" anchor="ctr">
                     <a:solidFill>
                       <a:srgbClr val="15161D"/>
                     </a:solidFill>
                   </a:tcPr>
                 </a:tc>
+                <a:extLst>
+                  <a:ext uri="{0D108BD9-81ED-4DB2-BD59-A6C34878D82A}">
+                    <a16:rowId xmlns:a16="http://schemas.microsoft.com/office/drawing/2014/main" val="10002"/>
+                  </a:ext>
+                </a:extLst>
               </a:tr>
               <a:tr h="430133">
                 <a:tc>
                   <a:txBody>
-                    <a:bodyPr wrap="square"/>
+                    <a:bodyPr/>
                     <a:lstStyle/>
                     <a:p>
                       <a:r>
@@ -14278,7 +13571,7 @@
                       </a:r>
                     </a:p>
                   </a:txBody>
-                  <a:tcPr marL="91440" marR="91440" marT="18288" marB="18288" anchor="ctr">
+                  <a:tcPr marT="18288" marB="18288" anchor="ctr">
                     <a:solidFill>
                       <a:srgbClr val="15161D"/>
                     </a:solidFill>
@@ -14286,7 +13579,7 @@
                 </a:tc>
                 <a:tc>
                   <a:txBody>
-                    <a:bodyPr wrap="square"/>
+                    <a:bodyPr/>
                     <a:lstStyle/>
                     <a:p>
                       <a:r>
@@ -14300,7 +13593,7 @@
                       </a:r>
                     </a:p>
                   </a:txBody>
-                  <a:tcPr marL="91440" marR="91440" marT="18288" marB="18288" anchor="ctr">
+                  <a:tcPr marT="18288" marB="18288" anchor="ctr">
                     <a:solidFill>
                       <a:srgbClr val="15161D"/>
                     </a:solidFill>
@@ -14308,7 +13601,7 @@
                 </a:tc>
                 <a:tc>
                   <a:txBody>
-                    <a:bodyPr wrap="square"/>
+                    <a:bodyPr/>
                     <a:lstStyle/>
                     <a:p>
                       <a:r>
@@ -14322,12 +13615,17 @@
                       </a:r>
                     </a:p>
                   </a:txBody>
-                  <a:tcPr marL="91440" marR="91440" marT="18288" marB="18288" anchor="ctr">
+                  <a:tcPr marT="18288" marB="18288" anchor="ctr">
                     <a:solidFill>
                       <a:srgbClr val="15161D"/>
                     </a:solidFill>
                   </a:tcPr>
                 </a:tc>
+                <a:extLst>
+                  <a:ext uri="{0D108BD9-81ED-4DB2-BD59-A6C34878D82A}">
+                    <a16:rowId xmlns:a16="http://schemas.microsoft.com/office/drawing/2014/main" val="10003"/>
+                  </a:ext>
+                </a:extLst>
               </a:tr>
             </a:tbl>
           </a:graphicData>
@@ -14341,7 +13639,7 @@
         </p:nvSpPr>
         <p:spPr>
           <a:xfrm>
-            <a:off x="548640" y="5623560"/>
+            <a:off x="548640" y="5820325"/>
             <a:ext cx="11064240" cy="731520"/>
           </a:xfrm>
           <a:prstGeom prst="rect">
@@ -14361,13 +13659,31 @@
               </a:spcAft>
             </a:pPr>
             <a:r>
-              <a:rPr sz="1400" b="0">
+              <a:rPr sz="1400" b="0" dirty="0">
                 <a:solidFill>
                   <a:srgbClr val="3DD68C"/>
                 </a:solidFill>
                 <a:latin typeface="Arial"/>
               </a:rPr>
-              <a:t>k = 641 is not a round number: it is analysts × cases × shifts from config/ops.yaml, scaled to this population. At that staffed budget, 638 of 641 alerts are real attacks.</a:t>
+              <a:t>k = 641 is not a round number: it is analysts × cases × shifts from config/</a:t>
+            </a:r>
+            <a:r>
+              <a:rPr sz="1400" b="0" dirty="0" err="1">
+                <a:solidFill>
+                  <a:srgbClr val="3DD68C"/>
+                </a:solidFill>
+                <a:latin typeface="Arial"/>
+              </a:rPr>
+              <a:t>ops.yaml</a:t>
+            </a:r>
+            <a:r>
+              <a:rPr sz="1400" b="0" dirty="0">
+                <a:solidFill>
+                  <a:srgbClr val="3DD68C"/>
+                </a:solidFill>
+                <a:latin typeface="Arial"/>
+              </a:rPr>
+              <a:t>, scaled to this population. At that staffed budget, 638 of 641 alerts are real attacks.</a:t>
             </a:r>
           </a:p>
         </p:txBody>
@@ -14381,7 +13697,7 @@
 </file>
 
 <file path=ppt/slides/slide9.xml><?xml version="1.0" encoding="utf-8"?>
-<p:sld xmlns:a="http://schemas.openxmlformats.org/drawingml/2006/main" xmlns:p="http://schemas.openxmlformats.org/presentationml/2006/main" xmlns:r="http://schemas.openxmlformats.org/officeDocument/2006/relationships">
+<p:sld xmlns:a="http://schemas.openxmlformats.org/drawingml/2006/main" xmlns:r="http://schemas.openxmlformats.org/officeDocument/2006/relationships" xmlns:p="http://schemas.openxmlformats.org/presentationml/2006/main">
   <p:cSld>
     <p:spTree>
       <p:nvGrpSpPr>
@@ -14389,7 +13705,14 @@
         <p:cNvGrpSpPr/>
         <p:nvPr/>
       </p:nvGrpSpPr>
-      <p:grpSpPr/>
+      <p:grpSpPr>
+        <a:xfrm>
+          <a:off x="0" y="0"/>
+          <a:ext cx="0" cy="0"/>
+          <a:chOff x="0" y="0"/>
+          <a:chExt cx="0" cy="0"/>
+        </a:xfrm>
+      </p:grpSpPr>
       <p:sp>
         <p:nvSpPr>
           <p:cNvPr id="2" name="Rectangle 1"/>
@@ -14431,6 +13754,7 @@
           <a:lstStyle/>
           <a:p>
             <a:pPr algn="ctr"/>
+            <a:endParaRPr/>
           </a:p>
         </p:txBody>
       </p:sp>
@@ -14452,7 +13776,7 @@
         </p:spPr>
         <p:txBody>
           <a:bodyPr wrap="square" anchor="t">
-            <a:normAutofit/>
+            <a:noAutofit/>
           </a:bodyPr>
           <a:lstStyle/>
           <a:p>
@@ -14462,7 +13786,7 @@
               </a:spcAft>
             </a:pPr>
             <a:r>
-              <a:rPr sz="1150" b="1">
+              <a:rPr sz="1600" b="1" dirty="0">
                 <a:solidFill>
                   <a:srgbClr val="4A9EFF"/>
                 </a:solidFill>
@@ -14481,7 +13805,7 @@
         </p:nvSpPr>
         <p:spPr>
           <a:xfrm>
-            <a:off x="548640" y="603504"/>
+            <a:off x="548640" y="688171"/>
             <a:ext cx="11064240" cy="640080"/>
           </a:xfrm>
           <a:prstGeom prst="rect">
@@ -14501,7 +13825,7 @@
               </a:spcAft>
             </a:pPr>
             <a:r>
-              <a:rPr sz="2800" b="1">
+              <a:rPr sz="2800" b="1" dirty="0">
                 <a:solidFill>
                   <a:srgbClr val="F2F2F5"/>
                 </a:solidFill>
@@ -14520,8 +13844,8 @@
         </p:nvSpPr>
         <p:spPr>
           <a:xfrm>
-            <a:off x="548640" y="1298448"/>
-            <a:ext cx="1280160" cy="22860"/>
+            <a:off x="667172" y="599064"/>
+            <a:ext cx="2253827" cy="45719"/>
           </a:xfrm>
           <a:prstGeom prst="rect">
             <a:avLst/>
@@ -14553,6 +13877,7 @@
           <a:lstStyle/>
           <a:p>
             <a:pPr algn="ctr"/>
+            <a:endParaRPr/>
           </a:p>
         </p:txBody>
       </p:sp>
@@ -14642,7 +13967,7 @@
         </p:nvSpPr>
         <p:spPr>
           <a:xfrm>
-            <a:off x="548640" y="1371600"/>
+            <a:off x="548640" y="1430868"/>
             <a:ext cx="11064240" cy="274320"/>
           </a:xfrm>
           <a:prstGeom prst="rect">
@@ -14652,7 +13977,7 @@
         </p:spPr>
         <p:txBody>
           <a:bodyPr wrap="square" anchor="t">
-            <a:normAutofit/>
+            <a:normAutofit lnSpcReduction="10000"/>
           </a:bodyPr>
           <a:lstStyle/>
           <a:p>
@@ -14662,13 +13987,31 @@
               </a:spcAft>
             </a:pPr>
             <a:r>
-              <a:rPr sz="1300" b="0">
+              <a:rPr sz="1300" b="0" dirty="0">
                 <a:solidFill>
                   <a:srgbClr val="4A9EFF"/>
                 </a:solidFill>
                 <a:latin typeface="Arial"/>
               </a:rPr>
-              <a:t>This is the question the challenge actually asks. It is the only number that answers it.</a:t>
+              <a:t>This is the question the challenge </a:t>
+            </a:r>
+            <a:r>
+              <a:rPr lang="en-US" sz="1300" b="0" dirty="0">
+                <a:solidFill>
+                  <a:srgbClr val="4A9EFF"/>
+                </a:solidFill>
+                <a:latin typeface="Arial"/>
+              </a:rPr>
+              <a:t>asks</a:t>
+            </a:r>
+            <a:r>
+              <a:rPr sz="1300" b="0" dirty="0">
+                <a:solidFill>
+                  <a:srgbClr val="4A9EFF"/>
+                </a:solidFill>
+                <a:latin typeface="Arial"/>
+              </a:rPr>
+              <a:t>. It is the only number that answers it.</a:t>
             </a:r>
           </a:p>
         </p:txBody>
@@ -14682,14 +14025,14 @@
           <p:nvPr/>
         </p:nvPicPr>
         <p:blipFill>
-          <a:blip r:embed="rId2"/>
+          <a:blip r:embed="rId3"/>
           <a:stretch>
             <a:fillRect/>
           </a:stretch>
         </p:blipFill>
         <p:spPr>
           <a:xfrm>
-            <a:off x="457200" y="1828666"/>
+            <a:off x="457200" y="1913333"/>
             <a:ext cx="5943600" cy="3840747"/>
           </a:xfrm>
           <a:prstGeom prst="rect">
@@ -14705,7 +14048,7 @@
         </p:nvSpPr>
         <p:spPr>
           <a:xfrm>
-            <a:off x="6675120" y="1874519"/>
+            <a:off x="6675120" y="2026919"/>
             <a:ext cx="5029200" cy="4023360"/>
           </a:xfrm>
           <a:prstGeom prst="rect">
@@ -14725,7 +14068,7 @@
               </a:spcAft>
             </a:pPr>
             <a:r>
-              <a:rPr sz="1450" b="0">
+              <a:rPr sz="1450" b="0" dirty="0">
                 <a:solidFill>
                   <a:srgbClr val="4A9EFF"/>
                 </a:solidFill>
@@ -14741,7 +14084,7 @@
               </a:spcAft>
             </a:pPr>
             <a:r>
-              <a:rPr sz="1450" b="0">
+              <a:rPr sz="1450" b="0" dirty="0">
                 <a:solidFill>
                   <a:srgbClr val="3DD68C"/>
                 </a:solidFill>
@@ -14757,7 +14100,7 @@
               </a:spcAft>
             </a:pPr>
             <a:r>
-              <a:rPr sz="1450" b="0">
+              <a:rPr sz="1450" b="0" dirty="0">
                 <a:solidFill>
                   <a:srgbClr val="F2F2F5"/>
                 </a:solidFill>
@@ -14773,13 +14116,31 @@
               </a:spcAft>
             </a:pPr>
             <a:r>
-              <a:rPr sz="1450" b="0">
+              <a:rPr sz="1450" b="0" dirty="0">
                 <a:solidFill>
                   <a:srgbClr val="F5B14C"/>
                 </a:solidFill>
                 <a:latin typeface="Arial"/>
               </a:rPr>
-              <a:t>The gap is the honest cost of generalisation. No gap would suggest the holdout was not actually held out.</a:t>
+              <a:t>The gap is the honest cost of </a:t>
+            </a:r>
+            <a:r>
+              <a:rPr sz="1450" b="0" dirty="0" err="1">
+                <a:solidFill>
+                  <a:srgbClr val="F5B14C"/>
+                </a:solidFill>
+                <a:latin typeface="Arial"/>
+              </a:rPr>
+              <a:t>generalisation</a:t>
+            </a:r>
+            <a:r>
+              <a:rPr sz="1450" b="0" dirty="0">
+                <a:solidFill>
+                  <a:srgbClr val="F5B14C"/>
+                </a:solidFill>
+                <a:latin typeface="Arial"/>
+              </a:rPr>
+              <a:t>. No gap would suggest the holdout was not actually held out.</a:t>
             </a:r>
           </a:p>
         </p:txBody>
@@ -15123,44 +14484,44 @@
         <a:sysClr val="window" lastClr="FFFFFF"/>
       </a:lt1>
       <a:dk2>
-        <a:srgbClr val="1F497D"/>
+        <a:srgbClr val="0E2841"/>
       </a:dk2>
       <a:lt2>
-        <a:srgbClr val="EEECE1"/>
+        <a:srgbClr val="E8E8E8"/>
       </a:lt2>
       <a:accent1>
-        <a:srgbClr val="4F81BD"/>
+        <a:srgbClr val="156082"/>
       </a:accent1>
       <a:accent2>
-        <a:srgbClr val="C0504D"/>
+        <a:srgbClr val="E97132"/>
       </a:accent2>
       <a:accent3>
-        <a:srgbClr val="9BBB59"/>
+        <a:srgbClr val="196B24"/>
       </a:accent3>
       <a:accent4>
-        <a:srgbClr val="8064A2"/>
+        <a:srgbClr val="0F9ED5"/>
       </a:accent4>
       <a:accent5>
-        <a:srgbClr val="4BACC6"/>
+        <a:srgbClr val="A02B93"/>
       </a:accent5>
       <a:accent6>
-        <a:srgbClr val="F79646"/>
+        <a:srgbClr val="4EA72E"/>
       </a:accent6>
       <a:hlink>
-        <a:srgbClr val="0000FF"/>
+        <a:srgbClr val="467886"/>
       </a:hlink>
       <a:folHlink>
-        <a:srgbClr val="800080"/>
+        <a:srgbClr val="96607D"/>
       </a:folHlink>
     </a:clrScheme>
     <a:fontScheme name="Office">
       <a:majorFont>
-        <a:latin typeface="Calibri"/>
+        <a:latin typeface="Aptos Display" panose="02110004020202020204"/>
         <a:ea typeface=""/>
         <a:cs typeface=""/>
-        <a:font script="Jpan" typeface="ＭＳ Ｐゴシック"/>
+        <a:font script="Jpan" typeface="游ゴシック Light"/>
         <a:font script="Hang" typeface="맑은 고딕"/>
-        <a:font script="Hans" typeface="宋体"/>
+        <a:font script="Hans" typeface="等线 Light"/>
         <a:font script="Hant" typeface="新細明體"/>
         <a:font script="Arab" typeface="Times New Roman"/>
         <a:font script="Hebr" typeface="Times New Roman"/>
@@ -15188,14 +14549,31 @@
         <a:font script="Viet" typeface="Times New Roman"/>
         <a:font script="Uigh" typeface="Microsoft Uighur"/>
         <a:font script="Geor" typeface="Sylfaen"/>
+        <a:font script="Armn" typeface="Arial"/>
+        <a:font script="Bugi" typeface="Leelawadee UI"/>
+        <a:font script="Bopo" typeface="Microsoft JhengHei"/>
+        <a:font script="Java" typeface="Javanese Text"/>
+        <a:font script="Lisu" typeface="Segoe UI"/>
+        <a:font script="Mymr" typeface="Myanmar Text"/>
+        <a:font script="Nkoo" typeface="Ebrima"/>
+        <a:font script="Olck" typeface="Nirmala UI"/>
+        <a:font script="Osma" typeface="Ebrima"/>
+        <a:font script="Phag" typeface="Phagspa"/>
+        <a:font script="Syrn" typeface="Estrangelo Edessa"/>
+        <a:font script="Syrj" typeface="Estrangelo Edessa"/>
+        <a:font script="Syre" typeface="Estrangelo Edessa"/>
+        <a:font script="Sora" typeface="Nirmala UI"/>
+        <a:font script="Tale" typeface="Microsoft Tai Le"/>
+        <a:font script="Talu" typeface="Microsoft New Tai Lue"/>
+        <a:font script="Tfng" typeface="Ebrima"/>
       </a:majorFont>
       <a:minorFont>
-        <a:latin typeface="Calibri"/>
+        <a:latin typeface="Aptos" panose="02110004020202020204"/>
         <a:ea typeface=""/>
         <a:cs typeface=""/>
-        <a:font script="Jpan" typeface="ＭＳ Ｐゴシック"/>
+        <a:font script="Jpan" typeface="游ゴシック"/>
         <a:font script="Hang" typeface="맑은 고딕"/>
-        <a:font script="Hans" typeface="宋体"/>
+        <a:font script="Hans" typeface="等线"/>
         <a:font script="Hant" typeface="新細明體"/>
         <a:font script="Arab" typeface="Arial"/>
         <a:font script="Hebr" typeface="Arial"/>
@@ -15223,6 +14601,23 @@
         <a:font script="Viet" typeface="Arial"/>
         <a:font script="Uigh" typeface="Microsoft Uighur"/>
         <a:font script="Geor" typeface="Sylfaen"/>
+        <a:font script="Armn" typeface="Arial"/>
+        <a:font script="Bugi" typeface="Leelawadee UI"/>
+        <a:font script="Bopo" typeface="Microsoft JhengHei"/>
+        <a:font script="Java" typeface="Javanese Text"/>
+        <a:font script="Lisu" typeface="Segoe UI"/>
+        <a:font script="Mymr" typeface="Myanmar Text"/>
+        <a:font script="Nkoo" typeface="Ebrima"/>
+        <a:font script="Olck" typeface="Nirmala UI"/>
+        <a:font script="Osma" typeface="Ebrima"/>
+        <a:font script="Phag" typeface="Phagspa"/>
+        <a:font script="Syrn" typeface="Estrangelo Edessa"/>
+        <a:font script="Syrj" typeface="Estrangelo Edessa"/>
+        <a:font script="Syre" typeface="Estrangelo Edessa"/>
+        <a:font script="Sora" typeface="Nirmala UI"/>
+        <a:font script="Tale" typeface="Microsoft Tai Le"/>
+        <a:font script="Talu" typeface="Microsoft New Tai Lue"/>
+        <a:font script="Tfng" typeface="Ebrima"/>
       </a:minorFont>
     </a:fontScheme>
     <a:fmtScheme name="Office">
@@ -15234,180 +14629,136 @@
           <a:gsLst>
             <a:gs pos="0">
               <a:schemeClr val="phClr">
-                <a:tint val="50000"/>
-                <a:satMod val="300000"/>
+                <a:lumMod val="110000"/>
+                <a:satMod val="105000"/>
+                <a:tint val="67000"/>
               </a:schemeClr>
             </a:gs>
-            <a:gs pos="35000">
+            <a:gs pos="50000">
               <a:schemeClr val="phClr">
-                <a:tint val="37000"/>
-                <a:satMod val="300000"/>
+                <a:lumMod val="105000"/>
+                <a:satMod val="103000"/>
+                <a:tint val="73000"/>
               </a:schemeClr>
             </a:gs>
             <a:gs pos="100000">
               <a:schemeClr val="phClr">
-                <a:tint val="15000"/>
-                <a:satMod val="350000"/>
+                <a:lumMod val="105000"/>
+                <a:satMod val="109000"/>
+                <a:tint val="81000"/>
               </a:schemeClr>
             </a:gs>
           </a:gsLst>
-          <a:lin ang="16200000" scaled="1"/>
+          <a:lin ang="5400000" scaled="0"/>
         </a:gradFill>
         <a:gradFill rotWithShape="1">
           <a:gsLst>
             <a:gs pos="0">
               <a:schemeClr val="phClr">
-                <a:tint val="100000"/>
+                <a:satMod val="103000"/>
+                <a:lumMod val="102000"/>
+                <a:tint val="94000"/>
+              </a:schemeClr>
+            </a:gs>
+            <a:gs pos="50000">
+              <a:schemeClr val="phClr">
+                <a:satMod val="110000"/>
+                <a:lumMod val="100000"/>
                 <a:shade val="100000"/>
-                <a:satMod val="130000"/>
               </a:schemeClr>
             </a:gs>
             <a:gs pos="100000">
               <a:schemeClr val="phClr">
-                <a:tint val="50000"/>
-                <a:shade val="100000"/>
-                <a:satMod val="350000"/>
+                <a:lumMod val="99000"/>
+                <a:satMod val="120000"/>
+                <a:shade val="78000"/>
               </a:schemeClr>
             </a:gs>
           </a:gsLst>
-          <a:lin ang="16200000" scaled="0"/>
+          <a:lin ang="5400000" scaled="0"/>
         </a:gradFill>
       </a:fillStyleLst>
       <a:lnStyleLst>
-        <a:ln w="9525" cap="flat" cmpd="sng" algn="ctr">
+        <a:ln w="12700" cap="flat" cmpd="sng" algn="ctr">
           <a:solidFill>
-            <a:schemeClr val="phClr">
-              <a:shade val="95000"/>
-              <a:satMod val="105000"/>
-            </a:schemeClr>
+            <a:schemeClr val="phClr"/>
           </a:solidFill>
           <a:prstDash val="solid"/>
+          <a:miter lim="800000"/>
+        </a:ln>
+        <a:ln w="19050" cap="flat" cmpd="sng" algn="ctr">
+          <a:solidFill>
+            <a:schemeClr val="phClr"/>
+          </a:solidFill>
+          <a:prstDash val="solid"/>
+          <a:miter lim="800000"/>
         </a:ln>
         <a:ln w="25400" cap="flat" cmpd="sng" algn="ctr">
           <a:solidFill>
             <a:schemeClr val="phClr"/>
           </a:solidFill>
           <a:prstDash val="solid"/>
-        </a:ln>
-        <a:ln w="38100" cap="flat" cmpd="sng" algn="ctr">
-          <a:solidFill>
-            <a:schemeClr val="phClr"/>
-          </a:solidFill>
-          <a:prstDash val="solid"/>
+          <a:miter lim="800000"/>
         </a:ln>
       </a:lnStyleLst>
       <a:effectStyleLst>
         <a:effectStyle>
+          <a:effectLst/>
+        </a:effectStyle>
+        <a:effectStyle>
+          <a:effectLst/>
+        </a:effectStyle>
+        <a:effectStyle>
           <a:effectLst>
-            <a:outerShdw blurRad="40000" dist="20000" dir="5400000" rotWithShape="0">
+            <a:outerShdw blurRad="57150" dist="19050" dir="5400000" algn="ctr" rotWithShape="0">
               <a:srgbClr val="000000">
-                <a:alpha val="38000"/>
+                <a:alpha val="63000"/>
               </a:srgbClr>
             </a:outerShdw>
           </a:effectLst>
-        </a:effectStyle>
-        <a:effectStyle>
-          <a:effectLst>
-            <a:outerShdw blurRad="40000" dist="23000" dir="5400000" rotWithShape="0">
-              <a:srgbClr val="000000">
-                <a:alpha val="35000"/>
-              </a:srgbClr>
-            </a:outerShdw>
-          </a:effectLst>
-        </a:effectStyle>
-        <a:effectStyle>
-          <a:effectLst>
-            <a:outerShdw blurRad="40000" dist="23000" dir="5400000" rotWithShape="0">
-              <a:srgbClr val="000000">
-                <a:alpha val="35000"/>
-              </a:srgbClr>
-            </a:outerShdw>
-          </a:effectLst>
-          <a:scene3d>
-            <a:camera prst="orthographicFront">
-              <a:rot lat="0" lon="0" rev="0"/>
-            </a:camera>
-            <a:lightRig rig="threePt" dir="t">
-              <a:rot lat="0" lon="0" rev="1200000"/>
-            </a:lightRig>
-          </a:scene3d>
-          <a:sp3d>
-            <a:bevelT w="63500" h="25400"/>
-          </a:sp3d>
         </a:effectStyle>
       </a:effectStyleLst>
       <a:bgFillStyleLst>
         <a:solidFill>
           <a:schemeClr val="phClr"/>
         </a:solidFill>
+        <a:solidFill>
+          <a:schemeClr val="phClr">
+            <a:tint val="95000"/>
+            <a:satMod val="170000"/>
+          </a:schemeClr>
+        </a:solidFill>
         <a:gradFill rotWithShape="1">
           <a:gsLst>
             <a:gs pos="0">
               <a:schemeClr val="phClr">
-                <a:tint val="40000"/>
-                <a:satMod val="350000"/>
+                <a:tint val="93000"/>
+                <a:satMod val="150000"/>
+                <a:shade val="98000"/>
+                <a:lumMod val="102000"/>
               </a:schemeClr>
             </a:gs>
-            <a:gs pos="40000">
+            <a:gs pos="50000">
               <a:schemeClr val="phClr">
-                <a:tint val="45000"/>
-                <a:shade val="99000"/>
-                <a:satMod val="350000"/>
+                <a:tint val="98000"/>
+                <a:satMod val="130000"/>
+                <a:shade val="90000"/>
+                <a:lumMod val="103000"/>
               </a:schemeClr>
             </a:gs>
             <a:gs pos="100000">
               <a:schemeClr val="phClr">
-                <a:shade val="20000"/>
-                <a:satMod val="255000"/>
+                <a:shade val="63000"/>
+                <a:satMod val="120000"/>
               </a:schemeClr>
             </a:gs>
           </a:gsLst>
-          <a:path path="circle">
-            <a:fillToRect l="50000" t="-80000" r="50000" b="180000"/>
-          </a:path>
-        </a:gradFill>
-        <a:gradFill rotWithShape="1">
-          <a:gsLst>
-            <a:gs pos="0">
-              <a:schemeClr val="phClr">
-                <a:tint val="80000"/>
-                <a:satMod val="300000"/>
-              </a:schemeClr>
-            </a:gs>
-            <a:gs pos="100000">
-              <a:schemeClr val="phClr">
-                <a:shade val="30000"/>
-                <a:satMod val="200000"/>
-              </a:schemeClr>
-            </a:gs>
-          </a:gsLst>
-          <a:path path="circle">
-            <a:fillToRect l="50000" t="50000" r="50000" b="50000"/>
-          </a:path>
+          <a:lin ang="5400000" scaled="0"/>
         </a:gradFill>
       </a:bgFillStyleLst>
     </a:fmtScheme>
   </a:themeElements>
   <a:objectDefaults>
-    <a:spDef>
-      <a:spPr/>
-      <a:bodyPr/>
-      <a:lstStyle/>
-      <a:style>
-        <a:lnRef idx="1">
-          <a:schemeClr val="accent1"/>
-        </a:lnRef>
-        <a:fillRef idx="3">
-          <a:schemeClr val="accent1"/>
-        </a:fillRef>
-        <a:effectRef idx="2">
-          <a:schemeClr val="accent1"/>
-        </a:effectRef>
-        <a:fontRef idx="minor">
-          <a:schemeClr val="lt1"/>
-        </a:fontRef>
-      </a:style>
-    </a:spDef>
     <a:lnDef>
       <a:spPr/>
       <a:bodyPr/>
@@ -15429,5 +14780,10 @@
     </a:lnDef>
   </a:objectDefaults>
   <a:extraClrSchemeLst/>
+  <a:extLst>
+    <a:ext uri="{05A4C25C-085E-4340-85A3-A5531E510DB2}">
+      <thm15:themeFamily xmlns:thm15="http://schemas.microsoft.com/office/thememl/2012/main" name="Office Theme" id="{2E142A2C-CD16-42D6-873A-C26D2A0506FA}" vid="{1BDDFF52-6CD6-40A5-AB3C-68EB2F1E4D0A}"/>
+    </a:ext>
+  </a:extLst>
 </a:theme>
 </file>